--- a/FinalPresentation.pptx
+++ b/FinalPresentation.pptx
@@ -1,31 +1,34 @@
 
 <file path=ppt/presentation.xml><?xml version="1.0" encoding="utf-8"?>
-<p:presentation xmlns:a="http://schemas.openxmlformats.org/drawingml/2006/main" xmlns:r="http://schemas.openxmlformats.org/officeDocument/2006/relationships" xmlns:p="http://schemas.openxmlformats.org/presentationml/2006/main" saveSubsetFonts="1" embedTrueTypeFonts="true">
+<p:presentation xmlns:a="http://schemas.openxmlformats.org/drawingml/2006/main" xmlns:r="http://schemas.openxmlformats.org/officeDocument/2006/relationships" xmlns:p="http://schemas.openxmlformats.org/presentationml/2006/main" embedTrueTypeFonts="1" saveSubsetFonts="1">
   <p:sldMasterIdLst>
     <p:sldMasterId id="2147483648" r:id="rId1"/>
   </p:sldMasterIdLst>
+  <p:notesMasterIdLst>
+    <p:notesMasterId r:id="rId12"/>
+  </p:notesMasterIdLst>
   <p:sldIdLst>
-    <p:sldId id="256" r:id="rId6"/>
-    <p:sldId id="257" r:id="rId7"/>
-    <p:sldId id="258" r:id="rId8"/>
-    <p:sldId id="259" r:id="rId9"/>
-    <p:sldId id="260" r:id="rId10"/>
-    <p:sldId id="261" r:id="rId11"/>
-    <p:sldId id="262" r:id="rId12"/>
-    <p:sldId id="263" r:id="rId13"/>
-    <p:sldId id="264" r:id="rId14"/>
-    <p:sldId id="265" r:id="rId15"/>
+    <p:sldId id="256" r:id="rId2"/>
+    <p:sldId id="257" r:id="rId3"/>
+    <p:sldId id="258" r:id="rId4"/>
+    <p:sldId id="259" r:id="rId5"/>
+    <p:sldId id="260" r:id="rId6"/>
+    <p:sldId id="261" r:id="rId7"/>
+    <p:sldId id="262" r:id="rId8"/>
+    <p:sldId id="263" r:id="rId9"/>
+    <p:sldId id="264" r:id="rId10"/>
+    <p:sldId id="265" r:id="rId11"/>
   </p:sldIdLst>
   <p:sldSz cx="18288000" cy="10287000"/>
   <p:notesSz cx="6858000" cy="9144000"/>
   <p:embeddedFontLst>
     <p:embeddedFont>
-      <p:font typeface="ITC Avant Garde Gothic" charset="1" panose="020B0502020202020204"/>
-      <p:regular r:id="rId16"/>
+      <p:font typeface="ITC Avant Garde Gothic" panose="020B0502020202020204" pitchFamily="34" charset="77"/>
+      <p:regular r:id=""/>
     </p:embeddedFont>
     <p:embeddedFont>
-      <p:font typeface="TT Fors" charset="1" panose="020B0003030001020000"/>
-      <p:regular r:id="rId17"/>
+      <p:font typeface="TT Fors" panose="020B0003030001020000" pitchFamily="34" charset="0"/>
+      <p:regular r:id=""/>
     </p:embeddedFont>
   </p:embeddedFontLst>
   <p:defaultTextStyle>
@@ -123,7 +126,457 @@
       </a:defRPr>
     </a:lvl9pPr>
   </p:defaultTextStyle>
+  <p:extLst>
+    <p:ext uri="{EFAFB233-063F-42B5-8137-9DF3F51BA10A}">
+      <p15:sldGuideLst xmlns:p15="http://schemas.microsoft.com/office/powerpoint/2012/main">
+        <p15:guide id="1" orient="horz" pos="2160">
+          <p15:clr>
+            <a:srgbClr val="A4A3A4"/>
+          </p15:clr>
+        </p15:guide>
+        <p15:guide id="2" pos="2880">
+          <p15:clr>
+            <a:srgbClr val="A4A3A4"/>
+          </p15:clr>
+        </p15:guide>
+      </p15:sldGuideLst>
+    </p:ext>
+  </p:extLst>
 </p:presentation>
+</file>
+
+<file path=ppt/notesMasters/notesMaster1.xml><?xml version="1.0" encoding="utf-8"?>
+<p:notesMaster xmlns:a="http://schemas.openxmlformats.org/drawingml/2006/main" xmlns:r="http://schemas.openxmlformats.org/officeDocument/2006/relationships" xmlns:p="http://schemas.openxmlformats.org/presentationml/2006/main">
+  <p:cSld>
+    <p:bg>
+      <p:bgRef idx="1001">
+        <a:schemeClr val="bg1"/>
+      </p:bgRef>
+    </p:bg>
+    <p:spTree>
+      <p:nvGrpSpPr>
+        <p:cNvPr id="1" name=""/>
+        <p:cNvGrpSpPr/>
+        <p:nvPr/>
+      </p:nvGrpSpPr>
+      <p:grpSpPr>
+        <a:xfrm>
+          <a:off x="0" y="0"/>
+          <a:ext cx="0" cy="0"/>
+          <a:chOff x="0" y="0"/>
+          <a:chExt cx="0" cy="0"/>
+        </a:xfrm>
+      </p:grpSpPr>
+      <p:sp>
+        <p:nvSpPr>
+          <p:cNvPr id="2" name="Header Placeholder 1"/>
+          <p:cNvSpPr>
+            <a:spLocks noGrp="1"/>
+          </p:cNvSpPr>
+          <p:nvPr>
+            <p:ph type="hdr" sz="quarter"/>
+          </p:nvPr>
+        </p:nvSpPr>
+        <p:spPr>
+          <a:xfrm>
+            <a:off x="0" y="0"/>
+            <a:ext cx="2971800" cy="458788"/>
+          </a:xfrm>
+          <a:prstGeom prst="rect">
+            <a:avLst/>
+          </a:prstGeom>
+        </p:spPr>
+        <p:txBody>
+          <a:bodyPr vert="horz" lIns="91440" tIns="45720" rIns="91440" bIns="45720" rtlCol="0"/>
+          <a:lstStyle>
+            <a:lvl1pPr algn="l">
+              <a:defRPr sz="1200"/>
+            </a:lvl1pPr>
+          </a:lstStyle>
+          <a:p>
+            <a:endParaRPr lang="en-BG"/>
+          </a:p>
+        </p:txBody>
+      </p:sp>
+      <p:sp>
+        <p:nvSpPr>
+          <p:cNvPr id="3" name="Date Placeholder 2"/>
+          <p:cNvSpPr>
+            <a:spLocks noGrp="1"/>
+          </p:cNvSpPr>
+          <p:nvPr>
+            <p:ph type="dt" idx="1"/>
+          </p:nvPr>
+        </p:nvSpPr>
+        <p:spPr>
+          <a:xfrm>
+            <a:off x="3884613" y="0"/>
+            <a:ext cx="2971800" cy="458788"/>
+          </a:xfrm>
+          <a:prstGeom prst="rect">
+            <a:avLst/>
+          </a:prstGeom>
+        </p:spPr>
+        <p:txBody>
+          <a:bodyPr vert="horz" lIns="91440" tIns="45720" rIns="91440" bIns="45720" rtlCol="0"/>
+          <a:lstStyle>
+            <a:lvl1pPr algn="r">
+              <a:defRPr sz="1200"/>
+            </a:lvl1pPr>
+          </a:lstStyle>
+          <a:p>
+            <a:fld id="{819BC616-36B2-B541-A223-409310A8C91B}" type="datetimeFigureOut">
+              <a:rPr lang="en-BG" smtClean="0"/>
+              <a:t>29.11.25</a:t>
+            </a:fld>
+            <a:endParaRPr lang="en-BG"/>
+          </a:p>
+        </p:txBody>
+      </p:sp>
+      <p:sp>
+        <p:nvSpPr>
+          <p:cNvPr id="4" name="Slide Image Placeholder 3"/>
+          <p:cNvSpPr>
+            <a:spLocks noGrp="1" noRot="1" noChangeAspect="1"/>
+          </p:cNvSpPr>
+          <p:nvPr>
+            <p:ph type="sldImg" idx="2"/>
+          </p:nvPr>
+        </p:nvSpPr>
+        <p:spPr>
+          <a:xfrm>
+            <a:off x="685800" y="1143000"/>
+            <a:ext cx="5486400" cy="3086100"/>
+          </a:xfrm>
+          <a:prstGeom prst="rect">
+            <a:avLst/>
+          </a:prstGeom>
+          <a:noFill/>
+          <a:ln w="12700">
+            <a:solidFill>
+              <a:prstClr val="black"/>
+            </a:solidFill>
+          </a:ln>
+        </p:spPr>
+        <p:txBody>
+          <a:bodyPr vert="horz" lIns="91440" tIns="45720" rIns="91440" bIns="45720" rtlCol="0" anchor="ctr"/>
+          <a:lstStyle/>
+          <a:p>
+            <a:endParaRPr lang="en-BG"/>
+          </a:p>
+        </p:txBody>
+      </p:sp>
+      <p:sp>
+        <p:nvSpPr>
+          <p:cNvPr id="5" name="Notes Placeholder 4"/>
+          <p:cNvSpPr>
+            <a:spLocks noGrp="1"/>
+          </p:cNvSpPr>
+          <p:nvPr>
+            <p:ph type="body" sz="quarter" idx="3"/>
+          </p:nvPr>
+        </p:nvSpPr>
+        <p:spPr>
+          <a:xfrm>
+            <a:off x="685800" y="4400550"/>
+            <a:ext cx="5486400" cy="3600450"/>
+          </a:xfrm>
+          <a:prstGeom prst="rect">
+            <a:avLst/>
+          </a:prstGeom>
+        </p:spPr>
+        <p:txBody>
+          <a:bodyPr vert="horz" lIns="91440" tIns="45720" rIns="91440" bIns="45720" rtlCol="0"/>
+          <a:lstStyle/>
+          <a:p>
+            <a:pPr lvl="0"/>
+            <a:r>
+              <a:rPr lang="en-GB"/>
+              <a:t>Click to edit Master text styles</a:t>
+            </a:r>
+          </a:p>
+          <a:p>
+            <a:pPr lvl="1"/>
+            <a:r>
+              <a:rPr lang="en-GB"/>
+              <a:t>Second level</a:t>
+            </a:r>
+          </a:p>
+          <a:p>
+            <a:pPr lvl="2"/>
+            <a:r>
+              <a:rPr lang="en-GB"/>
+              <a:t>Third level</a:t>
+            </a:r>
+          </a:p>
+          <a:p>
+            <a:pPr lvl="3"/>
+            <a:r>
+              <a:rPr lang="en-GB"/>
+              <a:t>Fourth level</a:t>
+            </a:r>
+          </a:p>
+          <a:p>
+            <a:pPr lvl="4"/>
+            <a:r>
+              <a:rPr lang="en-GB"/>
+              <a:t>Fifth level</a:t>
+            </a:r>
+            <a:endParaRPr lang="en-BG"/>
+          </a:p>
+        </p:txBody>
+      </p:sp>
+      <p:sp>
+        <p:nvSpPr>
+          <p:cNvPr id="6" name="Footer Placeholder 5"/>
+          <p:cNvSpPr>
+            <a:spLocks noGrp="1"/>
+          </p:cNvSpPr>
+          <p:nvPr>
+            <p:ph type="ftr" sz="quarter" idx="4"/>
+          </p:nvPr>
+        </p:nvSpPr>
+        <p:spPr>
+          <a:xfrm>
+            <a:off x="0" y="8685213"/>
+            <a:ext cx="2971800" cy="458787"/>
+          </a:xfrm>
+          <a:prstGeom prst="rect">
+            <a:avLst/>
+          </a:prstGeom>
+        </p:spPr>
+        <p:txBody>
+          <a:bodyPr vert="horz" lIns="91440" tIns="45720" rIns="91440" bIns="45720" rtlCol="0" anchor="b"/>
+          <a:lstStyle>
+            <a:lvl1pPr algn="l">
+              <a:defRPr sz="1200"/>
+            </a:lvl1pPr>
+          </a:lstStyle>
+          <a:p>
+            <a:endParaRPr lang="en-BG"/>
+          </a:p>
+        </p:txBody>
+      </p:sp>
+      <p:sp>
+        <p:nvSpPr>
+          <p:cNvPr id="7" name="Slide Number Placeholder 6"/>
+          <p:cNvSpPr>
+            <a:spLocks noGrp="1"/>
+          </p:cNvSpPr>
+          <p:nvPr>
+            <p:ph type="sldNum" sz="quarter" idx="5"/>
+          </p:nvPr>
+        </p:nvSpPr>
+        <p:spPr>
+          <a:xfrm>
+            <a:off x="3884613" y="8685213"/>
+            <a:ext cx="2971800" cy="458787"/>
+          </a:xfrm>
+          <a:prstGeom prst="rect">
+            <a:avLst/>
+          </a:prstGeom>
+        </p:spPr>
+        <p:txBody>
+          <a:bodyPr vert="horz" lIns="91440" tIns="45720" rIns="91440" bIns="45720" rtlCol="0" anchor="b"/>
+          <a:lstStyle>
+            <a:lvl1pPr algn="r">
+              <a:defRPr sz="1200"/>
+            </a:lvl1pPr>
+          </a:lstStyle>
+          <a:p>
+            <a:fld id="{5FEF94C7-AC47-9040-9BFA-4275F4F892B9}" type="slidenum">
+              <a:rPr lang="en-BG" smtClean="0"/>
+              <a:t>‹#›</a:t>
+            </a:fld>
+            <a:endParaRPr lang="en-BG"/>
+          </a:p>
+        </p:txBody>
+      </p:sp>
+    </p:spTree>
+    <p:extLst>
+      <p:ext uri="{BB962C8B-B14F-4D97-AF65-F5344CB8AC3E}">
+        <p14:creationId xmlns:p14="http://schemas.microsoft.com/office/powerpoint/2010/main" val="1600740024"/>
+      </p:ext>
+    </p:extLst>
+  </p:cSld>
+  <p:clrMap bg1="lt1" tx1="dk1" bg2="lt2" tx2="dk2" accent1="accent1" accent2="accent2" accent3="accent3" accent4="accent4" accent5="accent5" accent6="accent6" hlink="hlink" folHlink="folHlink"/>
+  <p:notesStyle>
+    <a:lvl1pPr marL="0" algn="l" defTabSz="914400" rtl="0" eaLnBrk="1" latinLnBrk="0" hangingPunct="1">
+      <a:defRPr sz="1200" kern="1200">
+        <a:solidFill>
+          <a:schemeClr val="tx1"/>
+        </a:solidFill>
+        <a:latin typeface="+mn-lt"/>
+        <a:ea typeface="+mn-ea"/>
+        <a:cs typeface="+mn-cs"/>
+      </a:defRPr>
+    </a:lvl1pPr>
+    <a:lvl2pPr marL="457200" algn="l" defTabSz="914400" rtl="0" eaLnBrk="1" latinLnBrk="0" hangingPunct="1">
+      <a:defRPr sz="1200" kern="1200">
+        <a:solidFill>
+          <a:schemeClr val="tx1"/>
+        </a:solidFill>
+        <a:latin typeface="+mn-lt"/>
+        <a:ea typeface="+mn-ea"/>
+        <a:cs typeface="+mn-cs"/>
+      </a:defRPr>
+    </a:lvl2pPr>
+    <a:lvl3pPr marL="914400" algn="l" defTabSz="914400" rtl="0" eaLnBrk="1" latinLnBrk="0" hangingPunct="1">
+      <a:defRPr sz="1200" kern="1200">
+        <a:solidFill>
+          <a:schemeClr val="tx1"/>
+        </a:solidFill>
+        <a:latin typeface="+mn-lt"/>
+        <a:ea typeface="+mn-ea"/>
+        <a:cs typeface="+mn-cs"/>
+      </a:defRPr>
+    </a:lvl3pPr>
+    <a:lvl4pPr marL="1371600" algn="l" defTabSz="914400" rtl="0" eaLnBrk="1" latinLnBrk="0" hangingPunct="1">
+      <a:defRPr sz="1200" kern="1200">
+        <a:solidFill>
+          <a:schemeClr val="tx1"/>
+        </a:solidFill>
+        <a:latin typeface="+mn-lt"/>
+        <a:ea typeface="+mn-ea"/>
+        <a:cs typeface="+mn-cs"/>
+      </a:defRPr>
+    </a:lvl4pPr>
+    <a:lvl5pPr marL="1828800" algn="l" defTabSz="914400" rtl="0" eaLnBrk="1" latinLnBrk="0" hangingPunct="1">
+      <a:defRPr sz="1200" kern="1200">
+        <a:solidFill>
+          <a:schemeClr val="tx1"/>
+        </a:solidFill>
+        <a:latin typeface="+mn-lt"/>
+        <a:ea typeface="+mn-ea"/>
+        <a:cs typeface="+mn-cs"/>
+      </a:defRPr>
+    </a:lvl5pPr>
+    <a:lvl6pPr marL="2286000" algn="l" defTabSz="914400" rtl="0" eaLnBrk="1" latinLnBrk="0" hangingPunct="1">
+      <a:defRPr sz="1200" kern="1200">
+        <a:solidFill>
+          <a:schemeClr val="tx1"/>
+        </a:solidFill>
+        <a:latin typeface="+mn-lt"/>
+        <a:ea typeface="+mn-ea"/>
+        <a:cs typeface="+mn-cs"/>
+      </a:defRPr>
+    </a:lvl6pPr>
+    <a:lvl7pPr marL="2743200" algn="l" defTabSz="914400" rtl="0" eaLnBrk="1" latinLnBrk="0" hangingPunct="1">
+      <a:defRPr sz="1200" kern="1200">
+        <a:solidFill>
+          <a:schemeClr val="tx1"/>
+        </a:solidFill>
+        <a:latin typeface="+mn-lt"/>
+        <a:ea typeface="+mn-ea"/>
+        <a:cs typeface="+mn-cs"/>
+      </a:defRPr>
+    </a:lvl7pPr>
+    <a:lvl8pPr marL="3200400" algn="l" defTabSz="914400" rtl="0" eaLnBrk="1" latinLnBrk="0" hangingPunct="1">
+      <a:defRPr sz="1200" kern="1200">
+        <a:solidFill>
+          <a:schemeClr val="tx1"/>
+        </a:solidFill>
+        <a:latin typeface="+mn-lt"/>
+        <a:ea typeface="+mn-ea"/>
+        <a:cs typeface="+mn-cs"/>
+      </a:defRPr>
+    </a:lvl8pPr>
+    <a:lvl9pPr marL="3657600" algn="l" defTabSz="914400" rtl="0" eaLnBrk="1" latinLnBrk="0" hangingPunct="1">
+      <a:defRPr sz="1200" kern="1200">
+        <a:solidFill>
+          <a:schemeClr val="tx1"/>
+        </a:solidFill>
+        <a:latin typeface="+mn-lt"/>
+        <a:ea typeface="+mn-ea"/>
+        <a:cs typeface="+mn-cs"/>
+      </a:defRPr>
+    </a:lvl9pPr>
+  </p:notesStyle>
+</p:notesMaster>
+</file>
+
+<file path=ppt/notesSlides/notesSlide1.xml><?xml version="1.0" encoding="utf-8"?>
+<p:notes xmlns:a="http://schemas.openxmlformats.org/drawingml/2006/main" xmlns:r="http://schemas.openxmlformats.org/officeDocument/2006/relationships" xmlns:p="http://schemas.openxmlformats.org/presentationml/2006/main">
+  <p:cSld>
+    <p:spTree>
+      <p:nvGrpSpPr>
+        <p:cNvPr id="1" name=""/>
+        <p:cNvGrpSpPr/>
+        <p:nvPr/>
+      </p:nvGrpSpPr>
+      <p:grpSpPr>
+        <a:xfrm>
+          <a:off x="0" y="0"/>
+          <a:ext cx="0" cy="0"/>
+          <a:chOff x="0" y="0"/>
+          <a:chExt cx="0" cy="0"/>
+        </a:xfrm>
+      </p:grpSpPr>
+      <p:sp>
+        <p:nvSpPr>
+          <p:cNvPr id="2" name="Slide Image Placeholder 1"/>
+          <p:cNvSpPr>
+            <a:spLocks noGrp="1" noRot="1" noChangeAspect="1"/>
+          </p:cNvSpPr>
+          <p:nvPr>
+            <p:ph type="sldImg"/>
+          </p:nvPr>
+        </p:nvSpPr>
+        <p:spPr/>
+      </p:sp>
+      <p:sp>
+        <p:nvSpPr>
+          <p:cNvPr id="3" name="Notes Placeholder 2"/>
+          <p:cNvSpPr>
+            <a:spLocks noGrp="1"/>
+          </p:cNvSpPr>
+          <p:nvPr>
+            <p:ph type="body" idx="1"/>
+          </p:nvPr>
+        </p:nvSpPr>
+        <p:spPr/>
+        <p:txBody>
+          <a:bodyPr/>
+          <a:lstStyle/>
+          <a:p>
+            <a:endParaRPr lang="en-BG" dirty="0"/>
+          </a:p>
+        </p:txBody>
+      </p:sp>
+      <p:sp>
+        <p:nvSpPr>
+          <p:cNvPr id="4" name="Slide Number Placeholder 3"/>
+          <p:cNvSpPr>
+            <a:spLocks noGrp="1"/>
+          </p:cNvSpPr>
+          <p:nvPr>
+            <p:ph type="sldNum" sz="quarter" idx="5"/>
+          </p:nvPr>
+        </p:nvSpPr>
+        <p:spPr/>
+        <p:txBody>
+          <a:bodyPr/>
+          <a:lstStyle/>
+          <a:p>
+            <a:fld id="{5FEF94C7-AC47-9040-9BFA-4275F4F892B9}" type="slidenum">
+              <a:rPr lang="en-BG" smtClean="0"/>
+              <a:t>9</a:t>
+            </a:fld>
+            <a:endParaRPr lang="en-BG"/>
+          </a:p>
+        </p:txBody>
+      </p:sp>
+    </p:spTree>
+    <p:extLst>
+      <p:ext uri="{BB962C8B-B14F-4D97-AF65-F5344CB8AC3E}">
+        <p14:creationId xmlns:p14="http://schemas.microsoft.com/office/powerpoint/2010/main" val="2925584468"/>
+      </p:ext>
+    </p:extLst>
+  </p:cSld>
+  <p:clrMapOvr>
+    <a:masterClrMapping/>
+  </p:clrMapOvr>
+</p:notes>
 </file>
 
 <file path=ppt/slideLayouts/slideLayout1.xml><?xml version="1.0" encoding="utf-8"?>
@@ -164,10 +617,9 @@
           <a:lstStyle/>
           <a:p>
             <a:r>
-              <a:rPr lang="en-US" smtClean="0"/>
+              <a:rPr lang="en-US"/>
               <a:t>Click to edit Master title style</a:t>
             </a:r>
-            <a:endParaRPr lang="en-US"/>
           </a:p>
         </p:txBody>
       </p:sp>
@@ -283,10 +735,9 @@
           </a:lstStyle>
           <a:p>
             <a:r>
-              <a:rPr lang="en-US" smtClean="0"/>
+              <a:rPr lang="en-US"/>
               <a:t>Click to edit Master subtitle style</a:t>
             </a:r>
-            <a:endParaRPr lang="en-US"/>
           </a:p>
         </p:txBody>
       </p:sp>
@@ -308,7 +759,7 @@
             <a:fld id="{1D8BD707-D9CF-40AE-B4C6-C98DA3205C09}" type="datetimeFigureOut">
               <a:rPr lang="en-US" smtClean="0"/>
               <a:pPr/>
-              <a:t>8/1/2011</a:t>
+              <a:t>11/29/25</a:t>
             </a:fld>
             <a:endParaRPr lang="en-US"/>
           </a:p>
@@ -398,10 +849,9 @@
           <a:lstStyle/>
           <a:p>
             <a:r>
-              <a:rPr lang="en-US" smtClean="0"/>
+              <a:rPr lang="en-US"/>
               <a:t>Click to edit Master title style</a:t>
             </a:r>
-            <a:endParaRPr lang="en-US"/>
           </a:p>
         </p:txBody>
       </p:sp>
@@ -422,38 +872,37 @@
           <a:p>
             <a:pPr lvl="0"/>
             <a:r>
-              <a:rPr lang="en-US" smtClean="0"/>
+              <a:rPr lang="en-US"/>
               <a:t>Click to edit Master text styles</a:t>
             </a:r>
           </a:p>
           <a:p>
             <a:pPr lvl="1"/>
             <a:r>
-              <a:rPr lang="en-US" smtClean="0"/>
+              <a:rPr lang="en-US"/>
               <a:t>Second level</a:t>
             </a:r>
           </a:p>
           <a:p>
             <a:pPr lvl="2"/>
             <a:r>
-              <a:rPr lang="en-US" smtClean="0"/>
+              <a:rPr lang="en-US"/>
               <a:t>Third level</a:t>
             </a:r>
           </a:p>
           <a:p>
             <a:pPr lvl="3"/>
             <a:r>
-              <a:rPr lang="en-US" smtClean="0"/>
+              <a:rPr lang="en-US"/>
               <a:t>Fourth level</a:t>
             </a:r>
           </a:p>
           <a:p>
             <a:pPr lvl="4"/>
             <a:r>
-              <a:rPr lang="en-US" smtClean="0"/>
+              <a:rPr lang="en-US"/>
               <a:t>Fifth level</a:t>
             </a:r>
-            <a:endParaRPr lang="en-US"/>
           </a:p>
         </p:txBody>
       </p:sp>
@@ -475,7 +924,7 @@
             <a:fld id="{1D8BD707-D9CF-40AE-B4C6-C98DA3205C09}" type="datetimeFigureOut">
               <a:rPr lang="en-US" smtClean="0"/>
               <a:pPr/>
-              <a:t>8/1/2011</a:t>
+              <a:t>11/29/25</a:t>
             </a:fld>
             <a:endParaRPr lang="en-US"/>
           </a:p>
@@ -570,10 +1019,9 @@
           <a:lstStyle/>
           <a:p>
             <a:r>
-              <a:rPr lang="en-US" smtClean="0"/>
+              <a:rPr lang="en-US"/>
               <a:t>Click to edit Master title style</a:t>
             </a:r>
-            <a:endParaRPr lang="en-US"/>
           </a:p>
         </p:txBody>
       </p:sp>
@@ -599,38 +1047,37 @@
           <a:p>
             <a:pPr lvl="0"/>
             <a:r>
-              <a:rPr lang="en-US" smtClean="0"/>
+              <a:rPr lang="en-US"/>
               <a:t>Click to edit Master text styles</a:t>
             </a:r>
           </a:p>
           <a:p>
             <a:pPr lvl="1"/>
             <a:r>
-              <a:rPr lang="en-US" smtClean="0"/>
+              <a:rPr lang="en-US"/>
               <a:t>Second level</a:t>
             </a:r>
           </a:p>
           <a:p>
             <a:pPr lvl="2"/>
             <a:r>
-              <a:rPr lang="en-US" smtClean="0"/>
+              <a:rPr lang="en-US"/>
               <a:t>Third level</a:t>
             </a:r>
           </a:p>
           <a:p>
             <a:pPr lvl="3"/>
             <a:r>
-              <a:rPr lang="en-US" smtClean="0"/>
+              <a:rPr lang="en-US"/>
               <a:t>Fourth level</a:t>
             </a:r>
           </a:p>
           <a:p>
             <a:pPr lvl="4"/>
             <a:r>
-              <a:rPr lang="en-US" smtClean="0"/>
+              <a:rPr lang="en-US"/>
               <a:t>Fifth level</a:t>
             </a:r>
-            <a:endParaRPr lang="en-US"/>
           </a:p>
         </p:txBody>
       </p:sp>
@@ -652,7 +1099,7 @@
             <a:fld id="{1D8BD707-D9CF-40AE-B4C6-C98DA3205C09}" type="datetimeFigureOut">
               <a:rPr lang="en-US" smtClean="0"/>
               <a:pPr/>
-              <a:t>8/1/2011</a:t>
+              <a:t>11/29/25</a:t>
             </a:fld>
             <a:endParaRPr lang="en-US"/>
           </a:p>
@@ -742,10 +1189,9 @@
           <a:lstStyle/>
           <a:p>
             <a:r>
-              <a:rPr lang="en-US" smtClean="0"/>
+              <a:rPr lang="en-US"/>
               <a:t>Click to edit Master title style</a:t>
             </a:r>
-            <a:endParaRPr lang="en-US"/>
           </a:p>
         </p:txBody>
       </p:sp>
@@ -766,38 +1212,37 @@
           <a:p>
             <a:pPr lvl="0"/>
             <a:r>
-              <a:rPr lang="en-US" smtClean="0"/>
+              <a:rPr lang="en-US"/>
               <a:t>Click to edit Master text styles</a:t>
             </a:r>
           </a:p>
           <a:p>
             <a:pPr lvl="1"/>
             <a:r>
-              <a:rPr lang="en-US" smtClean="0"/>
+              <a:rPr lang="en-US"/>
               <a:t>Second level</a:t>
             </a:r>
           </a:p>
           <a:p>
             <a:pPr lvl="2"/>
             <a:r>
-              <a:rPr lang="en-US" smtClean="0"/>
+              <a:rPr lang="en-US"/>
               <a:t>Third level</a:t>
             </a:r>
           </a:p>
           <a:p>
             <a:pPr lvl="3"/>
             <a:r>
-              <a:rPr lang="en-US" smtClean="0"/>
+              <a:rPr lang="en-US"/>
               <a:t>Fourth level</a:t>
             </a:r>
           </a:p>
           <a:p>
             <a:pPr lvl="4"/>
             <a:r>
-              <a:rPr lang="en-US" smtClean="0"/>
+              <a:rPr lang="en-US"/>
               <a:t>Fifth level</a:t>
             </a:r>
-            <a:endParaRPr lang="en-US"/>
           </a:p>
         </p:txBody>
       </p:sp>
@@ -819,7 +1264,7 @@
             <a:fld id="{1D8BD707-D9CF-40AE-B4C6-C98DA3205C09}" type="datetimeFigureOut">
               <a:rPr lang="en-US" smtClean="0"/>
               <a:pPr/>
-              <a:t>8/1/2011</a:t>
+              <a:t>11/29/25</a:t>
             </a:fld>
             <a:endParaRPr lang="en-US"/>
           </a:p>
@@ -918,10 +1363,9 @@
           </a:lstStyle>
           <a:p>
             <a:r>
-              <a:rPr lang="en-US" smtClean="0"/>
+              <a:rPr lang="en-US"/>
               <a:t>Click to edit Master title style</a:t>
             </a:r>
-            <a:endParaRPr lang="en-US"/>
           </a:p>
         </p:txBody>
       </p:sp>
@@ -1038,7 +1482,7 @@
           <a:p>
             <a:pPr lvl="0"/>
             <a:r>
-              <a:rPr lang="en-US" smtClean="0"/>
+              <a:rPr lang="en-US"/>
               <a:t>Click to edit Master text styles</a:t>
             </a:r>
           </a:p>
@@ -1062,7 +1506,7 @@
             <a:fld id="{1D8BD707-D9CF-40AE-B4C6-C98DA3205C09}" type="datetimeFigureOut">
               <a:rPr lang="en-US" smtClean="0"/>
               <a:pPr/>
-              <a:t>8/1/2011</a:t>
+              <a:t>11/29/25</a:t>
             </a:fld>
             <a:endParaRPr lang="en-US"/>
           </a:p>
@@ -1152,10 +1596,9 @@
           <a:lstStyle/>
           <a:p>
             <a:r>
-              <a:rPr lang="en-US" smtClean="0"/>
+              <a:rPr lang="en-US"/>
               <a:t>Click to edit Master title style</a:t>
             </a:r>
-            <a:endParaRPr lang="en-US"/>
           </a:p>
         </p:txBody>
       </p:sp>
@@ -1209,38 +1652,37 @@
           <a:p>
             <a:pPr lvl="0"/>
             <a:r>
-              <a:rPr lang="en-US" smtClean="0"/>
+              <a:rPr lang="en-US"/>
               <a:t>Click to edit Master text styles</a:t>
             </a:r>
           </a:p>
           <a:p>
             <a:pPr lvl="1"/>
             <a:r>
-              <a:rPr lang="en-US" smtClean="0"/>
+              <a:rPr lang="en-US"/>
               <a:t>Second level</a:t>
             </a:r>
           </a:p>
           <a:p>
             <a:pPr lvl="2"/>
             <a:r>
-              <a:rPr lang="en-US" smtClean="0"/>
+              <a:rPr lang="en-US"/>
               <a:t>Third level</a:t>
             </a:r>
           </a:p>
           <a:p>
             <a:pPr lvl="3"/>
             <a:r>
-              <a:rPr lang="en-US" smtClean="0"/>
+              <a:rPr lang="en-US"/>
               <a:t>Fourth level</a:t>
             </a:r>
           </a:p>
           <a:p>
             <a:pPr lvl="4"/>
             <a:r>
-              <a:rPr lang="en-US" smtClean="0"/>
+              <a:rPr lang="en-US"/>
               <a:t>Fifth level</a:t>
             </a:r>
-            <a:endParaRPr lang="en-US"/>
           </a:p>
         </p:txBody>
       </p:sp>
@@ -1294,38 +1736,37 @@
           <a:p>
             <a:pPr lvl="0"/>
             <a:r>
-              <a:rPr lang="en-US" smtClean="0"/>
+              <a:rPr lang="en-US"/>
               <a:t>Click to edit Master text styles</a:t>
             </a:r>
           </a:p>
           <a:p>
             <a:pPr lvl="1"/>
             <a:r>
-              <a:rPr lang="en-US" smtClean="0"/>
+              <a:rPr lang="en-US"/>
               <a:t>Second level</a:t>
             </a:r>
           </a:p>
           <a:p>
             <a:pPr lvl="2"/>
             <a:r>
-              <a:rPr lang="en-US" smtClean="0"/>
+              <a:rPr lang="en-US"/>
               <a:t>Third level</a:t>
             </a:r>
           </a:p>
           <a:p>
             <a:pPr lvl="3"/>
             <a:r>
-              <a:rPr lang="en-US" smtClean="0"/>
+              <a:rPr lang="en-US"/>
               <a:t>Fourth level</a:t>
             </a:r>
           </a:p>
           <a:p>
             <a:pPr lvl="4"/>
             <a:r>
-              <a:rPr lang="en-US" smtClean="0"/>
+              <a:rPr lang="en-US"/>
               <a:t>Fifth level</a:t>
             </a:r>
-            <a:endParaRPr lang="en-US"/>
           </a:p>
         </p:txBody>
       </p:sp>
@@ -1347,7 +1788,7 @@
             <a:fld id="{1D8BD707-D9CF-40AE-B4C6-C98DA3205C09}" type="datetimeFigureOut">
               <a:rPr lang="en-US" smtClean="0"/>
               <a:pPr/>
-              <a:t>8/1/2011</a:t>
+              <a:t>11/29/25</a:t>
             </a:fld>
             <a:endParaRPr lang="en-US"/>
           </a:p>
@@ -1441,10 +1882,9 @@
           </a:lstStyle>
           <a:p>
             <a:r>
-              <a:rPr lang="en-US" smtClean="0"/>
+              <a:rPr lang="en-US"/>
               <a:t>Click to edit Master title style</a:t>
             </a:r>
-            <a:endParaRPr lang="en-US"/>
           </a:p>
         </p:txBody>
       </p:sp>
@@ -1507,7 +1947,7 @@
           <a:p>
             <a:pPr lvl="0"/>
             <a:r>
-              <a:rPr lang="en-US" smtClean="0"/>
+              <a:rPr lang="en-US"/>
               <a:t>Click to edit Master text styles</a:t>
             </a:r>
           </a:p>
@@ -1563,38 +2003,37 @@
           <a:p>
             <a:pPr lvl="0"/>
             <a:r>
-              <a:rPr lang="en-US" smtClean="0"/>
+              <a:rPr lang="en-US"/>
               <a:t>Click to edit Master text styles</a:t>
             </a:r>
           </a:p>
           <a:p>
             <a:pPr lvl="1"/>
             <a:r>
-              <a:rPr lang="en-US" smtClean="0"/>
+              <a:rPr lang="en-US"/>
               <a:t>Second level</a:t>
             </a:r>
           </a:p>
           <a:p>
             <a:pPr lvl="2"/>
             <a:r>
-              <a:rPr lang="en-US" smtClean="0"/>
+              <a:rPr lang="en-US"/>
               <a:t>Third level</a:t>
             </a:r>
           </a:p>
           <a:p>
             <a:pPr lvl="3"/>
             <a:r>
-              <a:rPr lang="en-US" smtClean="0"/>
+              <a:rPr lang="en-US"/>
               <a:t>Fourth level</a:t>
             </a:r>
           </a:p>
           <a:p>
             <a:pPr lvl="4"/>
             <a:r>
-              <a:rPr lang="en-US" smtClean="0"/>
+              <a:rPr lang="en-US"/>
               <a:t>Fifth level</a:t>
             </a:r>
-            <a:endParaRPr lang="en-US"/>
           </a:p>
         </p:txBody>
       </p:sp>
@@ -1657,7 +2096,7 @@
           <a:p>
             <a:pPr lvl="0"/>
             <a:r>
-              <a:rPr lang="en-US" smtClean="0"/>
+              <a:rPr lang="en-US"/>
               <a:t>Click to edit Master text styles</a:t>
             </a:r>
           </a:p>
@@ -1713,38 +2152,37 @@
           <a:p>
             <a:pPr lvl="0"/>
             <a:r>
-              <a:rPr lang="en-US" smtClean="0"/>
+              <a:rPr lang="en-US"/>
               <a:t>Click to edit Master text styles</a:t>
             </a:r>
           </a:p>
           <a:p>
             <a:pPr lvl="1"/>
             <a:r>
-              <a:rPr lang="en-US" smtClean="0"/>
+              <a:rPr lang="en-US"/>
               <a:t>Second level</a:t>
             </a:r>
           </a:p>
           <a:p>
             <a:pPr lvl="2"/>
             <a:r>
-              <a:rPr lang="en-US" smtClean="0"/>
+              <a:rPr lang="en-US"/>
               <a:t>Third level</a:t>
             </a:r>
           </a:p>
           <a:p>
             <a:pPr lvl="3"/>
             <a:r>
-              <a:rPr lang="en-US" smtClean="0"/>
+              <a:rPr lang="en-US"/>
               <a:t>Fourth level</a:t>
             </a:r>
           </a:p>
           <a:p>
             <a:pPr lvl="4"/>
             <a:r>
-              <a:rPr lang="en-US" smtClean="0"/>
+              <a:rPr lang="en-US"/>
               <a:t>Fifth level</a:t>
             </a:r>
-            <a:endParaRPr lang="en-US"/>
           </a:p>
         </p:txBody>
       </p:sp>
@@ -1766,7 +2204,7 @@
             <a:fld id="{1D8BD707-D9CF-40AE-B4C6-C98DA3205C09}" type="datetimeFigureOut">
               <a:rPr lang="en-US" smtClean="0"/>
               <a:pPr/>
-              <a:t>8/1/2011</a:t>
+              <a:t>11/29/25</a:t>
             </a:fld>
             <a:endParaRPr lang="en-US"/>
           </a:p>
@@ -1856,10 +2294,9 @@
           <a:lstStyle/>
           <a:p>
             <a:r>
-              <a:rPr lang="en-US" smtClean="0"/>
+              <a:rPr lang="en-US"/>
               <a:t>Click to edit Master title style</a:t>
             </a:r>
-            <a:endParaRPr lang="en-US"/>
           </a:p>
         </p:txBody>
       </p:sp>
@@ -1881,7 +2318,7 @@
             <a:fld id="{1D8BD707-D9CF-40AE-B4C6-C98DA3205C09}" type="datetimeFigureOut">
               <a:rPr lang="en-US" smtClean="0"/>
               <a:pPr/>
-              <a:t>8/1/2011</a:t>
+              <a:t>11/29/25</a:t>
             </a:fld>
             <a:endParaRPr lang="en-US"/>
           </a:p>
@@ -1973,7 +2410,7 @@
             <a:fld id="{1D8BD707-D9CF-40AE-B4C6-C98DA3205C09}" type="datetimeFigureOut">
               <a:rPr lang="en-US" smtClean="0"/>
               <a:pPr/>
-              <a:t>8/1/2011</a:t>
+              <a:t>11/29/25</a:t>
             </a:fld>
             <a:endParaRPr lang="en-US"/>
           </a:p>
@@ -2072,10 +2509,9 @@
           </a:lstStyle>
           <a:p>
             <a:r>
-              <a:rPr lang="en-US" smtClean="0"/>
+              <a:rPr lang="en-US"/>
               <a:t>Click to edit Master title style</a:t>
             </a:r>
-            <a:endParaRPr lang="en-US"/>
           </a:p>
         </p:txBody>
       </p:sp>
@@ -2129,38 +2565,37 @@
           <a:p>
             <a:pPr lvl="0"/>
             <a:r>
-              <a:rPr lang="en-US" smtClean="0"/>
+              <a:rPr lang="en-US"/>
               <a:t>Click to edit Master text styles</a:t>
             </a:r>
           </a:p>
           <a:p>
             <a:pPr lvl="1"/>
             <a:r>
-              <a:rPr lang="en-US" smtClean="0"/>
+              <a:rPr lang="en-US"/>
               <a:t>Second level</a:t>
             </a:r>
           </a:p>
           <a:p>
             <a:pPr lvl="2"/>
             <a:r>
-              <a:rPr lang="en-US" smtClean="0"/>
+              <a:rPr lang="en-US"/>
               <a:t>Third level</a:t>
             </a:r>
           </a:p>
           <a:p>
             <a:pPr lvl="3"/>
             <a:r>
-              <a:rPr lang="en-US" smtClean="0"/>
+              <a:rPr lang="en-US"/>
               <a:t>Fourth level</a:t>
             </a:r>
           </a:p>
           <a:p>
             <a:pPr lvl="4"/>
             <a:r>
-              <a:rPr lang="en-US" smtClean="0"/>
+              <a:rPr lang="en-US"/>
               <a:t>Fifth level</a:t>
             </a:r>
-            <a:endParaRPr lang="en-US"/>
           </a:p>
         </p:txBody>
       </p:sp>
@@ -2223,7 +2658,7 @@
           <a:p>
             <a:pPr lvl="0"/>
             <a:r>
-              <a:rPr lang="en-US" smtClean="0"/>
+              <a:rPr lang="en-US"/>
               <a:t>Click to edit Master text styles</a:t>
             </a:r>
           </a:p>
@@ -2247,7 +2682,7 @@
             <a:fld id="{1D8BD707-D9CF-40AE-B4C6-C98DA3205C09}" type="datetimeFigureOut">
               <a:rPr lang="en-US" smtClean="0"/>
               <a:pPr/>
-              <a:t>8/1/2011</a:t>
+              <a:t>11/29/25</a:t>
             </a:fld>
             <a:endParaRPr lang="en-US"/>
           </a:p>
@@ -2346,10 +2781,9 @@
           </a:lstStyle>
           <a:p>
             <a:r>
-              <a:rPr lang="en-US" smtClean="0"/>
+              <a:rPr lang="en-US"/>
               <a:t>Click to edit Master title style</a:t>
             </a:r>
-            <a:endParaRPr lang="en-US"/>
           </a:p>
         </p:txBody>
       </p:sp>
@@ -2473,7 +2907,7 @@
           <a:p>
             <a:pPr lvl="0"/>
             <a:r>
-              <a:rPr lang="en-US" smtClean="0"/>
+              <a:rPr lang="en-US"/>
               <a:t>Click to edit Master text styles</a:t>
             </a:r>
           </a:p>
@@ -2497,7 +2931,7 @@
             <a:fld id="{1D8BD707-D9CF-40AE-B4C6-C98DA3205C09}" type="datetimeFigureOut">
               <a:rPr lang="en-US" smtClean="0"/>
               <a:pPr/>
-              <a:t>8/1/2011</a:t>
+              <a:t>11/29/25</a:t>
             </a:fld>
             <a:endParaRPr lang="en-US"/>
           </a:p>
@@ -2602,10 +3036,9 @@
           <a:lstStyle/>
           <a:p>
             <a:r>
-              <a:rPr lang="en-US" smtClean="0"/>
+              <a:rPr lang="en-US"/>
               <a:t>Click to edit Master title style</a:t>
             </a:r>
-            <a:endParaRPr lang="en-US"/>
           </a:p>
         </p:txBody>
       </p:sp>
@@ -2636,38 +3069,37 @@
           <a:p>
             <a:pPr lvl="0"/>
             <a:r>
-              <a:rPr lang="en-US" smtClean="0"/>
+              <a:rPr lang="en-US"/>
               <a:t>Click to edit Master text styles</a:t>
             </a:r>
           </a:p>
           <a:p>
             <a:pPr lvl="1"/>
             <a:r>
-              <a:rPr lang="en-US" smtClean="0"/>
+              <a:rPr lang="en-US"/>
               <a:t>Second level</a:t>
             </a:r>
           </a:p>
           <a:p>
             <a:pPr lvl="2"/>
             <a:r>
-              <a:rPr lang="en-US" smtClean="0"/>
+              <a:rPr lang="en-US"/>
               <a:t>Third level</a:t>
             </a:r>
           </a:p>
           <a:p>
             <a:pPr lvl="3"/>
             <a:r>
-              <a:rPr lang="en-US" smtClean="0"/>
+              <a:rPr lang="en-US"/>
               <a:t>Fourth level</a:t>
             </a:r>
           </a:p>
           <a:p>
             <a:pPr lvl="4"/>
             <a:r>
-              <a:rPr lang="en-US" smtClean="0"/>
+              <a:rPr lang="en-US"/>
               <a:t>Fifth level</a:t>
             </a:r>
-            <a:endParaRPr lang="en-US"/>
           </a:p>
         </p:txBody>
       </p:sp>
@@ -2707,7 +3139,7 @@
             <a:fld id="{1D8BD707-D9CF-40AE-B4C6-C98DA3205C09}" type="datetimeFigureOut">
               <a:rPr lang="en-US" smtClean="0"/>
               <a:pPr/>
-              <a:t>8/1/2011</a:t>
+              <a:t>11/29/25</a:t>
             </a:fld>
             <a:endParaRPr lang="en-US"/>
           </a:p>
@@ -3062,7 +3494,7 @@
 </file>
 
 <file path=ppt/slides/slide1.xml><?xml version="1.0" encoding="utf-8"?>
-<p:sld xmlns:p="http://schemas.openxmlformats.org/presentationml/2006/main" xmlns:a="http://schemas.openxmlformats.org/drawingml/2006/main" xmlns:r="http://schemas.openxmlformats.org/officeDocument/2006/relationships">
+<p:sld xmlns:a="http://schemas.openxmlformats.org/drawingml/2006/main" xmlns:r="http://schemas.openxmlformats.org/officeDocument/2006/relationships" xmlns:p="http://schemas.openxmlformats.org/presentationml/2006/main">
   <p:cSld>
     <p:spTree>
       <p:nvGrpSpPr>
@@ -3080,12 +3512,12 @@
       </p:grpSpPr>
       <p:grpSp>
         <p:nvGrpSpPr>
-          <p:cNvPr name="Group 2" id="2"/>
+          <p:cNvPr id="2" name="Group 2"/>
           <p:cNvGrpSpPr/>
           <p:nvPr/>
         </p:nvGrpSpPr>
         <p:grpSpPr>
-          <a:xfrm rot="0">
+          <a:xfrm>
             <a:off x="11868150" y="0"/>
             <a:ext cx="6419850" cy="10287000"/>
             <a:chOff x="0" y="0"/>
@@ -3094,12 +3526,12 @@
         </p:grpSpPr>
         <p:sp>
           <p:nvSpPr>
-            <p:cNvPr name="Freeform 3" id="3"/>
+            <p:cNvPr id="3" name="Freeform 3"/>
             <p:cNvSpPr/>
             <p:nvPr/>
           </p:nvSpPr>
           <p:spPr>
-            <a:xfrm flipH="false" flipV="false" rot="0">
+            <a:xfrm>
               <a:off x="0" y="0"/>
               <a:ext cx="994603" cy="1593725"/>
             </a:xfrm>
@@ -3108,9 +3540,9 @@
               <a:gdLst/>
               <a:ahLst/>
               <a:cxnLst/>
-              <a:rect r="r" b="b" t="t" l="l"/>
+              <a:rect l="l" t="t" r="r" b="b"/>
               <a:pathLst>
-                <a:path h="1593725" w="994603">
+                <a:path w="994603" h="1593725">
                   <a:moveTo>
                     <a:pt x="0" y="0"/>
                   </a:moveTo>
@@ -3128,9 +3560,9 @@
               </a:pathLst>
             </a:custGeom>
             <a:blipFill>
-              <a:blip r:embed="rId2"/>
+              <a:blip/>
               <a:stretch>
-                <a:fillRect l="0" t="-126" r="0" b="-126"/>
+                <a:fillRect t="-126" b="-126"/>
               </a:stretch>
             </a:blipFill>
           </p:spPr>
@@ -3138,12 +3570,12 @@
       </p:grpSp>
       <p:grpSp>
         <p:nvGrpSpPr>
-          <p:cNvPr name="Group 4" id="4"/>
+          <p:cNvPr id="4" name="Group 4"/>
           <p:cNvGrpSpPr/>
           <p:nvPr/>
         </p:nvGrpSpPr>
         <p:grpSpPr>
-          <a:xfrm rot="0">
+          <a:xfrm>
             <a:off x="666750" y="666750"/>
             <a:ext cx="9763125" cy="4949824"/>
             <a:chOff x="0" y="0"/>
@@ -3152,12 +3584,12 @@
         </p:grpSpPr>
         <p:sp>
           <p:nvSpPr>
-            <p:cNvPr name="TextBox 5" id="5"/>
-            <p:cNvSpPr txBox="true"/>
+            <p:cNvPr id="5" name="TextBox 5"/>
+            <p:cNvSpPr txBox="1"/>
             <p:nvPr/>
           </p:nvSpPr>
           <p:spPr>
-            <a:xfrm rot="0">
+            <a:xfrm>
               <a:off x="0" y="1184275"/>
               <a:ext cx="13017500" cy="5415491"/>
             </a:xfrm>
@@ -3166,12 +3598,12 @@
             </a:prstGeom>
           </p:spPr>
           <p:txBody>
-            <a:bodyPr anchor="t" rtlCol="false" tIns="0" lIns="0" bIns="0" rIns="0">
+            <a:bodyPr lIns="0" tIns="0" rIns="0" bIns="0" rtlCol="0" anchor="t">
               <a:spAutoFit/>
             </a:bodyPr>
             <a:lstStyle/>
             <a:p>
-              <a:pPr algn="l" marL="0" indent="0" lvl="0">
+              <a:pPr marL="0" lvl="0" indent="0" algn="l">
                 <a:lnSpc>
                   <a:spcPts val="9999"/>
                 </a:lnSpc>
@@ -3186,31 +3618,19 @@
                   <a:cs typeface="ITC Avant Garde Gothic"/>
                   <a:sym typeface="ITC Avant Garde Gothic"/>
                 </a:rPr>
-                <a:t>Used C</a:t>
-              </a:r>
-              <a:r>
-                <a:rPr lang="en-US" sz="9999" spc="-299">
-                  <a:solidFill>
-                    <a:srgbClr val="000000"/>
-                  </a:solidFill>
-                  <a:latin typeface="ITC Avant Garde Gothic"/>
-                  <a:ea typeface="ITC Avant Garde Gothic"/>
-                  <a:cs typeface="ITC Avant Garde Gothic"/>
-                  <a:sym typeface="ITC Avant Garde Gothic"/>
-                </a:rPr>
-                <a:t>ar Price Prediction System</a:t>
+                <a:t>Used Car Price Prediction System</a:t>
               </a:r>
             </a:p>
           </p:txBody>
         </p:sp>
         <p:sp>
           <p:nvSpPr>
-            <p:cNvPr name="TextBox 6" id="6"/>
-            <p:cNvSpPr txBox="true"/>
+            <p:cNvPr id="6" name="TextBox 6"/>
+            <p:cNvSpPr txBox="1"/>
             <p:nvPr/>
           </p:nvSpPr>
           <p:spPr>
-            <a:xfrm rot="0">
+            <a:xfrm>
               <a:off x="0" y="-104775"/>
               <a:ext cx="13017500" cy="626322"/>
             </a:xfrm>
@@ -3219,12 +3639,12 @@
             </a:prstGeom>
           </p:spPr>
           <p:txBody>
-            <a:bodyPr anchor="t" rtlCol="false" tIns="0" lIns="0" bIns="0" rIns="0">
+            <a:bodyPr lIns="0" tIns="0" rIns="0" bIns="0" rtlCol="0" anchor="t">
               <a:spAutoFit/>
             </a:bodyPr>
             <a:lstStyle/>
             <a:p>
-              <a:pPr algn="l" marL="0" indent="0" lvl="0">
+              <a:pPr marL="0" lvl="0" indent="0" algn="l">
                 <a:lnSpc>
                   <a:spcPts val="3640"/>
                 </a:lnSpc>
@@ -3250,12 +3670,12 @@
       </p:grpSp>
       <p:sp>
         <p:nvSpPr>
-          <p:cNvPr name="TextBox 7" id="7"/>
-          <p:cNvSpPr txBox="true"/>
+          <p:cNvPr id="7" name="TextBox 7"/>
+          <p:cNvSpPr txBox="1"/>
           <p:nvPr/>
         </p:nvSpPr>
         <p:spPr>
-          <a:xfrm rot="0">
+          <a:xfrm>
             <a:off x="663474" y="9181465"/>
             <a:ext cx="7194651" cy="438785"/>
           </a:xfrm>
@@ -3264,12 +3684,12 @@
           </a:prstGeom>
         </p:spPr>
         <p:txBody>
-          <a:bodyPr anchor="t" rtlCol="false" tIns="0" lIns="0" bIns="0" rIns="0">
+          <a:bodyPr lIns="0" tIns="0" rIns="0" bIns="0" rtlCol="0" anchor="t">
             <a:spAutoFit/>
           </a:bodyPr>
           <a:lstStyle/>
           <a:p>
-            <a:pPr algn="l" marL="0" indent="0" lvl="0">
+            <a:pPr marL="0" lvl="0" indent="0" algn="l">
               <a:lnSpc>
                 <a:spcPts val="3640"/>
               </a:lnSpc>
@@ -3291,12 +3711,12 @@
       </p:sp>
       <p:grpSp>
         <p:nvGrpSpPr>
-          <p:cNvPr name="Group 8" id="8"/>
+          <p:cNvPr id="8" name="Group 8"/>
           <p:cNvGrpSpPr/>
           <p:nvPr/>
         </p:nvGrpSpPr>
         <p:grpSpPr>
-          <a:xfrm rot="0">
+          <a:xfrm>
             <a:off x="9444829" y="7829550"/>
             <a:ext cx="4846643" cy="1791955"/>
             <a:chOff x="0" y="0"/>
@@ -3305,12 +3725,12 @@
         </p:grpSpPr>
         <p:sp>
           <p:nvSpPr>
-            <p:cNvPr name="Freeform 9" id="9"/>
+            <p:cNvPr id="9" name="Freeform 9"/>
             <p:cNvSpPr/>
             <p:nvPr/>
           </p:nvSpPr>
           <p:spPr>
-            <a:xfrm flipH="false" flipV="false" rot="0">
+            <a:xfrm>
               <a:off x="0" y="0"/>
               <a:ext cx="2389273" cy="2389273"/>
             </a:xfrm>
@@ -3319,9 +3739,9 @@
               <a:gdLst/>
               <a:ahLst/>
               <a:cxnLst/>
-              <a:rect r="r" b="b" t="t" l="l"/>
+              <a:rect l="l" t="t" r="r" b="b"/>
               <a:pathLst>
-                <a:path h="2389273" w="2389273">
+                <a:path w="2389273" h="2389273">
                   <a:moveTo>
                     <a:pt x="0" y="0"/>
                   </a:moveTo>
@@ -3345,24 +3765,24 @@
               <a:blip r:embed="rId3">
                 <a:extLst>
                   <a:ext uri="{96DAC541-7B7A-43D3-8B79-37D633B846F1}">
-                    <asvg:svgBlip xmlns:asvg="http://schemas.microsoft.com/office/drawing/2016/SVG/main" r:embed="rId4"/>
+                    <asvg:svgBlip xmlns:asvg="http://schemas.microsoft.com/office/drawing/2016/SVG/main"/>
                   </a:ext>
                 </a:extLst>
               </a:blip>
               <a:stretch>
-                <a:fillRect l="0" t="0" r="0" b="0"/>
+                <a:fillRect/>
               </a:stretch>
             </a:blipFill>
           </p:spPr>
         </p:sp>
         <p:sp>
           <p:nvSpPr>
-            <p:cNvPr name="Freeform 10" id="10"/>
+            <p:cNvPr id="10" name="Freeform 10"/>
             <p:cNvSpPr/>
             <p:nvPr/>
           </p:nvSpPr>
           <p:spPr>
-            <a:xfrm flipH="false" flipV="false" rot="0">
+            <a:xfrm>
               <a:off x="2036459" y="0"/>
               <a:ext cx="2389273" cy="2389273"/>
             </a:xfrm>
@@ -3371,9 +3791,9 @@
               <a:gdLst/>
               <a:ahLst/>
               <a:cxnLst/>
-              <a:rect r="r" b="b" t="t" l="l"/>
+              <a:rect l="l" t="t" r="r" b="b"/>
               <a:pathLst>
-                <a:path h="2389273" w="2389273">
+                <a:path w="2389273" h="2389273">
                   <a:moveTo>
                     <a:pt x="0" y="0"/>
                   </a:moveTo>
@@ -3397,24 +3817,24 @@
               <a:blip r:embed="rId3">
                 <a:extLst>
                   <a:ext uri="{96DAC541-7B7A-43D3-8B79-37D633B846F1}">
-                    <asvg:svgBlip xmlns:asvg="http://schemas.microsoft.com/office/drawing/2016/SVG/main" r:embed="rId4"/>
+                    <asvg:svgBlip xmlns:asvg="http://schemas.microsoft.com/office/drawing/2016/SVG/main"/>
                   </a:ext>
                 </a:extLst>
               </a:blip>
               <a:stretch>
-                <a:fillRect l="0" t="0" r="0" b="0"/>
+                <a:fillRect/>
               </a:stretch>
             </a:blipFill>
           </p:spPr>
         </p:sp>
         <p:sp>
           <p:nvSpPr>
-            <p:cNvPr name="Freeform 11" id="11"/>
+            <p:cNvPr id="11" name="Freeform 11"/>
             <p:cNvSpPr/>
             <p:nvPr/>
           </p:nvSpPr>
           <p:spPr>
-            <a:xfrm flipH="false" flipV="false" rot="0">
+            <a:xfrm>
               <a:off x="4072917" y="0"/>
               <a:ext cx="2389273" cy="2389273"/>
             </a:xfrm>
@@ -3423,9 +3843,9 @@
               <a:gdLst/>
               <a:ahLst/>
               <a:cxnLst/>
-              <a:rect r="r" b="b" t="t" l="l"/>
+              <a:rect l="l" t="t" r="r" b="b"/>
               <a:pathLst>
-                <a:path h="2389273" w="2389273">
+                <a:path w="2389273" h="2389273">
                   <a:moveTo>
                     <a:pt x="0" y="0"/>
                   </a:moveTo>
@@ -3449,12 +3869,12 @@
               <a:blip r:embed="rId3">
                 <a:extLst>
                   <a:ext uri="{96DAC541-7B7A-43D3-8B79-37D633B846F1}">
-                    <asvg:svgBlip xmlns:asvg="http://schemas.microsoft.com/office/drawing/2016/SVG/main" r:embed="rId4"/>
+                    <asvg:svgBlip xmlns:asvg="http://schemas.microsoft.com/office/drawing/2016/SVG/main"/>
                   </a:ext>
                 </a:extLst>
               </a:blip>
               <a:stretch>
-                <a:fillRect l="0" t="0" r="0" b="0"/>
+                <a:fillRect/>
               </a:stretch>
             </a:blipFill>
           </p:spPr>
@@ -3469,13 +3889,14 @@
 </file>
 
 <file path=ppt/slides/slide10.xml><?xml version="1.0" encoding="utf-8"?>
-<p:sld xmlns:p="http://schemas.openxmlformats.org/presentationml/2006/main" xmlns:a="http://schemas.openxmlformats.org/drawingml/2006/main" xmlns:r="http://schemas.openxmlformats.org/officeDocument/2006/relationships">
+<p:sld xmlns:a="http://schemas.openxmlformats.org/drawingml/2006/main" xmlns:r="http://schemas.openxmlformats.org/officeDocument/2006/relationships" xmlns:p="http://schemas.openxmlformats.org/presentationml/2006/main">
   <p:cSld>
     <p:bg>
       <p:bgPr>
         <a:solidFill>
           <a:srgbClr val="F5F5F5"/>
         </a:solidFill>
+        <a:effectLst/>
       </p:bgPr>
     </p:bg>
     <p:spTree>
@@ -3494,12 +3915,12 @@
       </p:grpSpPr>
       <p:grpSp>
         <p:nvGrpSpPr>
-          <p:cNvPr name="Group 2" id="2"/>
+          <p:cNvPr id="2" name="Group 2"/>
           <p:cNvGrpSpPr/>
           <p:nvPr/>
         </p:nvGrpSpPr>
         <p:grpSpPr>
-          <a:xfrm rot="0">
+          <a:xfrm>
             <a:off x="666750" y="666750"/>
             <a:ext cx="11095761" cy="9767648"/>
             <a:chOff x="0" y="0"/>
@@ -3508,12 +3929,12 @@
         </p:grpSpPr>
         <p:sp>
           <p:nvSpPr>
-            <p:cNvPr name="TextBox 3" id="3"/>
-            <p:cNvSpPr txBox="true"/>
+            <p:cNvPr id="3" name="TextBox 3"/>
+            <p:cNvSpPr txBox="1"/>
             <p:nvPr/>
           </p:nvSpPr>
           <p:spPr>
-            <a:xfrm rot="0">
+            <a:xfrm>
               <a:off x="0" y="-9525"/>
               <a:ext cx="14794348" cy="1626659"/>
             </a:xfrm>
@@ -3522,12 +3943,12 @@
             </a:prstGeom>
           </p:spPr>
           <p:txBody>
-            <a:bodyPr anchor="t" rtlCol="false" tIns="0" lIns="0" bIns="0" rIns="0">
+            <a:bodyPr lIns="0" tIns="0" rIns="0" bIns="0" rtlCol="0" anchor="t">
               <a:spAutoFit/>
             </a:bodyPr>
             <a:lstStyle/>
             <a:p>
-              <a:pPr algn="l" marL="0" indent="0" lvl="0">
+              <a:pPr marL="0" lvl="0" indent="0" algn="l">
                 <a:lnSpc>
                   <a:spcPts val="8000"/>
                 </a:lnSpc>
@@ -3545,31 +3966,19 @@
                   <a:cs typeface="ITC Avant Garde Gothic"/>
                   <a:sym typeface="ITC Avant Garde Gothic"/>
                 </a:rPr>
-                <a:t>R</a:t>
-              </a:r>
-              <a:r>
-                <a:rPr lang="en-US" sz="8000" spc="-240">
-                  <a:solidFill>
-                    <a:srgbClr val="000000"/>
-                  </a:solidFill>
-                  <a:latin typeface="ITC Avant Garde Gothic"/>
-                  <a:ea typeface="ITC Avant Garde Gothic"/>
-                  <a:cs typeface="ITC Avant Garde Gothic"/>
-                  <a:sym typeface="ITC Avant Garde Gothic"/>
-                </a:rPr>
-                <a:t>esults &amp; Findings</a:t>
+                <a:t>Results &amp; Findings</a:t>
               </a:r>
             </a:p>
           </p:txBody>
         </p:sp>
         <p:sp>
           <p:nvSpPr>
-            <p:cNvPr name="TextBox 4" id="4"/>
-            <p:cNvSpPr txBox="true"/>
+            <p:cNvPr id="4" name="TextBox 4"/>
+            <p:cNvSpPr txBox="1"/>
             <p:nvPr/>
           </p:nvSpPr>
           <p:spPr>
-            <a:xfrm rot="0">
+            <a:xfrm>
               <a:off x="0" y="2277044"/>
               <a:ext cx="9137674" cy="10746486"/>
             </a:xfrm>
@@ -3578,7 +3987,7 @@
             </a:prstGeom>
           </p:spPr>
           <p:txBody>
-            <a:bodyPr anchor="t" rtlCol="false" tIns="0" lIns="0" bIns="0" rIns="0">
+            <a:bodyPr lIns="0" tIns="0" rIns="0" bIns="0" rtlCol="0" anchor="t">
               <a:spAutoFit/>
             </a:bodyPr>
             <a:lstStyle/>
@@ -3588,9 +3997,10 @@
                   <a:spcPts val="3982"/>
                 </a:lnSpc>
               </a:pPr>
-            </a:p>
-            <a:p>
-              <a:pPr algn="l" marL="716431" indent="-358216" lvl="1">
+              <a:endParaRPr/>
+            </a:p>
+            <a:p>
+              <a:pPr marL="716431" lvl="1" indent="-358216" algn="l">
                 <a:lnSpc>
                   <a:spcPts val="3982"/>
                 </a:lnSpc>
@@ -3607,19 +4017,7 @@
                   <a:cs typeface="TT Fors"/>
                   <a:sym typeface="TT Fors"/>
                 </a:rPr>
-                <a:t>High</a:t>
-              </a:r>
-              <a:r>
-                <a:rPr lang="en-US" sz="3318" spc="-99">
-                  <a:solidFill>
-                    <a:srgbClr val="4A4A4A"/>
-                  </a:solidFill>
-                  <a:latin typeface="TT Fors"/>
-                  <a:ea typeface="TT Fors"/>
-                  <a:cs typeface="TT Fors"/>
-                  <a:sym typeface="TT Fors"/>
-                </a:rPr>
-                <a:t> model accuracy across most car models (strong MAE/RMSE and R² scores)</a:t>
+                <a:t>High model accuracy across most car models (strong MAE/RMSE and R² scores)</a:t>
               </a:r>
             </a:p>
             <a:p>
@@ -3628,9 +4026,18 @@
                   <a:spcPts val="3982"/>
                 </a:lnSpc>
               </a:pPr>
-            </a:p>
-            <a:p>
-              <a:pPr algn="l" marL="716431" indent="-358216" lvl="1">
+              <a:endParaRPr lang="en-US" sz="3318" spc="-99">
+                <a:solidFill>
+                  <a:srgbClr val="4A4A4A"/>
+                </a:solidFill>
+                <a:latin typeface="TT Fors"/>
+                <a:ea typeface="TT Fors"/>
+                <a:cs typeface="TT Fors"/>
+                <a:sym typeface="TT Fors"/>
+              </a:endParaRPr>
+            </a:p>
+            <a:p>
+              <a:pPr marL="716431" lvl="1" indent="-358216" algn="l">
                 <a:lnSpc>
                   <a:spcPts val="3982"/>
                 </a:lnSpc>
@@ -3662,9 +4069,18 @@
                   <a:spcPct val="0"/>
                 </a:spcBef>
               </a:pPr>
-            </a:p>
-            <a:p>
-              <a:pPr algn="l" marL="716431" indent="-358216" lvl="1">
+              <a:endParaRPr lang="en-US" sz="3318" spc="-99">
+                <a:solidFill>
+                  <a:srgbClr val="4A4A4A"/>
+                </a:solidFill>
+                <a:latin typeface="TT Fors"/>
+                <a:ea typeface="TT Fors"/>
+                <a:cs typeface="TT Fors"/>
+                <a:sym typeface="TT Fors"/>
+              </a:endParaRPr>
+            </a:p>
+            <a:p>
+              <a:pPr marL="716431" lvl="1" indent="-358216" algn="l">
                 <a:lnSpc>
                   <a:spcPts val="3982"/>
                 </a:lnSpc>
@@ -3684,31 +4100,7 @@
                   <a:cs typeface="TT Fors"/>
                   <a:sym typeface="TT Fors"/>
                 </a:rPr>
-                <a:t>Strict quality gates prevented weak m</a:t>
-              </a:r>
-              <a:r>
-                <a:rPr lang="en-US" sz="3318" spc="-99">
-                  <a:solidFill>
-                    <a:srgbClr val="4A4A4A"/>
-                  </a:solidFill>
-                  <a:latin typeface="TT Fors"/>
-                  <a:ea typeface="TT Fors"/>
-                  <a:cs typeface="TT Fors"/>
-                  <a:sym typeface="TT Fors"/>
-                </a:rPr>
-                <a:t>od</a:t>
-              </a:r>
-              <a:r>
-                <a:rPr lang="en-US" sz="3318" spc="-99">
-                  <a:solidFill>
-                    <a:srgbClr val="4A4A4A"/>
-                  </a:solidFill>
-                  <a:latin typeface="TT Fors"/>
-                  <a:ea typeface="TT Fors"/>
-                  <a:cs typeface="TT Fors"/>
-                  <a:sym typeface="TT Fors"/>
-                </a:rPr>
-                <a:t>els from being saved</a:t>
+                <a:t>Strict quality gates prevented weak models from being saved</a:t>
               </a:r>
             </a:p>
             <a:p>
@@ -3720,9 +4112,18 @@
                   <a:spcPct val="0"/>
                 </a:spcBef>
               </a:pPr>
-            </a:p>
-            <a:p>
-              <a:pPr algn="l" marL="716431" indent="-358216" lvl="1">
+              <a:endParaRPr lang="en-US" sz="3318" spc="-99">
+                <a:solidFill>
+                  <a:srgbClr val="4A4A4A"/>
+                </a:solidFill>
+                <a:latin typeface="TT Fors"/>
+                <a:ea typeface="TT Fors"/>
+                <a:cs typeface="TT Fors"/>
+                <a:sym typeface="TT Fors"/>
+              </a:endParaRPr>
+            </a:p>
+            <a:p>
+              <a:pPr marL="716431" lvl="1" indent="-358216" algn="l">
                 <a:lnSpc>
                   <a:spcPts val="3982"/>
                 </a:lnSpc>
@@ -3754,9 +4155,18 @@
                   <a:spcPct val="0"/>
                 </a:spcBef>
               </a:pPr>
-            </a:p>
-            <a:p>
-              <a:pPr algn="l" marL="716431" indent="-358216" lvl="1">
+              <a:endParaRPr lang="en-US" sz="3318" spc="-99">
+                <a:solidFill>
+                  <a:srgbClr val="4A4A4A"/>
+                </a:solidFill>
+                <a:latin typeface="TT Fors"/>
+                <a:ea typeface="TT Fors"/>
+                <a:cs typeface="TT Fors"/>
+                <a:sym typeface="TT Fors"/>
+              </a:endParaRPr>
+            </a:p>
+            <a:p>
+              <a:pPr marL="716431" lvl="1" indent="-358216" algn="l">
                 <a:lnSpc>
                   <a:spcPts val="3982"/>
                 </a:lnSpc>
@@ -3779,7 +4189,7 @@
                 <a:t>Fr</a:t>
               </a:r>
               <a:r>
-                <a:rPr lang="en-US" sz="3318" spc="-99" strike="noStrike" u="none">
+                <a:rPr lang="en-US" sz="3318" u="none" strike="noStrike" spc="-99">
                   <a:solidFill>
                     <a:srgbClr val="4A4A4A"/>
                   </a:solidFill>
@@ -3803,7 +4213,7 @@
                 <a:t>end</a:t>
               </a:r>
               <a:r>
-                <a:rPr lang="en-US" sz="3318" spc="-99" strike="noStrike" u="none">
+                <a:rPr lang="en-US" sz="3318" u="none" strike="noStrike" spc="-99">
                   <a:solidFill>
                     <a:srgbClr val="4A4A4A"/>
                   </a:solidFill>
@@ -3827,7 +4237,7 @@
                 <a:t>t</a:t>
               </a:r>
               <a:r>
-                <a:rPr lang="en-US" sz="3318" spc="-99" strike="noStrike" u="none">
+                <a:rPr lang="en-US" sz="3318" u="none" strike="noStrike" spc="-99">
                   <a:solidFill>
                     <a:srgbClr val="4A4A4A"/>
                   </a:solidFill>
@@ -3852,7 +4262,7 @@
               </a:r>
             </a:p>
             <a:p>
-              <a:pPr algn="l" marL="0" indent="0" lvl="0">
+              <a:pPr marL="0" lvl="0" indent="0" algn="l">
                 <a:lnSpc>
                   <a:spcPts val="3982"/>
                 </a:lnSpc>
@@ -3860,9 +4270,18 @@
                   <a:spcPct val="0"/>
                 </a:spcBef>
               </a:pPr>
-            </a:p>
-            <a:p>
-              <a:pPr algn="l" marL="0" indent="0" lvl="0">
+              <a:endParaRPr lang="en-US" sz="3318" spc="-99">
+                <a:solidFill>
+                  <a:srgbClr val="4A4A4A"/>
+                </a:solidFill>
+                <a:latin typeface="TT Fors"/>
+                <a:ea typeface="TT Fors"/>
+                <a:cs typeface="TT Fors"/>
+                <a:sym typeface="TT Fors"/>
+              </a:endParaRPr>
+            </a:p>
+            <a:p>
+              <a:pPr marL="0" lvl="0" indent="0" algn="l">
                 <a:lnSpc>
                   <a:spcPts val="3982"/>
                 </a:lnSpc>
@@ -3870,18 +4289,27 @@
                   <a:spcPct val="0"/>
                 </a:spcBef>
               </a:pPr>
+              <a:endParaRPr lang="en-US" sz="3318" spc="-99">
+                <a:solidFill>
+                  <a:srgbClr val="4A4A4A"/>
+                </a:solidFill>
+                <a:latin typeface="TT Fors"/>
+                <a:ea typeface="TT Fors"/>
+                <a:cs typeface="TT Fors"/>
+                <a:sym typeface="TT Fors"/>
+              </a:endParaRPr>
             </a:p>
           </p:txBody>
         </p:sp>
       </p:grpSp>
       <p:sp>
         <p:nvSpPr>
-          <p:cNvPr name="Freeform 5" id="5"/>
+          <p:cNvPr id="5" name="Freeform 5"/>
           <p:cNvSpPr/>
           <p:nvPr/>
         </p:nvSpPr>
         <p:spPr>
-          <a:xfrm flipH="false" flipV="false" rot="0">
+          <a:xfrm>
             <a:off x="7464322" y="2524286"/>
             <a:ext cx="10823678" cy="6734014"/>
           </a:xfrm>
@@ -3890,9 +4318,9 @@
             <a:gdLst/>
             <a:ahLst/>
             <a:cxnLst/>
-            <a:rect r="r" b="b" t="t" l="l"/>
+            <a:rect l="l" t="t" r="r" b="b"/>
             <a:pathLst>
-              <a:path h="6734014" w="10823678">
+              <a:path w="10823678" h="6734014">
                 <a:moveTo>
                   <a:pt x="0" y="0"/>
                 </a:moveTo>
@@ -3913,7 +4341,7 @@
             </a:pathLst>
           </a:custGeom>
           <a:blipFill>
-            <a:blip r:embed="rId2"/>
+            <a:blip/>
             <a:stretch>
               <a:fillRect l="-3501" t="-10412" r="-3501" b="-6754"/>
             </a:stretch>
@@ -3929,13 +4357,14 @@
 </file>
 
 <file path=ppt/slides/slide2.xml><?xml version="1.0" encoding="utf-8"?>
-<p:sld xmlns:p="http://schemas.openxmlformats.org/presentationml/2006/main" xmlns:a="http://schemas.openxmlformats.org/drawingml/2006/main" xmlns:r="http://schemas.openxmlformats.org/officeDocument/2006/relationships">
+<p:sld xmlns:a="http://schemas.openxmlformats.org/drawingml/2006/main" xmlns:r="http://schemas.openxmlformats.org/officeDocument/2006/relationships" xmlns:p="http://schemas.openxmlformats.org/presentationml/2006/main">
   <p:cSld>
     <p:bg>
       <p:bgPr>
         <a:solidFill>
           <a:srgbClr val="F5F5F5"/>
         </a:solidFill>
+        <a:effectLst/>
       </p:bgPr>
     </p:bg>
     <p:spTree>
@@ -3954,12 +4383,12 @@
       </p:grpSpPr>
       <p:grpSp>
         <p:nvGrpSpPr>
-          <p:cNvPr name="Group 2" id="2"/>
+          <p:cNvPr id="2" name="Group 2"/>
           <p:cNvGrpSpPr/>
           <p:nvPr/>
         </p:nvGrpSpPr>
         <p:grpSpPr>
-          <a:xfrm rot="0">
+          <a:xfrm>
             <a:off x="666750" y="666750"/>
             <a:ext cx="11201400" cy="8225040"/>
             <a:chOff x="0" y="0"/>
@@ -3968,12 +4397,12 @@
         </p:grpSpPr>
         <p:sp>
           <p:nvSpPr>
-            <p:cNvPr name="TextBox 3" id="3"/>
-            <p:cNvSpPr txBox="true"/>
+            <p:cNvPr id="3" name="TextBox 3"/>
+            <p:cNvSpPr txBox="1"/>
             <p:nvPr/>
           </p:nvSpPr>
           <p:spPr>
-            <a:xfrm rot="0">
+            <a:xfrm>
               <a:off x="0" y="-9525"/>
               <a:ext cx="14935200" cy="1626659"/>
             </a:xfrm>
@@ -3982,12 +4411,12 @@
             </a:prstGeom>
           </p:spPr>
           <p:txBody>
-            <a:bodyPr anchor="t" rtlCol="false" tIns="0" lIns="0" bIns="0" rIns="0">
+            <a:bodyPr lIns="0" tIns="0" rIns="0" bIns="0" rtlCol="0" anchor="t">
               <a:spAutoFit/>
             </a:bodyPr>
             <a:lstStyle/>
             <a:p>
-              <a:pPr algn="l" marL="0" indent="0" lvl="0">
+              <a:pPr marL="0" lvl="0" indent="0" algn="l">
                 <a:lnSpc>
                   <a:spcPts val="8000"/>
                 </a:lnSpc>
@@ -4012,12 +4441,12 @@
         </p:sp>
         <p:sp>
           <p:nvSpPr>
-            <p:cNvPr name="TextBox 4" id="4"/>
-            <p:cNvSpPr txBox="true"/>
+            <p:cNvPr id="4" name="TextBox 4"/>
+            <p:cNvSpPr txBox="1"/>
             <p:nvPr/>
           </p:nvSpPr>
           <p:spPr>
-            <a:xfrm rot="0">
+            <a:xfrm>
               <a:off x="0" y="2235200"/>
               <a:ext cx="13498957" cy="8731520"/>
             </a:xfrm>
@@ -4026,7 +4455,7 @@
             </a:prstGeom>
           </p:spPr>
           <p:txBody>
-            <a:bodyPr anchor="t" rtlCol="false" tIns="0" lIns="0" bIns="0" rIns="0">
+            <a:bodyPr lIns="0" tIns="0" rIns="0" bIns="0" rtlCol="0" anchor="t">
               <a:spAutoFit/>
             </a:bodyPr>
             <a:lstStyle/>
@@ -4036,9 +4465,10 @@
                   <a:spcPts val="3982"/>
                 </a:lnSpc>
               </a:pPr>
-            </a:p>
-            <a:p>
-              <a:pPr algn="l" marL="716431" indent="-358216" lvl="1">
+              <a:endParaRPr/>
+            </a:p>
+            <a:p>
+              <a:pPr marL="716431" lvl="1" indent="-358216" algn="l">
                 <a:lnSpc>
                   <a:spcPts val="3982"/>
                 </a:lnSpc>
@@ -4064,9 +4494,18 @@
                   <a:spcPts val="3982"/>
                 </a:lnSpc>
               </a:pPr>
-            </a:p>
-            <a:p>
-              <a:pPr algn="l" marL="716431" indent="-358216" lvl="1">
+              <a:endParaRPr lang="en-US" sz="3318" spc="-99">
+                <a:solidFill>
+                  <a:srgbClr val="4A4A4A"/>
+                </a:solidFill>
+                <a:latin typeface="TT Fors"/>
+                <a:ea typeface="TT Fors"/>
+                <a:cs typeface="TT Fors"/>
+                <a:sym typeface="TT Fors"/>
+              </a:endParaRPr>
+            </a:p>
+            <a:p>
+              <a:pPr marL="716431" lvl="1" indent="-358216" algn="l">
                 <a:lnSpc>
                   <a:spcPts val="3982"/>
                 </a:lnSpc>
@@ -4089,7 +4528,7 @@
                 <a:t>Prices depend </a:t>
               </a:r>
               <a:r>
-                <a:rPr lang="en-US" sz="3318" spc="-99" strike="noStrike" u="none">
+                <a:rPr lang="en-US" sz="3318" u="none" strike="noStrike" spc="-99">
                   <a:solidFill>
                     <a:srgbClr val="4A4A4A"/>
                   </a:solidFill>
@@ -4110,9 +4549,18 @@
                   <a:spcPct val="0"/>
                 </a:spcBef>
               </a:pPr>
-            </a:p>
-            <a:p>
-              <a:pPr algn="l" marL="716431" indent="-358216" lvl="1">
+              <a:endParaRPr lang="en-US" sz="3318" u="none" strike="noStrike" spc="-99">
+                <a:solidFill>
+                  <a:srgbClr val="4A4A4A"/>
+                </a:solidFill>
+                <a:latin typeface="TT Fors"/>
+                <a:ea typeface="TT Fors"/>
+                <a:cs typeface="TT Fors"/>
+                <a:sym typeface="TT Fors"/>
+              </a:endParaRPr>
+            </a:p>
+            <a:p>
+              <a:pPr marL="716431" lvl="1" indent="-358216" algn="l">
                 <a:lnSpc>
                   <a:spcPts val="3982"/>
                 </a:lnSpc>
@@ -4123,112 +4571,16 @@
                 <a:buChar char="•"/>
               </a:pPr>
               <a:r>
-                <a:rPr lang="en-US" sz="3318" spc="-99" strike="noStrike" u="none">
-                  <a:solidFill>
-                    <a:srgbClr val="4A4A4A"/>
-                  </a:solidFill>
-                  <a:latin typeface="TT Fors"/>
-                  <a:ea typeface="TT Fors"/>
-                  <a:cs typeface="TT Fors"/>
-                  <a:sym typeface="TT Fors"/>
-                </a:rPr>
-                <a:t>Buyers</a:t>
-              </a:r>
-              <a:r>
-                <a:rPr lang="en-US" sz="3318" spc="-99" strike="noStrike" u="none">
-                  <a:solidFill>
-                    <a:srgbClr val="4A4A4A"/>
-                  </a:solidFill>
-                  <a:latin typeface="TT Fors"/>
-                  <a:ea typeface="TT Fors"/>
-                  <a:cs typeface="TT Fors"/>
-                  <a:sym typeface="TT Fors"/>
-                </a:rPr>
-                <a:t> </a:t>
-              </a:r>
-              <a:r>
-                <a:rPr lang="en-US" sz="3318" spc="-99" strike="noStrike" u="none">
-                  <a:solidFill>
-                    <a:srgbClr val="4A4A4A"/>
-                  </a:solidFill>
-                  <a:latin typeface="TT Fors"/>
-                  <a:ea typeface="TT Fors"/>
-                  <a:cs typeface="TT Fors"/>
-                  <a:sym typeface="TT Fors"/>
-                </a:rPr>
-                <a:t>cann</a:t>
-              </a:r>
-              <a:r>
-                <a:rPr lang="en-US" sz="3318" spc="-99" strike="noStrike" u="none">
-                  <a:solidFill>
-                    <a:srgbClr val="4A4A4A"/>
-                  </a:solidFill>
-                  <a:latin typeface="TT Fors"/>
-                  <a:ea typeface="TT Fors"/>
-                  <a:cs typeface="TT Fors"/>
-                  <a:sym typeface="TT Fors"/>
-                </a:rPr>
-                <a:t>o</a:t>
-              </a:r>
-              <a:r>
-                <a:rPr lang="en-US" sz="3318" spc="-99" strike="noStrike" u="none">
-                  <a:solidFill>
-                    <a:srgbClr val="4A4A4A"/>
-                  </a:solidFill>
-                  <a:latin typeface="TT Fors"/>
-                  <a:ea typeface="TT Fors"/>
-                  <a:cs typeface="TT Fors"/>
-                  <a:sym typeface="TT Fors"/>
-                </a:rPr>
-                <a:t>t es</a:t>
-              </a:r>
-              <a:r>
-                <a:rPr lang="en-US" sz="3318" spc="-99" strike="noStrike" u="none">
-                  <a:solidFill>
-                    <a:srgbClr val="4A4A4A"/>
-                  </a:solidFill>
-                  <a:latin typeface="TT Fors"/>
-                  <a:ea typeface="TT Fors"/>
-                  <a:cs typeface="TT Fors"/>
-                  <a:sym typeface="TT Fors"/>
-                </a:rPr>
-                <a:t>ti</a:t>
-              </a:r>
-              <a:r>
-                <a:rPr lang="en-US" sz="3318" spc="-99" strike="noStrike" u="none">
-                  <a:solidFill>
-                    <a:srgbClr val="4A4A4A"/>
-                  </a:solidFill>
-                  <a:latin typeface="TT Fors"/>
-                  <a:ea typeface="TT Fors"/>
-                  <a:cs typeface="TT Fors"/>
-                  <a:sym typeface="TT Fors"/>
-                </a:rPr>
-                <a:t>mate depreci</a:t>
-              </a:r>
-              <a:r>
-                <a:rPr lang="en-US" sz="3318" spc="-99" strike="noStrike" u="none">
-                  <a:solidFill>
-                    <a:srgbClr val="4A4A4A"/>
-                  </a:solidFill>
-                  <a:latin typeface="TT Fors"/>
-                  <a:ea typeface="TT Fors"/>
-                  <a:cs typeface="TT Fors"/>
-                  <a:sym typeface="TT Fors"/>
-                </a:rPr>
-                <a:t>ation</a:t>
-              </a:r>
-              <a:r>
-                <a:rPr lang="en-US" sz="3318" spc="-99" strike="noStrike" u="none">
-                  <a:solidFill>
-                    <a:srgbClr val="4A4A4A"/>
-                  </a:solidFill>
-                  <a:latin typeface="TT Fors"/>
-                  <a:ea typeface="TT Fors"/>
-                  <a:cs typeface="TT Fors"/>
-                  <a:sym typeface="TT Fors"/>
-                </a:rPr>
-                <a:t> accurately</a:t>
+                <a:rPr lang="en-US" sz="3318" u="none" strike="noStrike" spc="-99">
+                  <a:solidFill>
+                    <a:srgbClr val="4A4A4A"/>
+                  </a:solidFill>
+                  <a:latin typeface="TT Fors"/>
+                  <a:ea typeface="TT Fors"/>
+                  <a:cs typeface="TT Fors"/>
+                  <a:sym typeface="TT Fors"/>
+                </a:rPr>
+                <a:t>Buyers cannot estimate depreciation accurately</a:t>
               </a:r>
             </a:p>
             <a:p>
@@ -4240,9 +4592,18 @@
                   <a:spcPct val="0"/>
                 </a:spcBef>
               </a:pPr>
-            </a:p>
-            <a:p>
-              <a:pPr algn="l" marL="716431" indent="-358216" lvl="1">
+              <a:endParaRPr lang="en-US" sz="3318" u="none" strike="noStrike" spc="-99">
+                <a:solidFill>
+                  <a:srgbClr val="4A4A4A"/>
+                </a:solidFill>
+                <a:latin typeface="TT Fors"/>
+                <a:ea typeface="TT Fors"/>
+                <a:cs typeface="TT Fors"/>
+                <a:sym typeface="TT Fors"/>
+              </a:endParaRPr>
+            </a:p>
+            <a:p>
+              <a:pPr marL="716431" lvl="1" indent="-358216" algn="l">
                 <a:lnSpc>
                   <a:spcPts val="3982"/>
                 </a:lnSpc>
@@ -4253,7 +4614,7 @@
                 <a:buChar char="•"/>
               </a:pPr>
               <a:r>
-                <a:rPr lang="en-US" sz="3318" spc="-99" strike="noStrike" u="none">
+                <a:rPr lang="en-US" sz="3318" u="none" strike="noStrike" spc="-99">
                   <a:solidFill>
                     <a:srgbClr val="4A4A4A"/>
                   </a:solidFill>
@@ -4274,9 +4635,18 @@
                   <a:spcPct val="0"/>
                 </a:spcBef>
               </a:pPr>
-            </a:p>
-            <a:p>
-              <a:pPr algn="l" marL="716431" indent="-358216" lvl="1">
+              <a:endParaRPr lang="en-US" sz="3318" u="none" strike="noStrike" spc="-99">
+                <a:solidFill>
+                  <a:srgbClr val="4A4A4A"/>
+                </a:solidFill>
+                <a:latin typeface="TT Fors"/>
+                <a:ea typeface="TT Fors"/>
+                <a:cs typeface="TT Fors"/>
+                <a:sym typeface="TT Fors"/>
+              </a:endParaRPr>
+            </a:p>
+            <a:p>
+              <a:pPr marL="716431" lvl="1" indent="-358216" algn="l">
                 <a:lnSpc>
                   <a:spcPts val="3982"/>
                 </a:lnSpc>
@@ -4287,7 +4657,7 @@
                 <a:buChar char="•"/>
               </a:pPr>
               <a:r>
-                <a:rPr lang="en-US" sz="3318" spc="-99" strike="noStrike" u="none">
+                <a:rPr lang="en-US" sz="3318" u="none" strike="noStrike" spc="-99">
                   <a:solidFill>
                     <a:srgbClr val="4A4A4A"/>
                   </a:solidFill>
@@ -4300,7 +4670,7 @@
               </a:r>
             </a:p>
             <a:p>
-              <a:pPr algn="l" marL="0" indent="0" lvl="0">
+              <a:pPr marL="0" lvl="0" indent="0" algn="l">
                 <a:lnSpc>
                   <a:spcPts val="3982"/>
                 </a:lnSpc>
@@ -4308,9 +4678,18 @@
                   <a:spcPct val="0"/>
                 </a:spcBef>
               </a:pPr>
-            </a:p>
-            <a:p>
-              <a:pPr algn="l" marL="0" indent="0" lvl="0">
+              <a:endParaRPr lang="en-US" sz="3318" u="none" strike="noStrike" spc="-99">
+                <a:solidFill>
+                  <a:srgbClr val="4A4A4A"/>
+                </a:solidFill>
+                <a:latin typeface="TT Fors"/>
+                <a:ea typeface="TT Fors"/>
+                <a:cs typeface="TT Fors"/>
+                <a:sym typeface="TT Fors"/>
+              </a:endParaRPr>
+            </a:p>
+            <a:p>
+              <a:pPr marL="0" lvl="0" indent="0" algn="l">
                 <a:lnSpc>
                   <a:spcPts val="3982"/>
                 </a:lnSpc>
@@ -4318,18 +4697,27 @@
                   <a:spcPct val="0"/>
                 </a:spcBef>
               </a:pPr>
+              <a:endParaRPr lang="en-US" sz="3318" u="none" strike="noStrike" spc="-99">
+                <a:solidFill>
+                  <a:srgbClr val="4A4A4A"/>
+                </a:solidFill>
+                <a:latin typeface="TT Fors"/>
+                <a:ea typeface="TT Fors"/>
+                <a:cs typeface="TT Fors"/>
+                <a:sym typeface="TT Fors"/>
+              </a:endParaRPr>
             </a:p>
           </p:txBody>
         </p:sp>
       </p:grpSp>
       <p:grpSp>
         <p:nvGrpSpPr>
-          <p:cNvPr name="Group 5" id="5"/>
+          <p:cNvPr id="5" name="Group 5"/>
           <p:cNvGrpSpPr/>
           <p:nvPr/>
         </p:nvGrpSpPr>
         <p:grpSpPr>
-          <a:xfrm rot="0">
+          <a:xfrm>
             <a:off x="14744700" y="7829550"/>
             <a:ext cx="4846643" cy="1791955"/>
             <a:chOff x="0" y="0"/>
@@ -4338,12 +4726,12 @@
         </p:grpSpPr>
         <p:sp>
           <p:nvSpPr>
-            <p:cNvPr name="Freeform 6" id="6"/>
+            <p:cNvPr id="6" name="Freeform 6"/>
             <p:cNvSpPr/>
             <p:nvPr/>
           </p:nvSpPr>
           <p:spPr>
-            <a:xfrm flipH="false" flipV="false" rot="0">
+            <a:xfrm>
               <a:off x="0" y="0"/>
               <a:ext cx="2389273" cy="2389273"/>
             </a:xfrm>
@@ -4352,9 +4740,9 @@
               <a:gdLst/>
               <a:ahLst/>
               <a:cxnLst/>
-              <a:rect r="r" b="b" t="t" l="l"/>
+              <a:rect l="l" t="t" r="r" b="b"/>
               <a:pathLst>
-                <a:path h="2389273" w="2389273">
+                <a:path w="2389273" h="2389273">
                   <a:moveTo>
                     <a:pt x="0" y="0"/>
                   </a:moveTo>
@@ -4378,24 +4766,24 @@
               <a:blip r:embed="rId2">
                 <a:extLst>
                   <a:ext uri="{96DAC541-7B7A-43D3-8B79-37D633B846F1}">
-                    <asvg:svgBlip xmlns:asvg="http://schemas.microsoft.com/office/drawing/2016/SVG/main" r:embed="rId3"/>
+                    <asvg:svgBlip xmlns:asvg="http://schemas.microsoft.com/office/drawing/2016/SVG/main"/>
                   </a:ext>
                 </a:extLst>
               </a:blip>
               <a:stretch>
-                <a:fillRect l="0" t="0" r="0" b="0"/>
+                <a:fillRect/>
               </a:stretch>
             </a:blipFill>
           </p:spPr>
         </p:sp>
         <p:sp>
           <p:nvSpPr>
-            <p:cNvPr name="Freeform 7" id="7"/>
+            <p:cNvPr id="7" name="Freeform 7"/>
             <p:cNvSpPr/>
             <p:nvPr/>
           </p:nvSpPr>
           <p:spPr>
-            <a:xfrm flipH="false" flipV="false" rot="0">
+            <a:xfrm>
               <a:off x="2036459" y="0"/>
               <a:ext cx="2389273" cy="2389273"/>
             </a:xfrm>
@@ -4404,9 +4792,9 @@
               <a:gdLst/>
               <a:ahLst/>
               <a:cxnLst/>
-              <a:rect r="r" b="b" t="t" l="l"/>
+              <a:rect l="l" t="t" r="r" b="b"/>
               <a:pathLst>
-                <a:path h="2389273" w="2389273">
+                <a:path w="2389273" h="2389273">
                   <a:moveTo>
                     <a:pt x="0" y="0"/>
                   </a:moveTo>
@@ -4430,24 +4818,24 @@
               <a:blip r:embed="rId2">
                 <a:extLst>
                   <a:ext uri="{96DAC541-7B7A-43D3-8B79-37D633B846F1}">
-                    <asvg:svgBlip xmlns:asvg="http://schemas.microsoft.com/office/drawing/2016/SVG/main" r:embed="rId3"/>
+                    <asvg:svgBlip xmlns:asvg="http://schemas.microsoft.com/office/drawing/2016/SVG/main"/>
                   </a:ext>
                 </a:extLst>
               </a:blip>
               <a:stretch>
-                <a:fillRect l="0" t="0" r="0" b="0"/>
+                <a:fillRect/>
               </a:stretch>
             </a:blipFill>
           </p:spPr>
         </p:sp>
         <p:sp>
           <p:nvSpPr>
-            <p:cNvPr name="Freeform 8" id="8"/>
+            <p:cNvPr id="8" name="Freeform 8"/>
             <p:cNvSpPr/>
             <p:nvPr/>
           </p:nvSpPr>
           <p:spPr>
-            <a:xfrm flipH="false" flipV="false" rot="0">
+            <a:xfrm>
               <a:off x="4072917" y="0"/>
               <a:ext cx="2389273" cy="2389273"/>
             </a:xfrm>
@@ -4456,9 +4844,9 @@
               <a:gdLst/>
               <a:ahLst/>
               <a:cxnLst/>
-              <a:rect r="r" b="b" t="t" l="l"/>
+              <a:rect l="l" t="t" r="r" b="b"/>
               <a:pathLst>
-                <a:path h="2389273" w="2389273">
+                <a:path w="2389273" h="2389273">
                   <a:moveTo>
                     <a:pt x="0" y="0"/>
                   </a:moveTo>
@@ -4482,12 +4870,12 @@
               <a:blip r:embed="rId2">
                 <a:extLst>
                   <a:ext uri="{96DAC541-7B7A-43D3-8B79-37D633B846F1}">
-                    <asvg:svgBlip xmlns:asvg="http://schemas.microsoft.com/office/drawing/2016/SVG/main" r:embed="rId3"/>
+                    <asvg:svgBlip xmlns:asvg="http://schemas.microsoft.com/office/drawing/2016/SVG/main"/>
                   </a:ext>
                 </a:extLst>
               </a:blip>
               <a:stretch>
-                <a:fillRect l="0" t="0" r="0" b="0"/>
+                <a:fillRect/>
               </a:stretch>
             </a:blipFill>
           </p:spPr>
@@ -4502,7 +4890,7 @@
 </file>
 
 <file path=ppt/slides/slide3.xml><?xml version="1.0" encoding="utf-8"?>
-<p:sld xmlns:p="http://schemas.openxmlformats.org/presentationml/2006/main" xmlns:a="http://schemas.openxmlformats.org/drawingml/2006/main" xmlns:r="http://schemas.openxmlformats.org/officeDocument/2006/relationships">
+<p:sld xmlns:a="http://schemas.openxmlformats.org/drawingml/2006/main" xmlns:r="http://schemas.openxmlformats.org/officeDocument/2006/relationships" xmlns:p="http://schemas.openxmlformats.org/presentationml/2006/main">
   <p:cSld>
     <p:spTree>
       <p:nvGrpSpPr>
@@ -4520,12 +4908,12 @@
       </p:grpSpPr>
       <p:grpSp>
         <p:nvGrpSpPr>
-          <p:cNvPr name="Group 2" id="2"/>
+          <p:cNvPr id="2" name="Group 2"/>
           <p:cNvGrpSpPr/>
           <p:nvPr/>
         </p:nvGrpSpPr>
         <p:grpSpPr>
-          <a:xfrm rot="0">
+          <a:xfrm>
             <a:off x="14744700" y="7829550"/>
             <a:ext cx="4846643" cy="1791955"/>
             <a:chOff x="0" y="0"/>
@@ -4534,12 +4922,12 @@
         </p:grpSpPr>
         <p:sp>
           <p:nvSpPr>
-            <p:cNvPr name="Freeform 3" id="3"/>
+            <p:cNvPr id="3" name="Freeform 3"/>
             <p:cNvSpPr/>
             <p:nvPr/>
           </p:nvSpPr>
           <p:spPr>
-            <a:xfrm flipH="false" flipV="false" rot="0">
+            <a:xfrm>
               <a:off x="0" y="0"/>
               <a:ext cx="2389273" cy="2389273"/>
             </a:xfrm>
@@ -4548,9 +4936,9 @@
               <a:gdLst/>
               <a:ahLst/>
               <a:cxnLst/>
-              <a:rect r="r" b="b" t="t" l="l"/>
+              <a:rect l="l" t="t" r="r" b="b"/>
               <a:pathLst>
-                <a:path h="2389273" w="2389273">
+                <a:path w="2389273" h="2389273">
                   <a:moveTo>
                     <a:pt x="0" y="0"/>
                   </a:moveTo>
@@ -4574,24 +4962,24 @@
               <a:blip r:embed="rId2">
                 <a:extLst>
                   <a:ext uri="{96DAC541-7B7A-43D3-8B79-37D633B846F1}">
-                    <asvg:svgBlip xmlns:asvg="http://schemas.microsoft.com/office/drawing/2016/SVG/main" r:embed="rId3"/>
+                    <asvg:svgBlip xmlns:asvg="http://schemas.microsoft.com/office/drawing/2016/SVG/main"/>
                   </a:ext>
                 </a:extLst>
               </a:blip>
               <a:stretch>
-                <a:fillRect l="0" t="0" r="0" b="0"/>
+                <a:fillRect/>
               </a:stretch>
             </a:blipFill>
           </p:spPr>
         </p:sp>
         <p:sp>
           <p:nvSpPr>
-            <p:cNvPr name="Freeform 4" id="4"/>
+            <p:cNvPr id="4" name="Freeform 4"/>
             <p:cNvSpPr/>
             <p:nvPr/>
           </p:nvSpPr>
           <p:spPr>
-            <a:xfrm flipH="false" flipV="false" rot="0">
+            <a:xfrm>
               <a:off x="2036459" y="0"/>
               <a:ext cx="2389273" cy="2389273"/>
             </a:xfrm>
@@ -4600,9 +4988,9 @@
               <a:gdLst/>
               <a:ahLst/>
               <a:cxnLst/>
-              <a:rect r="r" b="b" t="t" l="l"/>
+              <a:rect l="l" t="t" r="r" b="b"/>
               <a:pathLst>
-                <a:path h="2389273" w="2389273">
+                <a:path w="2389273" h="2389273">
                   <a:moveTo>
                     <a:pt x="0" y="0"/>
                   </a:moveTo>
@@ -4626,24 +5014,24 @@
               <a:blip r:embed="rId2">
                 <a:extLst>
                   <a:ext uri="{96DAC541-7B7A-43D3-8B79-37D633B846F1}">
-                    <asvg:svgBlip xmlns:asvg="http://schemas.microsoft.com/office/drawing/2016/SVG/main" r:embed="rId3"/>
+                    <asvg:svgBlip xmlns:asvg="http://schemas.microsoft.com/office/drawing/2016/SVG/main"/>
                   </a:ext>
                 </a:extLst>
               </a:blip>
               <a:stretch>
-                <a:fillRect l="0" t="0" r="0" b="0"/>
+                <a:fillRect/>
               </a:stretch>
             </a:blipFill>
           </p:spPr>
         </p:sp>
         <p:sp>
           <p:nvSpPr>
-            <p:cNvPr name="Freeform 5" id="5"/>
+            <p:cNvPr id="5" name="Freeform 5"/>
             <p:cNvSpPr/>
             <p:nvPr/>
           </p:nvSpPr>
           <p:spPr>
-            <a:xfrm flipH="false" flipV="false" rot="0">
+            <a:xfrm>
               <a:off x="4072917" y="0"/>
               <a:ext cx="2389273" cy="2389273"/>
             </a:xfrm>
@@ -4652,9 +5040,9 @@
               <a:gdLst/>
               <a:ahLst/>
               <a:cxnLst/>
-              <a:rect r="r" b="b" t="t" l="l"/>
+              <a:rect l="l" t="t" r="r" b="b"/>
               <a:pathLst>
-                <a:path h="2389273" w="2389273">
+                <a:path w="2389273" h="2389273">
                   <a:moveTo>
                     <a:pt x="0" y="0"/>
                   </a:moveTo>
@@ -4678,12 +5066,12 @@
               <a:blip r:embed="rId2">
                 <a:extLst>
                   <a:ext uri="{96DAC541-7B7A-43D3-8B79-37D633B846F1}">
-                    <asvg:svgBlip xmlns:asvg="http://schemas.microsoft.com/office/drawing/2016/SVG/main" r:embed="rId3"/>
+                    <asvg:svgBlip xmlns:asvg="http://schemas.microsoft.com/office/drawing/2016/SVG/main"/>
                   </a:ext>
                 </a:extLst>
               </a:blip>
               <a:stretch>
-                <a:fillRect l="0" t="0" r="0" b="0"/>
+                <a:fillRect/>
               </a:stretch>
             </a:blipFill>
           </p:spPr>
@@ -4691,12 +5079,12 @@
       </p:grpSp>
       <p:grpSp>
         <p:nvGrpSpPr>
-          <p:cNvPr name="Group 6" id="6"/>
+          <p:cNvPr id="6" name="Group 6"/>
           <p:cNvGrpSpPr/>
           <p:nvPr/>
         </p:nvGrpSpPr>
         <p:grpSpPr>
-          <a:xfrm rot="0">
+          <a:xfrm>
             <a:off x="666750" y="666750"/>
             <a:ext cx="11201400" cy="10119750"/>
             <a:chOff x="0" y="0"/>
@@ -4705,12 +5093,12 @@
         </p:grpSpPr>
         <p:sp>
           <p:nvSpPr>
-            <p:cNvPr name="TextBox 7" id="7"/>
-            <p:cNvSpPr txBox="true"/>
+            <p:cNvPr id="7" name="TextBox 7"/>
+            <p:cNvSpPr txBox="1"/>
             <p:nvPr/>
           </p:nvSpPr>
           <p:spPr>
-            <a:xfrm rot="0">
+            <a:xfrm>
               <a:off x="0" y="-9525"/>
               <a:ext cx="14935200" cy="2972859"/>
             </a:xfrm>
@@ -4719,12 +5107,12 @@
             </a:prstGeom>
           </p:spPr>
           <p:txBody>
-            <a:bodyPr anchor="t" rtlCol="false" tIns="0" lIns="0" bIns="0" rIns="0">
+            <a:bodyPr lIns="0" tIns="0" rIns="0" bIns="0" rtlCol="0" anchor="t">
               <a:spAutoFit/>
             </a:bodyPr>
             <a:lstStyle/>
             <a:p>
-              <a:pPr algn="l" marL="0" indent="0" lvl="0">
+              <a:pPr marL="0" lvl="0" indent="0" algn="l">
                 <a:lnSpc>
                   <a:spcPts val="8000"/>
                 </a:lnSpc>
@@ -4749,12 +5137,12 @@
         </p:sp>
         <p:sp>
           <p:nvSpPr>
-            <p:cNvPr name="TextBox 8" id="8"/>
-            <p:cNvSpPr txBox="true"/>
+            <p:cNvPr id="8" name="TextBox 8"/>
+            <p:cNvSpPr txBox="1"/>
             <p:nvPr/>
           </p:nvSpPr>
           <p:spPr>
-            <a:xfrm rot="0">
+            <a:xfrm>
               <a:off x="0" y="2746513"/>
               <a:ext cx="13498957" cy="10746486"/>
             </a:xfrm>
@@ -4763,7 +5151,7 @@
             </a:prstGeom>
           </p:spPr>
           <p:txBody>
-            <a:bodyPr anchor="t" rtlCol="false" tIns="0" lIns="0" bIns="0" rIns="0">
+            <a:bodyPr lIns="0" tIns="0" rIns="0" bIns="0" rtlCol="0" anchor="t">
               <a:spAutoFit/>
             </a:bodyPr>
             <a:lstStyle/>
@@ -4773,9 +5161,10 @@
                   <a:spcPts val="3982"/>
                 </a:lnSpc>
               </a:pPr>
-            </a:p>
-            <a:p>
-              <a:pPr algn="l" marL="716431" indent="-358216" lvl="1">
+              <a:endParaRPr dirty="0"/>
+            </a:p>
+            <a:p>
+              <a:pPr marL="716431" lvl="1" indent="-358216" algn="l">
                 <a:lnSpc>
                   <a:spcPts val="3982"/>
                 </a:lnSpc>
@@ -4783,28 +5172,16 @@
                 <a:buChar char="•"/>
               </a:pPr>
               <a:r>
-                <a:rPr lang="en-US" sz="3318" spc="-99">
-                  <a:solidFill>
-                    <a:srgbClr val="4A4A4A"/>
-                  </a:solidFill>
-                  <a:latin typeface="TT Fors"/>
-                  <a:ea typeface="TT Fors"/>
-                  <a:cs typeface="TT Fors"/>
-                  <a:sym typeface="TT Fors"/>
-                </a:rPr>
-                <a:t>Us</a:t>
-              </a:r>
-              <a:r>
-                <a:rPr lang="en-US" sz="3318" spc="-99">
-                  <a:solidFill>
-                    <a:srgbClr val="4A4A4A"/>
-                  </a:solidFill>
-                  <a:latin typeface="TT Fors"/>
-                  <a:ea typeface="TT Fors"/>
-                  <a:cs typeface="TT Fors"/>
-                  <a:sym typeface="TT Fors"/>
-                </a:rPr>
-                <a:t>es real historical data to learn pricing patterns</a:t>
+                <a:rPr lang="en-US" sz="3318" spc="-99" dirty="0">
+                  <a:solidFill>
+                    <a:srgbClr val="4A4A4A"/>
+                  </a:solidFill>
+                  <a:latin typeface="TT Fors"/>
+                  <a:ea typeface="TT Fors"/>
+                  <a:cs typeface="TT Fors"/>
+                  <a:sym typeface="TT Fors"/>
+                </a:rPr>
+                <a:t>Uses real historical data to learn pricing patterns</a:t>
               </a:r>
             </a:p>
             <a:p>
@@ -4813,9 +5190,18 @@
                   <a:spcPts val="3982"/>
                 </a:lnSpc>
               </a:pPr>
-            </a:p>
-            <a:p>
-              <a:pPr algn="l" marL="716431" indent="-358216" lvl="1">
+              <a:endParaRPr lang="en-US" sz="3318" spc="-99" dirty="0">
+                <a:solidFill>
+                  <a:srgbClr val="4A4A4A"/>
+                </a:solidFill>
+                <a:latin typeface="TT Fors"/>
+                <a:ea typeface="TT Fors"/>
+                <a:cs typeface="TT Fors"/>
+                <a:sym typeface="TT Fors"/>
+              </a:endParaRPr>
+            </a:p>
+            <a:p>
+              <a:pPr marL="716431" lvl="1" indent="-358216" algn="l">
                 <a:lnSpc>
                   <a:spcPts val="3982"/>
                 </a:lnSpc>
@@ -4835,7 +5221,19 @@
                   <a:cs typeface="TT Fors"/>
                   <a:sym typeface="TT Fors"/>
                 </a:rPr>
-                <a:t>Predicts fair market prices f</a:t>
+                <a:t>Predicts fair market prices fo</a:t>
+              </a:r>
+              <a:r>
+                <a:rPr lang="en-US" sz="3318" u="none" strike="noStrike" spc="-99">
+                  <a:solidFill>
+                    <a:srgbClr val="4A4A4A"/>
+                  </a:solidFill>
+                  <a:latin typeface="TT Fors"/>
+                  <a:ea typeface="TT Fors"/>
+                  <a:cs typeface="TT Fors"/>
+                  <a:sym typeface="TT Fors"/>
+                </a:rPr>
+                <a:t>r</a:t>
               </a:r>
               <a:r>
                 <a:rPr lang="en-US" sz="3318" spc="-99">
@@ -4847,106 +5245,82 @@
                   <a:cs typeface="TT Fors"/>
                   <a:sym typeface="TT Fors"/>
                 </a:rPr>
+                <a:t> any </a:t>
+              </a:r>
+              <a:r>
+                <a:rPr lang="en-US" sz="3318" u="none" strike="noStrike" spc="-99">
+                  <a:solidFill>
+                    <a:srgbClr val="4A4A4A"/>
+                  </a:solidFill>
+                  <a:latin typeface="TT Fors"/>
+                  <a:ea typeface="TT Fors"/>
+                  <a:cs typeface="TT Fors"/>
+                  <a:sym typeface="TT Fors"/>
+                </a:rPr>
+                <a:t>car con</a:t>
+              </a:r>
+              <a:r>
+                <a:rPr lang="en-US" sz="3318" spc="-99">
+                  <a:solidFill>
+                    <a:srgbClr val="4A4A4A"/>
+                  </a:solidFill>
+                  <a:latin typeface="TT Fors"/>
+                  <a:ea typeface="TT Fors"/>
+                  <a:cs typeface="TT Fors"/>
+                  <a:sym typeface="TT Fors"/>
+                </a:rPr>
+                <a:t>f</a:t>
+              </a:r>
+              <a:r>
+                <a:rPr lang="en-US" sz="3318" u="none" strike="noStrike" spc="-99">
+                  <a:solidFill>
+                    <a:srgbClr val="4A4A4A"/>
+                  </a:solidFill>
+                  <a:latin typeface="TT Fors"/>
+                  <a:ea typeface="TT Fors"/>
+                  <a:cs typeface="TT Fors"/>
+                  <a:sym typeface="TT Fors"/>
+                </a:rPr>
+                <a:t>igur</a:t>
+              </a:r>
+              <a:r>
+                <a:rPr lang="en-US" sz="3318" spc="-99">
+                  <a:solidFill>
+                    <a:srgbClr val="4A4A4A"/>
+                  </a:solidFill>
+                  <a:latin typeface="TT Fors"/>
+                  <a:ea typeface="TT Fors"/>
+                  <a:cs typeface="TT Fors"/>
+                  <a:sym typeface="TT Fors"/>
+                </a:rPr>
+                <a:t>at</a:t>
+              </a:r>
+              <a:r>
+                <a:rPr lang="en-US" sz="3318" u="none" strike="noStrike" spc="-99">
+                  <a:solidFill>
+                    <a:srgbClr val="4A4A4A"/>
+                  </a:solidFill>
+                  <a:latin typeface="TT Fors"/>
+                  <a:ea typeface="TT Fors"/>
+                  <a:cs typeface="TT Fors"/>
+                  <a:sym typeface="TT Fors"/>
+                </a:rPr>
+                <a:t>i</a:t>
+              </a:r>
+              <a:r>
+                <a:rPr lang="en-US" sz="3318" spc="-99">
+                  <a:solidFill>
+                    <a:srgbClr val="4A4A4A"/>
+                  </a:solidFill>
+                  <a:latin typeface="TT Fors"/>
+                  <a:ea typeface="TT Fors"/>
+                  <a:cs typeface="TT Fors"/>
+                  <a:sym typeface="TT Fors"/>
+                </a:rPr>
                 <a:t>o</a:t>
               </a:r>
               <a:r>
-                <a:rPr lang="en-US" sz="3318" spc="-99" strike="noStrike" u="none">
-                  <a:solidFill>
-                    <a:srgbClr val="4A4A4A"/>
-                  </a:solidFill>
-                  <a:latin typeface="TT Fors"/>
-                  <a:ea typeface="TT Fors"/>
-                  <a:cs typeface="TT Fors"/>
-                  <a:sym typeface="TT Fors"/>
-                </a:rPr>
-                <a:t>r</a:t>
-              </a:r>
-              <a:r>
-                <a:rPr lang="en-US" sz="3318" spc="-99">
-                  <a:solidFill>
-                    <a:srgbClr val="4A4A4A"/>
-                  </a:solidFill>
-                  <a:latin typeface="TT Fors"/>
-                  <a:ea typeface="TT Fors"/>
-                  <a:cs typeface="TT Fors"/>
-                  <a:sym typeface="TT Fors"/>
-                </a:rPr>
-                <a:t> any </a:t>
-              </a:r>
-              <a:r>
-                <a:rPr lang="en-US" sz="3318" spc="-99" strike="noStrike" u="none">
-                  <a:solidFill>
-                    <a:srgbClr val="4A4A4A"/>
-                  </a:solidFill>
-                  <a:latin typeface="TT Fors"/>
-                  <a:ea typeface="TT Fors"/>
-                  <a:cs typeface="TT Fors"/>
-                  <a:sym typeface="TT Fors"/>
-                </a:rPr>
-                <a:t>car con</a:t>
-              </a:r>
-              <a:r>
-                <a:rPr lang="en-US" sz="3318" spc="-99">
-                  <a:solidFill>
-                    <a:srgbClr val="4A4A4A"/>
-                  </a:solidFill>
-                  <a:latin typeface="TT Fors"/>
-                  <a:ea typeface="TT Fors"/>
-                  <a:cs typeface="TT Fors"/>
-                  <a:sym typeface="TT Fors"/>
-                </a:rPr>
-                <a:t>f</a:t>
-              </a:r>
-              <a:r>
-                <a:rPr lang="en-US" sz="3318" spc="-99" strike="noStrike" u="none">
-                  <a:solidFill>
-                    <a:srgbClr val="4A4A4A"/>
-                  </a:solidFill>
-                  <a:latin typeface="TT Fors"/>
-                  <a:ea typeface="TT Fors"/>
-                  <a:cs typeface="TT Fors"/>
-                  <a:sym typeface="TT Fors"/>
-                </a:rPr>
-                <a:t>igur</a:t>
-              </a:r>
-              <a:r>
-                <a:rPr lang="en-US" sz="3318" spc="-99">
-                  <a:solidFill>
-                    <a:srgbClr val="4A4A4A"/>
-                  </a:solidFill>
-                  <a:latin typeface="TT Fors"/>
-                  <a:ea typeface="TT Fors"/>
-                  <a:cs typeface="TT Fors"/>
-                  <a:sym typeface="TT Fors"/>
-                </a:rPr>
-                <a:t>at</a:t>
-              </a:r>
-              <a:r>
-                <a:rPr lang="en-US" sz="3318" spc="-99" strike="noStrike" u="none">
-                  <a:solidFill>
-                    <a:srgbClr val="4A4A4A"/>
-                  </a:solidFill>
-                  <a:latin typeface="TT Fors"/>
-                  <a:ea typeface="TT Fors"/>
-                  <a:cs typeface="TT Fors"/>
-                  <a:sym typeface="TT Fors"/>
-                </a:rPr>
-                <a:t>i</a:t>
-              </a:r>
-              <a:r>
-                <a:rPr lang="en-US" sz="3318" spc="-99">
-                  <a:solidFill>
-                    <a:srgbClr val="4A4A4A"/>
-                  </a:solidFill>
-                  <a:latin typeface="TT Fors"/>
-                  <a:ea typeface="TT Fors"/>
-                  <a:cs typeface="TT Fors"/>
-                  <a:sym typeface="TT Fors"/>
-                </a:rPr>
-                <a:t>o</a:t>
-              </a:r>
-              <a:r>
-                <a:rPr lang="en-US" sz="3318" spc="-99" strike="noStrike" u="none">
+                <a:rPr lang="en-US" sz="3318" u="none" strike="noStrike" spc="-99">
                   <a:solidFill>
                     <a:srgbClr val="4A4A4A"/>
                   </a:solidFill>
@@ -4967,9 +5341,18 @@
                   <a:spcPct val="0"/>
                 </a:spcBef>
               </a:pPr>
-            </a:p>
-            <a:p>
-              <a:pPr algn="l" marL="716431" indent="-358216" lvl="1">
+              <a:endParaRPr lang="en-US" sz="3318" u="none" strike="noStrike" spc="-99" dirty="0">
+                <a:solidFill>
+                  <a:srgbClr val="4A4A4A"/>
+                </a:solidFill>
+                <a:latin typeface="TT Fors"/>
+                <a:ea typeface="TT Fors"/>
+                <a:cs typeface="TT Fors"/>
+                <a:sym typeface="TT Fors"/>
+              </a:endParaRPr>
+            </a:p>
+            <a:p>
+              <a:pPr marL="716431" lvl="1" indent="-358216" algn="l">
                 <a:lnSpc>
                   <a:spcPts val="3982"/>
                 </a:lnSpc>
@@ -4980,7 +5363,7 @@
                 <a:buChar char="•"/>
               </a:pPr>
               <a:r>
-                <a:rPr lang="en-US" sz="3318" spc="-99" strike="noStrike" u="none">
+                <a:rPr lang="en-US" sz="3318" u="none" strike="noStrike" spc="-99" dirty="0">
                   <a:solidFill>
                     <a:srgbClr val="4A4A4A"/>
                   </a:solidFill>
@@ -4992,7 +5375,7 @@
                 <a:t>P</a:t>
               </a:r>
               <a:r>
-                <a:rPr lang="en-US" sz="3318" spc="-99">
+                <a:rPr lang="en-US" sz="3318" spc="-99" dirty="0">
                   <a:solidFill>
                     <a:srgbClr val="4A4A4A"/>
                   </a:solidFill>
@@ -5004,7 +5387,7 @@
                 <a:t>r</a:t>
               </a:r>
               <a:r>
-                <a:rPr lang="en-US" sz="3318" spc="-99" strike="noStrike" u="none">
+                <a:rPr lang="en-US" sz="3318" u="none" strike="noStrike" spc="-99" dirty="0">
                   <a:solidFill>
                     <a:srgbClr val="4A4A4A"/>
                   </a:solidFill>
@@ -5016,7 +5399,7 @@
                 <a:t>ov</a:t>
               </a:r>
               <a:r>
-                <a:rPr lang="en-US" sz="3318" spc="-99">
+                <a:rPr lang="en-US" sz="3318" spc="-99" dirty="0">
                   <a:solidFill>
                     <a:srgbClr val="4A4A4A"/>
                   </a:solidFill>
@@ -5028,7 +5411,7 @@
                 <a:t>i</a:t>
               </a:r>
               <a:r>
-                <a:rPr lang="en-US" sz="3318" spc="-99" strike="noStrike" u="none">
+                <a:rPr lang="en-US" sz="3318" u="none" strike="noStrike" spc="-99" dirty="0">
                   <a:solidFill>
                     <a:srgbClr val="4A4A4A"/>
                   </a:solidFill>
@@ -5040,7 +5423,7 @@
                 <a:t>d</a:t>
               </a:r>
               <a:r>
-                <a:rPr lang="en-US" sz="3318" spc="-99">
+                <a:rPr lang="en-US" sz="3318" spc="-99" dirty="0">
                   <a:solidFill>
                     <a:srgbClr val="4A4A4A"/>
                   </a:solidFill>
@@ -5052,7 +5435,7 @@
                 <a:t>e</a:t>
               </a:r>
               <a:r>
-                <a:rPr lang="en-US" sz="3318" spc="-99" strike="noStrike" u="none">
+                <a:rPr lang="en-US" sz="3318" u="none" strike="noStrike" spc="-99" dirty="0">
                   <a:solidFill>
                     <a:srgbClr val="4A4A4A"/>
                   </a:solidFill>
@@ -5064,7 +5447,7 @@
                 <a:t>s</a:t>
               </a:r>
               <a:r>
-                <a:rPr lang="en-US" sz="3318" spc="-99">
+                <a:rPr lang="en-US" sz="3318" spc="-99" dirty="0">
                   <a:solidFill>
                     <a:srgbClr val="4A4A4A"/>
                   </a:solidFill>
@@ -5076,7 +5459,7 @@
                 <a:t> </a:t>
               </a:r>
               <a:r>
-                <a:rPr lang="en-US" sz="3318" spc="-99" strike="noStrike" u="none">
+                <a:rPr lang="en-US" sz="3318" u="none" strike="noStrike" spc="-99" dirty="0">
                   <a:solidFill>
                     <a:srgbClr val="4A4A4A"/>
                   </a:solidFill>
@@ -5088,7 +5471,7 @@
                 <a:t>m</a:t>
               </a:r>
               <a:r>
-                <a:rPr lang="en-US" sz="3318" spc="-99">
+                <a:rPr lang="en-US" sz="3318" spc="-99" dirty="0">
                   <a:solidFill>
                     <a:srgbClr val="4A4A4A"/>
                   </a:solidFill>
@@ -5100,7 +5483,7 @@
                 <a:t>ult</a:t>
               </a:r>
               <a:r>
-                <a:rPr lang="en-US" sz="3318" spc="-99" strike="noStrike" u="none">
+                <a:rPr lang="en-US" sz="3318" u="none" strike="noStrike" spc="-99" dirty="0">
                   <a:solidFill>
                     <a:srgbClr val="4A4A4A"/>
                   </a:solidFill>
@@ -5112,7 +5495,7 @@
                 <a:t>i-</a:t>
               </a:r>
               <a:r>
-                <a:rPr lang="en-US" sz="3318" spc="-99">
+                <a:rPr lang="en-US" sz="3318" spc="-99" dirty="0">
                   <a:solidFill>
                     <a:srgbClr val="4A4A4A"/>
                   </a:solidFill>
@@ -5124,7 +5507,7 @@
                 <a:t>ye</a:t>
               </a:r>
               <a:r>
-                <a:rPr lang="en-US" sz="3318" spc="-99" strike="noStrike" u="none">
+                <a:rPr lang="en-US" sz="3318" u="none" strike="noStrike" spc="-99" dirty="0">
                   <a:solidFill>
                     <a:srgbClr val="4A4A4A"/>
                   </a:solidFill>
@@ -5136,7 +5519,7 @@
                 <a:t>ar</a:t>
               </a:r>
               <a:r>
-                <a:rPr lang="en-US" sz="3318" spc="-99">
+                <a:rPr lang="en-US" sz="3318" spc="-99" dirty="0">
                   <a:solidFill>
                     <a:srgbClr val="4A4A4A"/>
                   </a:solidFill>
@@ -5148,7 +5531,7 @@
                 <a:t> </a:t>
               </a:r>
               <a:r>
-                <a:rPr lang="en-US" sz="3318" spc="-99" strike="noStrike" u="none">
+                <a:rPr lang="en-US" sz="3318" u="none" strike="noStrike" spc="-99" dirty="0">
                   <a:solidFill>
                     <a:srgbClr val="4A4A4A"/>
                   </a:solidFill>
@@ -5160,7 +5543,7 @@
                 <a:t>dep</a:t>
               </a:r>
               <a:r>
-                <a:rPr lang="en-US" sz="3318" spc="-99">
+                <a:rPr lang="en-US" sz="3318" spc="-99" dirty="0">
                   <a:solidFill>
                     <a:srgbClr val="4A4A4A"/>
                   </a:solidFill>
@@ -5172,7 +5555,7 @@
                 <a:t>re</a:t>
               </a:r>
               <a:r>
-                <a:rPr lang="en-US" sz="3318" spc="-99" strike="noStrike" u="none">
+                <a:rPr lang="en-US" sz="3318" u="none" strike="noStrike" spc="-99" dirty="0">
                   <a:solidFill>
                     <a:srgbClr val="4A4A4A"/>
                   </a:solidFill>
@@ -5184,7 +5567,7 @@
                 <a:t>cia</a:t>
               </a:r>
               <a:r>
-                <a:rPr lang="en-US" sz="3318" spc="-99">
+                <a:rPr lang="en-US" sz="3318" spc="-99" dirty="0">
                   <a:solidFill>
                     <a:srgbClr val="4A4A4A"/>
                   </a:solidFill>
@@ -5196,7 +5579,7 @@
                 <a:t>t</a:t>
               </a:r>
               <a:r>
-                <a:rPr lang="en-US" sz="3318" spc="-99" strike="noStrike" u="none">
+                <a:rPr lang="en-US" sz="3318" u="none" strike="noStrike" spc="-99" dirty="0">
                   <a:solidFill>
                     <a:srgbClr val="4A4A4A"/>
                   </a:solidFill>
@@ -5208,7 +5591,7 @@
                 <a:t>ion</a:t>
               </a:r>
               <a:r>
-                <a:rPr lang="en-US" sz="3318" spc="-99">
+                <a:rPr lang="en-US" sz="3318" spc="-99" dirty="0">
                   <a:solidFill>
                     <a:srgbClr val="4A4A4A"/>
                   </a:solidFill>
@@ -5220,7 +5603,7 @@
                 <a:t> </a:t>
               </a:r>
               <a:r>
-                <a:rPr lang="en-US" sz="3318" spc="-99" strike="noStrike" u="none">
+                <a:rPr lang="en-US" sz="3318" u="none" strike="noStrike" spc="-99" dirty="0">
                   <a:solidFill>
                     <a:srgbClr val="4A4A4A"/>
                   </a:solidFill>
@@ -5232,7 +5615,7 @@
                 <a:t>fo</a:t>
               </a:r>
               <a:r>
-                <a:rPr lang="en-US" sz="3318" spc="-99">
+                <a:rPr lang="en-US" sz="3318" spc="-99" dirty="0">
                   <a:solidFill>
                     <a:srgbClr val="4A4A4A"/>
                   </a:solidFill>
@@ -5244,7 +5627,7 @@
                 <a:t>re</a:t>
               </a:r>
               <a:r>
-                <a:rPr lang="en-US" sz="3318" spc="-99" strike="noStrike" u="none">
+                <a:rPr lang="en-US" sz="3318" u="none" strike="noStrike" spc="-99" dirty="0">
                   <a:solidFill>
                     <a:srgbClr val="4A4A4A"/>
                   </a:solidFill>
@@ -5256,7 +5639,7 @@
                 <a:t>ca</a:t>
               </a:r>
               <a:r>
-                <a:rPr lang="en-US" sz="3318" spc="-99">
+                <a:rPr lang="en-US" sz="3318" spc="-99" dirty="0">
                   <a:solidFill>
                     <a:srgbClr val="4A4A4A"/>
                   </a:solidFill>
@@ -5268,7 +5651,7 @@
                 <a:t>s</a:t>
               </a:r>
               <a:r>
-                <a:rPr lang="en-US" sz="3318" spc="-99" strike="noStrike" u="none">
+                <a:rPr lang="en-US" sz="3318" u="none" strike="noStrike" spc="-99" dirty="0">
                   <a:solidFill>
                     <a:srgbClr val="4A4A4A"/>
                   </a:solidFill>
@@ -5289,9 +5672,18 @@
                   <a:spcPct val="0"/>
                 </a:spcBef>
               </a:pPr>
-            </a:p>
-            <a:p>
-              <a:pPr algn="l" marL="716431" indent="-358216" lvl="1">
+              <a:endParaRPr lang="en-US" sz="3318" u="none" strike="noStrike" spc="-99" dirty="0">
+                <a:solidFill>
+                  <a:srgbClr val="4A4A4A"/>
+                </a:solidFill>
+                <a:latin typeface="TT Fors"/>
+                <a:ea typeface="TT Fors"/>
+                <a:cs typeface="TT Fors"/>
+                <a:sym typeface="TT Fors"/>
+              </a:endParaRPr>
+            </a:p>
+            <a:p>
+              <a:pPr marL="716431" lvl="1" indent="-358216" algn="l">
                 <a:lnSpc>
                   <a:spcPts val="3982"/>
                 </a:lnSpc>
@@ -5302,7 +5694,7 @@
                 <a:buChar char="•"/>
               </a:pPr>
               <a:r>
-                <a:rPr lang="en-US" sz="3318" spc="-99" strike="noStrike" u="none">
+                <a:rPr lang="en-US" sz="3318" u="none" strike="noStrike" spc="-99" dirty="0">
                   <a:solidFill>
                     <a:srgbClr val="4A4A4A"/>
                   </a:solidFill>
@@ -5314,7 +5706,7 @@
                 <a:t>Allows sid</a:t>
               </a:r>
               <a:r>
-                <a:rPr lang="en-US" sz="3318" spc="-99">
+                <a:rPr lang="en-US" sz="3318" spc="-99" dirty="0">
                   <a:solidFill>
                     <a:srgbClr val="4A4A4A"/>
                   </a:solidFill>
@@ -5326,7 +5718,7 @@
                 <a:t>e</a:t>
               </a:r>
               <a:r>
-                <a:rPr lang="en-US" sz="3318" spc="-99" strike="noStrike" u="none">
+                <a:rPr lang="en-US" sz="3318" u="none" strike="noStrike" spc="-99" dirty="0">
                   <a:solidFill>
                     <a:srgbClr val="4A4A4A"/>
                   </a:solidFill>
@@ -5338,7 +5730,7 @@
                 <a:t>-by-</a:t>
               </a:r>
               <a:r>
-                <a:rPr lang="en-US" sz="3318" spc="-99">
+                <a:rPr lang="en-US" sz="3318" spc="-99" dirty="0">
                   <a:solidFill>
                     <a:srgbClr val="4A4A4A"/>
                   </a:solidFill>
@@ -5350,7 +5742,7 @@
                 <a:t>s</a:t>
               </a:r>
               <a:r>
-                <a:rPr lang="en-US" sz="3318" spc="-99" strike="noStrike" u="none">
+                <a:rPr lang="en-US" sz="3318" u="none" strike="noStrike" spc="-99" dirty="0">
                   <a:solidFill>
                     <a:srgbClr val="4A4A4A"/>
                   </a:solidFill>
@@ -5362,7 +5754,7 @@
                 <a:t>ide</a:t>
               </a:r>
               <a:r>
-                <a:rPr lang="en-US" sz="3318" spc="-99">
+                <a:rPr lang="en-US" sz="3318" spc="-99" dirty="0">
                   <a:solidFill>
                     <a:srgbClr val="4A4A4A"/>
                   </a:solidFill>
@@ -5374,7 +5766,7 @@
                 <a:t> c</a:t>
               </a:r>
               <a:r>
-                <a:rPr lang="en-US" sz="3318" spc="-99" strike="noStrike" u="none">
+                <a:rPr lang="en-US" sz="3318" u="none" strike="noStrike" spc="-99" dirty="0">
                   <a:solidFill>
                     <a:srgbClr val="4A4A4A"/>
                   </a:solidFill>
@@ -5386,7 +5778,7 @@
                 <a:t>omp</a:t>
               </a:r>
               <a:r>
-                <a:rPr lang="en-US" sz="3318" spc="-99">
+                <a:rPr lang="en-US" sz="3318" spc="-99" dirty="0">
                   <a:solidFill>
                     <a:srgbClr val="4A4A4A"/>
                   </a:solidFill>
@@ -5398,7 +5790,7 @@
                 <a:t>a</a:t>
               </a:r>
               <a:r>
-                <a:rPr lang="en-US" sz="3318" spc="-99" strike="noStrike" u="none">
+                <a:rPr lang="en-US" sz="3318" u="none" strike="noStrike" spc="-99" dirty="0">
                   <a:solidFill>
                     <a:srgbClr val="4A4A4A"/>
                   </a:solidFill>
@@ -5410,7 +5802,7 @@
                 <a:t>riso</a:t>
               </a:r>
               <a:r>
-                <a:rPr lang="en-US" sz="3318" spc="-99">
+                <a:rPr lang="en-US" sz="3318" spc="-99" dirty="0">
                   <a:solidFill>
                     <a:srgbClr val="4A4A4A"/>
                   </a:solidFill>
@@ -5422,7 +5814,7 @@
                 <a:t>n</a:t>
               </a:r>
               <a:r>
-                <a:rPr lang="en-US" sz="3318" spc="-99" strike="noStrike" u="none">
+                <a:rPr lang="en-US" sz="3318" u="none" strike="noStrike" spc="-99" dirty="0">
                   <a:solidFill>
                     <a:srgbClr val="4A4A4A"/>
                   </a:solidFill>
@@ -5434,7 +5826,7 @@
                 <a:t> </a:t>
               </a:r>
               <a:r>
-                <a:rPr lang="en-US" sz="3318" spc="-99">
+                <a:rPr lang="en-US" sz="3318" spc="-99" dirty="0">
                   <a:solidFill>
                     <a:srgbClr val="4A4A4A"/>
                   </a:solidFill>
@@ -5446,7 +5838,7 @@
                 <a:t>o</a:t>
               </a:r>
               <a:r>
-                <a:rPr lang="en-US" sz="3318" spc="-99" strike="noStrike" u="none">
+                <a:rPr lang="en-US" sz="3318" u="none" strike="noStrike" spc="-99" dirty="0">
                   <a:solidFill>
                     <a:srgbClr val="4A4A4A"/>
                   </a:solidFill>
@@ -5458,7 +5850,7 @@
                 <a:t>f </a:t>
               </a:r>
               <a:r>
-                <a:rPr lang="en-US" sz="3318" spc="-99">
+                <a:rPr lang="en-US" sz="3318" spc="-99" dirty="0">
                   <a:solidFill>
                     <a:srgbClr val="4A4A4A"/>
                   </a:solidFill>
@@ -5470,7 +5862,7 @@
                 <a:t>t</a:t>
               </a:r>
               <a:r>
-                <a:rPr lang="en-US" sz="3318" spc="-99" strike="noStrike" u="none">
+                <a:rPr lang="en-US" sz="3318" u="none" strike="noStrike" spc="-99" dirty="0">
                   <a:solidFill>
                     <a:srgbClr val="4A4A4A"/>
                   </a:solidFill>
@@ -5482,7 +5874,7 @@
                 <a:t>wo</a:t>
               </a:r>
               <a:r>
-                <a:rPr lang="en-US" sz="3318" spc="-99">
+                <a:rPr lang="en-US" sz="3318" spc="-99" dirty="0">
                   <a:solidFill>
                     <a:srgbClr val="4A4A4A"/>
                   </a:solidFill>
@@ -5494,7 +5886,7 @@
                 <a:t> </a:t>
               </a:r>
               <a:r>
-                <a:rPr lang="en-US" sz="3318" spc="-99" strike="noStrike" u="none">
+                <a:rPr lang="en-US" sz="3318" u="none" strike="noStrike" spc="-99" dirty="0">
                   <a:solidFill>
                     <a:srgbClr val="4A4A4A"/>
                   </a:solidFill>
@@ -5506,7 +5898,7 @@
                 <a:t>car</a:t>
               </a:r>
               <a:r>
-                <a:rPr lang="en-US" sz="3318" spc="-99">
+                <a:rPr lang="en-US" sz="3318" spc="-99" dirty="0">
                   <a:solidFill>
                     <a:srgbClr val="4A4A4A"/>
                   </a:solidFill>
@@ -5527,9 +5919,18 @@
                   <a:spcPct val="0"/>
                 </a:spcBef>
               </a:pPr>
-            </a:p>
-            <a:p>
-              <a:pPr algn="l" marL="716431" indent="-358216" lvl="1">
+              <a:endParaRPr lang="en-US" sz="3318" spc="-99" dirty="0">
+                <a:solidFill>
+                  <a:srgbClr val="4A4A4A"/>
+                </a:solidFill>
+                <a:latin typeface="TT Fors"/>
+                <a:ea typeface="TT Fors"/>
+                <a:cs typeface="TT Fors"/>
+                <a:sym typeface="TT Fors"/>
+              </a:endParaRPr>
+            </a:p>
+            <a:p>
+              <a:pPr marL="716431" lvl="1" indent="-358216" algn="l">
                 <a:lnSpc>
                   <a:spcPts val="3982"/>
                 </a:lnSpc>
@@ -5540,7 +5941,7 @@
                 <a:buChar char="•"/>
               </a:pPr>
               <a:r>
-                <a:rPr lang="en-US" sz="3318" spc="-99" strike="noStrike" u="none">
+                <a:rPr lang="en-US" sz="3318" u="none" strike="noStrike" spc="-99" dirty="0">
                   <a:solidFill>
                     <a:srgbClr val="4A4A4A"/>
                   </a:solidFill>
@@ -5552,7 +5953,7 @@
                 <a:t>Us</a:t>
               </a:r>
               <a:r>
-                <a:rPr lang="en-US" sz="3318" spc="-99">
+                <a:rPr lang="en-US" sz="3318" spc="-99" dirty="0">
                   <a:solidFill>
                     <a:srgbClr val="4A4A4A"/>
                   </a:solidFill>
@@ -5564,7 +5965,7 @@
                 <a:t>e</a:t>
               </a:r>
               <a:r>
-                <a:rPr lang="en-US" sz="3318" spc="-99" strike="noStrike" u="none">
+                <a:rPr lang="en-US" sz="3318" u="none" strike="noStrike" spc="-99" dirty="0">
                   <a:solidFill>
                     <a:srgbClr val="4A4A4A"/>
                   </a:solidFill>
@@ -5576,7 +5977,7 @@
                 <a:t>s ensemb</a:t>
               </a:r>
               <a:r>
-                <a:rPr lang="en-US" sz="3318" spc="-99">
+                <a:rPr lang="en-US" sz="3318" spc="-99" dirty="0">
                   <a:solidFill>
                     <a:srgbClr val="4A4A4A"/>
                   </a:solidFill>
@@ -5588,7 +5989,7 @@
                 <a:t>le</a:t>
               </a:r>
               <a:r>
-                <a:rPr lang="en-US" sz="3318" spc="-99" strike="noStrike" u="none">
+                <a:rPr lang="en-US" sz="3318" u="none" strike="noStrike" spc="-99" dirty="0">
                   <a:solidFill>
                     <a:srgbClr val="4A4A4A"/>
                   </a:solidFill>
@@ -5600,7 +6001,7 @@
                 <a:t> ML model</a:t>
               </a:r>
               <a:r>
-                <a:rPr lang="en-US" sz="3318" spc="-99">
+                <a:rPr lang="en-US" sz="3318" spc="-99" dirty="0">
                   <a:solidFill>
                     <a:srgbClr val="4A4A4A"/>
                   </a:solidFill>
@@ -5612,7 +6013,7 @@
                 <a:t>s </a:t>
               </a:r>
               <a:r>
-                <a:rPr lang="en-US" sz="3318" spc="-99" strike="noStrike" u="none">
+                <a:rPr lang="en-US" sz="3318" u="none" strike="noStrike" spc="-99" dirty="0">
                   <a:solidFill>
                     <a:srgbClr val="4A4A4A"/>
                   </a:solidFill>
@@ -5624,7 +6025,7 @@
                 <a:t>for </a:t>
               </a:r>
               <a:r>
-                <a:rPr lang="en-US" sz="3318" spc="-99">
+                <a:rPr lang="en-US" sz="3318" spc="-99" dirty="0">
                   <a:solidFill>
                     <a:srgbClr val="4A4A4A"/>
                   </a:solidFill>
@@ -5636,7 +6037,7 @@
                 <a:t>h</a:t>
               </a:r>
               <a:r>
-                <a:rPr lang="en-US" sz="3318" spc="-99" strike="noStrike" u="none">
+                <a:rPr lang="en-US" sz="3318" u="none" strike="noStrike" spc="-99" dirty="0">
                   <a:solidFill>
                     <a:srgbClr val="4A4A4A"/>
                   </a:solidFill>
@@ -5648,7 +6049,7 @@
                 <a:t>igh pr</a:t>
               </a:r>
               <a:r>
-                <a:rPr lang="en-US" sz="3318" spc="-99">
+                <a:rPr lang="en-US" sz="3318" spc="-99" dirty="0">
                   <a:solidFill>
                     <a:srgbClr val="4A4A4A"/>
                   </a:solidFill>
@@ -5660,7 +6061,7 @@
                 <a:t>edict</a:t>
               </a:r>
               <a:r>
-                <a:rPr lang="en-US" sz="3318" spc="-99" strike="noStrike" u="none">
+                <a:rPr lang="en-US" sz="3318" u="none" strike="noStrike" spc="-99" dirty="0">
                   <a:solidFill>
                     <a:srgbClr val="4A4A4A"/>
                   </a:solidFill>
@@ -5672,7 +6073,7 @@
                 <a:t>ive</a:t>
               </a:r>
               <a:r>
-                <a:rPr lang="en-US" sz="3318" spc="-99">
+                <a:rPr lang="en-US" sz="3318" spc="-99" dirty="0">
                   <a:solidFill>
                     <a:srgbClr val="4A4A4A"/>
                   </a:solidFill>
@@ -5684,7 +6085,7 @@
                 <a:t> p</a:t>
               </a:r>
               <a:r>
-                <a:rPr lang="en-US" sz="3318" spc="-99" strike="noStrike" u="none">
+                <a:rPr lang="en-US" sz="3318" u="none" strike="noStrike" spc="-99" dirty="0">
                   <a:solidFill>
                     <a:srgbClr val="4A4A4A"/>
                   </a:solidFill>
@@ -5696,7 +6097,7 @@
                 <a:t>e</a:t>
               </a:r>
               <a:r>
-                <a:rPr lang="en-US" sz="3318" spc="-99">
+                <a:rPr lang="en-US" sz="3318" spc="-99" dirty="0">
                   <a:solidFill>
                     <a:srgbClr val="4A4A4A"/>
                   </a:solidFill>
@@ -5708,7 +6109,7 @@
                 <a:t>r</a:t>
               </a:r>
               <a:r>
-                <a:rPr lang="en-US" sz="3318" spc="-99" strike="noStrike" u="none">
+                <a:rPr lang="en-US" sz="3318" u="none" strike="noStrike" spc="-99" dirty="0">
                   <a:solidFill>
                     <a:srgbClr val="4A4A4A"/>
                   </a:solidFill>
@@ -5720,7 +6121,7 @@
                 <a:t>forma</a:t>
               </a:r>
               <a:r>
-                <a:rPr lang="en-US" sz="3318" spc="-99">
+                <a:rPr lang="en-US" sz="3318" spc="-99" dirty="0">
                   <a:solidFill>
                     <a:srgbClr val="4A4A4A"/>
                   </a:solidFill>
@@ -5732,7 +6133,7 @@
                 <a:t>n</a:t>
               </a:r>
               <a:r>
-                <a:rPr lang="en-US" sz="3318" spc="-99" strike="noStrike" u="none">
+                <a:rPr lang="en-US" sz="3318" u="none" strike="noStrike" spc="-99" dirty="0">
                   <a:solidFill>
                     <a:srgbClr val="4A4A4A"/>
                   </a:solidFill>
@@ -5753,9 +6154,18 @@
                   <a:spcPct val="0"/>
                 </a:spcBef>
               </a:pPr>
-            </a:p>
-            <a:p>
-              <a:pPr algn="l" marL="716431" indent="-358216" lvl="1">
+              <a:endParaRPr lang="en-US" sz="3318" u="none" strike="noStrike" spc="-99" dirty="0">
+                <a:solidFill>
+                  <a:srgbClr val="4A4A4A"/>
+                </a:solidFill>
+                <a:latin typeface="TT Fors"/>
+                <a:ea typeface="TT Fors"/>
+                <a:cs typeface="TT Fors"/>
+                <a:sym typeface="TT Fors"/>
+              </a:endParaRPr>
+            </a:p>
+            <a:p>
+              <a:pPr marL="716431" lvl="1" indent="-358216" algn="l">
                 <a:lnSpc>
                   <a:spcPts val="3982"/>
                 </a:lnSpc>
@@ -5766,7 +6176,7 @@
                 <a:buChar char="•"/>
               </a:pPr>
               <a:r>
-                <a:rPr lang="en-US" sz="3318" spc="-99" strike="noStrike" u="none">
+                <a:rPr lang="en-US" sz="3318" u="none" strike="noStrike" spc="-99" dirty="0">
                   <a:solidFill>
                     <a:srgbClr val="4A4A4A"/>
                   </a:solidFill>
@@ -5778,7 +6188,7 @@
                 <a:t>Offers a</a:t>
               </a:r>
               <a:r>
-                <a:rPr lang="en-US" sz="3318" spc="-99">
+                <a:rPr lang="en-US" sz="3318" spc="-99" dirty="0">
                   <a:solidFill>
                     <a:srgbClr val="4A4A4A"/>
                   </a:solidFill>
@@ -5790,7 +6200,7 @@
                 <a:t> fa</a:t>
               </a:r>
               <a:r>
-                <a:rPr lang="en-US" sz="3318" spc="-99" strike="noStrike" u="none">
+                <a:rPr lang="en-US" sz="3318" u="none" strike="noStrike" spc="-99" dirty="0">
                   <a:solidFill>
                     <a:srgbClr val="4A4A4A"/>
                   </a:solidFill>
@@ -5802,7 +6212,7 @@
                 <a:t>st</a:t>
               </a:r>
               <a:r>
-                <a:rPr lang="en-US" sz="3318" spc="-99">
+                <a:rPr lang="en-US" sz="3318" spc="-99" dirty="0">
                   <a:solidFill>
                     <a:srgbClr val="4A4A4A"/>
                   </a:solidFill>
@@ -5814,7 +6224,7 @@
                 <a:t> </a:t>
               </a:r>
               <a:r>
-                <a:rPr lang="en-US" sz="3318" spc="-99" strike="noStrike" u="none">
+                <a:rPr lang="en-US" sz="3318" u="none" strike="noStrike" spc="-99" dirty="0">
                   <a:solidFill>
                     <a:srgbClr val="4A4A4A"/>
                   </a:solidFill>
@@ -5826,7 +6236,7 @@
                 <a:t>an</a:t>
               </a:r>
               <a:r>
-                <a:rPr lang="en-US" sz="3318" spc="-99">
+                <a:rPr lang="en-US" sz="3318" spc="-99" dirty="0">
                   <a:solidFill>
                     <a:srgbClr val="4A4A4A"/>
                   </a:solidFill>
@@ -5838,7 +6248,7 @@
                 <a:t>d e</a:t>
               </a:r>
               <a:r>
-                <a:rPr lang="en-US" sz="3318" spc="-99" strike="noStrike" u="none">
+                <a:rPr lang="en-US" sz="3318" u="none" strike="noStrike" spc="-99" dirty="0">
                   <a:solidFill>
                     <a:srgbClr val="4A4A4A"/>
                   </a:solidFill>
@@ -5850,7 +6260,7 @@
                 <a:t>a</a:t>
               </a:r>
               <a:r>
-                <a:rPr lang="en-US" sz="3318" spc="-99">
+                <a:rPr lang="en-US" sz="3318" spc="-99" dirty="0">
                   <a:solidFill>
                     <a:srgbClr val="4A4A4A"/>
                   </a:solidFill>
@@ -5862,7 +6272,7 @@
                 <a:t>s</a:t>
               </a:r>
               <a:r>
-                <a:rPr lang="en-US" sz="3318" spc="-99" strike="noStrike" u="none">
+                <a:rPr lang="en-US" sz="3318" u="none" strike="noStrike" spc="-99" dirty="0">
                   <a:solidFill>
                     <a:srgbClr val="4A4A4A"/>
                   </a:solidFill>
@@ -5874,7 +6284,7 @@
                 <a:t>y-to-u</a:t>
               </a:r>
               <a:r>
-                <a:rPr lang="en-US" sz="3318" spc="-99">
+                <a:rPr lang="en-US" sz="3318" spc="-99" dirty="0">
                   <a:solidFill>
                     <a:srgbClr val="4A4A4A"/>
                   </a:solidFill>
@@ -5886,7 +6296,7 @@
                 <a:t>se</a:t>
               </a:r>
               <a:r>
-                <a:rPr lang="en-US" sz="3318" spc="-99" strike="noStrike" u="none">
+                <a:rPr lang="en-US" sz="3318" u="none" strike="noStrike" spc="-99" dirty="0">
                   <a:solidFill>
                     <a:srgbClr val="4A4A4A"/>
                   </a:solidFill>
@@ -5898,7 +6308,7 @@
                 <a:t> web</a:t>
               </a:r>
               <a:r>
-                <a:rPr lang="en-US" sz="3318" spc="-99">
+                <a:rPr lang="en-US" sz="3318" spc="-99" dirty="0">
                   <a:solidFill>
                     <a:srgbClr val="4A4A4A"/>
                   </a:solidFill>
@@ -5910,7 +6320,7 @@
                 <a:t> inter</a:t>
               </a:r>
               <a:r>
-                <a:rPr lang="en-US" sz="3318" spc="-99" strike="noStrike" u="none">
+                <a:rPr lang="en-US" sz="3318" u="none" strike="noStrike" spc="-99" dirty="0">
                   <a:solidFill>
                     <a:srgbClr val="4A4A4A"/>
                   </a:solidFill>
@@ -5922,7 +6332,7 @@
                 <a:t>f</a:t>
               </a:r>
               <a:r>
-                <a:rPr lang="en-US" sz="3318" spc="-99">
+                <a:rPr lang="en-US" sz="3318" spc="-99" dirty="0">
                   <a:solidFill>
                     <a:srgbClr val="4A4A4A"/>
                   </a:solidFill>
@@ -5935,7 +6345,7 @@
               </a:r>
             </a:p>
             <a:p>
-              <a:pPr algn="l" marL="0" indent="0" lvl="0">
+              <a:pPr marL="0" lvl="0" indent="0" algn="l">
                 <a:lnSpc>
                   <a:spcPts val="3982"/>
                 </a:lnSpc>
@@ -5943,9 +6353,18 @@
                   <a:spcPct val="0"/>
                 </a:spcBef>
               </a:pPr>
-            </a:p>
-            <a:p>
-              <a:pPr algn="l" marL="0" indent="0" lvl="0">
+              <a:endParaRPr lang="en-US" sz="3318" spc="-99" dirty="0">
+                <a:solidFill>
+                  <a:srgbClr val="4A4A4A"/>
+                </a:solidFill>
+                <a:latin typeface="TT Fors"/>
+                <a:ea typeface="TT Fors"/>
+                <a:cs typeface="TT Fors"/>
+                <a:sym typeface="TT Fors"/>
+              </a:endParaRPr>
+            </a:p>
+            <a:p>
+              <a:pPr marL="0" lvl="0" indent="0" algn="l">
                 <a:lnSpc>
                   <a:spcPts val="3982"/>
                 </a:lnSpc>
@@ -5953,6 +6372,15 @@
                   <a:spcPct val="0"/>
                 </a:spcBef>
               </a:pPr>
+              <a:endParaRPr lang="en-US" sz="3318" spc="-99" dirty="0">
+                <a:solidFill>
+                  <a:srgbClr val="4A4A4A"/>
+                </a:solidFill>
+                <a:latin typeface="TT Fors"/>
+                <a:ea typeface="TT Fors"/>
+                <a:cs typeface="TT Fors"/>
+                <a:sym typeface="TT Fors"/>
+              </a:endParaRPr>
             </a:p>
           </p:txBody>
         </p:sp>
@@ -5966,13 +6394,14 @@
 </file>
 
 <file path=ppt/slides/slide4.xml><?xml version="1.0" encoding="utf-8"?>
-<p:sld xmlns:p="http://schemas.openxmlformats.org/presentationml/2006/main" xmlns:a="http://schemas.openxmlformats.org/drawingml/2006/main" xmlns:r="http://schemas.openxmlformats.org/officeDocument/2006/relationships">
+<p:sld xmlns:a="http://schemas.openxmlformats.org/drawingml/2006/main" xmlns:r="http://schemas.openxmlformats.org/officeDocument/2006/relationships" xmlns:p="http://schemas.openxmlformats.org/presentationml/2006/main">
   <p:cSld>
     <p:bg>
       <p:bgPr>
         <a:solidFill>
           <a:srgbClr val="F5F5F5"/>
         </a:solidFill>
+        <a:effectLst/>
       </p:bgPr>
     </p:bg>
     <p:spTree>
@@ -5991,12 +6420,12 @@
       </p:grpSpPr>
       <p:grpSp>
         <p:nvGrpSpPr>
-          <p:cNvPr name="Group 2" id="2"/>
+          <p:cNvPr id="2" name="Group 2"/>
           <p:cNvGrpSpPr/>
           <p:nvPr/>
         </p:nvGrpSpPr>
         <p:grpSpPr>
-          <a:xfrm rot="0">
+          <a:xfrm>
             <a:off x="666750" y="666750"/>
             <a:ext cx="11201400" cy="9232523"/>
             <a:chOff x="0" y="0"/>
@@ -6005,12 +6434,12 @@
         </p:grpSpPr>
         <p:sp>
           <p:nvSpPr>
-            <p:cNvPr name="TextBox 3" id="3"/>
-            <p:cNvSpPr txBox="true"/>
+            <p:cNvPr id="3" name="TextBox 3"/>
+            <p:cNvSpPr txBox="1"/>
             <p:nvPr/>
           </p:nvSpPr>
           <p:spPr>
-            <a:xfrm rot="0">
+            <a:xfrm>
               <a:off x="0" y="-9525"/>
               <a:ext cx="14935200" cy="1626659"/>
             </a:xfrm>
@@ -6019,12 +6448,12 @@
             </a:prstGeom>
           </p:spPr>
           <p:txBody>
-            <a:bodyPr anchor="t" rtlCol="false" tIns="0" lIns="0" bIns="0" rIns="0">
+            <a:bodyPr lIns="0" tIns="0" rIns="0" bIns="0" rtlCol="0" anchor="t">
               <a:spAutoFit/>
             </a:bodyPr>
             <a:lstStyle/>
             <a:p>
-              <a:pPr algn="l" marL="0" indent="0" lvl="0">
+              <a:pPr marL="0" lvl="0" indent="0" algn="l">
                 <a:lnSpc>
                   <a:spcPts val="8000"/>
                 </a:lnSpc>
@@ -6049,12 +6478,12 @@
         </p:sp>
         <p:sp>
           <p:nvSpPr>
-            <p:cNvPr name="TextBox 4" id="4"/>
-            <p:cNvSpPr txBox="true"/>
+            <p:cNvPr id="4" name="TextBox 4"/>
+            <p:cNvSpPr txBox="1"/>
             <p:nvPr/>
           </p:nvSpPr>
           <p:spPr>
-            <a:xfrm rot="0">
+            <a:xfrm>
               <a:off x="0" y="2235200"/>
               <a:ext cx="13498957" cy="10074831"/>
             </a:xfrm>
@@ -6063,7 +6492,7 @@
             </a:prstGeom>
           </p:spPr>
           <p:txBody>
-            <a:bodyPr anchor="t" rtlCol="false" tIns="0" lIns="0" bIns="0" rIns="0">
+            <a:bodyPr lIns="0" tIns="0" rIns="0" bIns="0" rtlCol="0" anchor="t">
               <a:spAutoFit/>
             </a:bodyPr>
             <a:lstStyle/>
@@ -6073,9 +6502,10 @@
                   <a:spcPts val="3982"/>
                 </a:lnSpc>
               </a:pPr>
-            </a:p>
-            <a:p>
-              <a:pPr algn="l" marL="716431" indent="-358216" lvl="1">
+              <a:endParaRPr/>
+            </a:p>
+            <a:p>
+              <a:pPr marL="716431" lvl="1" indent="-358216" algn="l">
                 <a:lnSpc>
                   <a:spcPts val="3982"/>
                 </a:lnSpc>
@@ -6092,19 +6522,7 @@
                   <a:cs typeface="TT Fors"/>
                   <a:sym typeface="TT Fors"/>
                 </a:rPr>
-                <a:t>ASP.NE</a:t>
-              </a:r>
-              <a:r>
-                <a:rPr lang="en-US" sz="3318" spc="-99">
-                  <a:solidFill>
-                    <a:srgbClr val="4A4A4A"/>
-                  </a:solidFill>
-                  <a:latin typeface="TT Fors"/>
-                  <a:ea typeface="TT Fors"/>
-                  <a:cs typeface="TT Fors"/>
-                  <a:sym typeface="TT Fors"/>
-                </a:rPr>
-                <a:t>T Core backend</a:t>
+                <a:t>ASP.NET Core backend</a:t>
               </a:r>
             </a:p>
             <a:p>
@@ -6113,9 +6531,18 @@
                   <a:spcPts val="3982"/>
                 </a:lnSpc>
               </a:pPr>
-            </a:p>
-            <a:p>
-              <a:pPr algn="l" marL="716431" indent="-358216" lvl="1">
+              <a:endParaRPr lang="en-US" sz="3318" spc="-99">
+                <a:solidFill>
+                  <a:srgbClr val="4A4A4A"/>
+                </a:solidFill>
+                <a:latin typeface="TT Fors"/>
+                <a:ea typeface="TT Fors"/>
+                <a:cs typeface="TT Fors"/>
+                <a:sym typeface="TT Fors"/>
+              </a:endParaRPr>
+            </a:p>
+            <a:p>
+              <a:pPr marL="716431" lvl="1" indent="-358216" algn="l">
                 <a:lnSpc>
                   <a:spcPts val="3982"/>
                 </a:lnSpc>
@@ -6141,9 +6568,18 @@
                   <a:spcPts val="3982"/>
                 </a:lnSpc>
               </a:pPr>
-            </a:p>
-            <a:p>
-              <a:pPr algn="l" marL="716431" indent="-358216" lvl="1">
+              <a:endParaRPr lang="en-US" sz="3318" spc="-99">
+                <a:solidFill>
+                  <a:srgbClr val="4A4A4A"/>
+                </a:solidFill>
+                <a:latin typeface="TT Fors"/>
+                <a:ea typeface="TT Fors"/>
+                <a:cs typeface="TT Fors"/>
+                <a:sym typeface="TT Fors"/>
+              </a:endParaRPr>
+            </a:p>
+            <a:p>
+              <a:pPr marL="716431" lvl="1" indent="-358216" algn="l">
                 <a:lnSpc>
                   <a:spcPts val="3982"/>
                 </a:lnSpc>
@@ -6163,7 +6599,19 @@
                   <a:cs typeface="TT Fors"/>
                   <a:sym typeface="TT Fors"/>
                 </a:rPr>
-                <a:t>CLI</a:t>
+                <a:t>CLI </a:t>
+              </a:r>
+              <a:r>
+                <a:rPr lang="en-US" sz="3318" u="none" strike="noStrike" spc="-99">
+                  <a:solidFill>
+                    <a:srgbClr val="4A4A4A"/>
+                  </a:solidFill>
+                  <a:latin typeface="TT Fors"/>
+                  <a:ea typeface="TT Fors"/>
+                  <a:cs typeface="TT Fors"/>
+                  <a:sym typeface="TT Fors"/>
+                </a:rPr>
+                <a:t>tr</a:t>
               </a:r>
               <a:r>
                 <a:rPr lang="en-US" sz="3318" spc="-99">
@@ -6175,19 +6623,19 @@
                   <a:cs typeface="TT Fors"/>
                   <a:sym typeface="TT Fors"/>
                 </a:rPr>
-                <a:t> </a:t>
-              </a:r>
-              <a:r>
-                <a:rPr lang="en-US" sz="3318" spc="-99" strike="noStrike" u="none">
-                  <a:solidFill>
-                    <a:srgbClr val="4A4A4A"/>
-                  </a:solidFill>
-                  <a:latin typeface="TT Fors"/>
-                  <a:ea typeface="TT Fors"/>
-                  <a:cs typeface="TT Fors"/>
-                  <a:sym typeface="TT Fors"/>
-                </a:rPr>
-                <a:t>tr</a:t>
+                <a:t>a</a:t>
+              </a:r>
+              <a:r>
+                <a:rPr lang="en-US" sz="3318" u="none" strike="noStrike" spc="-99">
+                  <a:solidFill>
+                    <a:srgbClr val="4A4A4A"/>
+                  </a:solidFill>
+                  <a:latin typeface="TT Fors"/>
+                  <a:ea typeface="TT Fors"/>
+                  <a:cs typeface="TT Fors"/>
+                  <a:sym typeface="TT Fors"/>
+                </a:rPr>
+                <a:t>i</a:t>
               </a:r>
               <a:r>
                 <a:rPr lang="en-US" sz="3318" spc="-99">
@@ -6199,19 +6647,19 @@
                   <a:cs typeface="TT Fors"/>
                   <a:sym typeface="TT Fors"/>
                 </a:rPr>
-                <a:t>a</a:t>
-              </a:r>
-              <a:r>
-                <a:rPr lang="en-US" sz="3318" spc="-99" strike="noStrike" u="none">
-                  <a:solidFill>
-                    <a:srgbClr val="4A4A4A"/>
-                  </a:solidFill>
-                  <a:latin typeface="TT Fors"/>
-                  <a:ea typeface="TT Fors"/>
-                  <a:cs typeface="TT Fors"/>
-                  <a:sym typeface="TT Fors"/>
-                </a:rPr>
-                <a:t>i</a:t>
+                <a:t>n</a:t>
+              </a:r>
+              <a:r>
+                <a:rPr lang="en-US" sz="3318" u="none" strike="noStrike" spc="-99">
+                  <a:solidFill>
+                    <a:srgbClr val="4A4A4A"/>
+                  </a:solidFill>
+                  <a:latin typeface="TT Fors"/>
+                  <a:ea typeface="TT Fors"/>
+                  <a:cs typeface="TT Fors"/>
+                  <a:sym typeface="TT Fors"/>
+                </a:rPr>
+                <a:t>er</a:t>
               </a:r>
               <a:r>
                 <a:rPr lang="en-US" sz="3318" spc="-99">
@@ -6223,19 +6671,19 @@
                   <a:cs typeface="TT Fors"/>
                   <a:sym typeface="TT Fors"/>
                 </a:rPr>
-                <a:t>n</a:t>
-              </a:r>
-              <a:r>
-                <a:rPr lang="en-US" sz="3318" spc="-99" strike="noStrike" u="none">
-                  <a:solidFill>
-                    <a:srgbClr val="4A4A4A"/>
-                  </a:solidFill>
-                  <a:latin typeface="TT Fors"/>
-                  <a:ea typeface="TT Fors"/>
-                  <a:cs typeface="TT Fors"/>
-                  <a:sym typeface="TT Fors"/>
-                </a:rPr>
-                <a:t>er</a:t>
+                <a:t> for m</a:t>
+              </a:r>
+              <a:r>
+                <a:rPr lang="en-US" sz="3318" u="none" strike="noStrike" spc="-99">
+                  <a:solidFill>
+                    <a:srgbClr val="4A4A4A"/>
+                  </a:solidFill>
+                  <a:latin typeface="TT Fors"/>
+                  <a:ea typeface="TT Fors"/>
+                  <a:cs typeface="TT Fors"/>
+                  <a:sym typeface="TT Fors"/>
+                </a:rPr>
+                <a:t>odel bu</a:t>
               </a:r>
               <a:r>
                 <a:rPr lang="en-US" sz="3318" spc="-99">
@@ -6247,34 +6695,10 @@
                   <a:cs typeface="TT Fors"/>
                   <a:sym typeface="TT Fors"/>
                 </a:rPr>
-                <a:t> for m</a:t>
-              </a:r>
-              <a:r>
-                <a:rPr lang="en-US" sz="3318" spc="-99" strike="noStrike" u="none">
-                  <a:solidFill>
-                    <a:srgbClr val="4A4A4A"/>
-                  </a:solidFill>
-                  <a:latin typeface="TT Fors"/>
-                  <a:ea typeface="TT Fors"/>
-                  <a:cs typeface="TT Fors"/>
-                  <a:sym typeface="TT Fors"/>
-                </a:rPr>
-                <a:t>odel bu</a:t>
-              </a:r>
-              <a:r>
-                <a:rPr lang="en-US" sz="3318" spc="-99">
-                  <a:solidFill>
-                    <a:srgbClr val="4A4A4A"/>
-                  </a:solidFill>
-                  <a:latin typeface="TT Fors"/>
-                  <a:ea typeface="TT Fors"/>
-                  <a:cs typeface="TT Fors"/>
-                  <a:sym typeface="TT Fors"/>
-                </a:rPr>
                 <a:t>il</a:t>
               </a:r>
               <a:r>
-                <a:rPr lang="en-US" sz="3318" spc="-99" strike="noStrike" u="none">
+                <a:rPr lang="en-US" sz="3318" u="none" strike="noStrike" spc="-99">
                   <a:solidFill>
                     <a:srgbClr val="4A4A4A"/>
                   </a:solidFill>
@@ -6307,9 +6731,18 @@
                   <a:spcPct val="0"/>
                 </a:spcBef>
               </a:pPr>
-            </a:p>
-            <a:p>
-              <a:pPr algn="l" marL="716431" indent="-358216" lvl="1">
+              <a:endParaRPr lang="en-US" sz="3318" spc="-99">
+                <a:solidFill>
+                  <a:srgbClr val="4A4A4A"/>
+                </a:solidFill>
+                <a:latin typeface="TT Fors"/>
+                <a:ea typeface="TT Fors"/>
+                <a:cs typeface="TT Fors"/>
+                <a:sym typeface="TT Fors"/>
+              </a:endParaRPr>
+            </a:p>
+            <a:p>
+              <a:pPr marL="716431" lvl="1" indent="-358216" algn="l">
                 <a:lnSpc>
                   <a:spcPts val="3982"/>
                 </a:lnSpc>
@@ -6320,7 +6753,7 @@
                 <a:buChar char="•"/>
               </a:pPr>
               <a:r>
-                <a:rPr lang="en-US" sz="3318" spc="-99" strike="noStrike" u="none">
+                <a:rPr lang="en-US" sz="3318" u="none" strike="noStrike" spc="-99">
                   <a:solidFill>
                     <a:srgbClr val="4A4A4A"/>
                   </a:solidFill>
@@ -6344,7 +6777,7 @@
                 <a:t> a</a:t>
               </a:r>
               <a:r>
-                <a:rPr lang="en-US" sz="3318" spc="-99" strike="noStrike" u="none">
+                <a:rPr lang="en-US" sz="3318" u="none" strike="noStrike" spc="-99">
                   <a:solidFill>
                     <a:srgbClr val="4A4A4A"/>
                   </a:solidFill>
@@ -6368,7 +6801,7 @@
                 <a:t>g</a:t>
               </a:r>
               <a:r>
-                <a:rPr lang="en-US" sz="3318" spc="-99" strike="noStrike" u="none">
+                <a:rPr lang="en-US" sz="3318" u="none" strike="noStrike" spc="-99">
                   <a:solidFill>
                     <a:srgbClr val="4A4A4A"/>
                   </a:solidFill>
@@ -6389,9 +6822,18 @@
                   <a:spcPct val="0"/>
                 </a:spcBef>
               </a:pPr>
-            </a:p>
-            <a:p>
-              <a:pPr algn="l" marL="716431" indent="-358216" lvl="1">
+              <a:endParaRPr lang="en-US" sz="3318" u="none" strike="noStrike" spc="-99">
+                <a:solidFill>
+                  <a:srgbClr val="4A4A4A"/>
+                </a:solidFill>
+                <a:latin typeface="TT Fors"/>
+                <a:ea typeface="TT Fors"/>
+                <a:cs typeface="TT Fors"/>
+                <a:sym typeface="TT Fors"/>
+              </a:endParaRPr>
+            </a:p>
+            <a:p>
+              <a:pPr marL="716431" lvl="1" indent="-358216" algn="l">
                 <a:lnSpc>
                   <a:spcPts val="3982"/>
                 </a:lnSpc>
@@ -6402,7 +6844,7 @@
                 <a:buChar char="•"/>
               </a:pPr>
               <a:r>
-                <a:rPr lang="en-US" sz="3318" spc="-99" strike="noStrike" u="none">
+                <a:rPr lang="en-US" sz="3318" u="none" strike="noStrike" spc="-99">
                   <a:solidFill>
                     <a:srgbClr val="4A4A4A"/>
                   </a:solidFill>
@@ -6426,7 +6868,7 @@
                 <a:t>ra</a:t>
               </a:r>
               <a:r>
-                <a:rPr lang="en-US" sz="3318" spc="-99" strike="noStrike" u="none">
+                <a:rPr lang="en-US" sz="3318" u="none" strike="noStrike" spc="-99">
                   <a:solidFill>
                     <a:srgbClr val="4A4A4A"/>
                   </a:solidFill>
@@ -6450,7 +6892,7 @@
                 <a:t>n</a:t>
               </a:r>
               <a:r>
-                <a:rPr lang="en-US" sz="3318" spc="-99" strike="noStrike" u="none">
+                <a:rPr lang="en-US" sz="3318" u="none" strike="noStrike" spc="-99">
                   <a:solidFill>
                     <a:srgbClr val="4A4A4A"/>
                   </a:solidFill>
@@ -6474,7 +6916,7 @@
                 <a:t> m</a:t>
               </a:r>
               <a:r>
-                <a:rPr lang="en-US" sz="3318" spc="-99" strike="noStrike" u="none">
+                <a:rPr lang="en-US" sz="3318" u="none" strike="noStrike" spc="-99">
                   <a:solidFill>
                     <a:srgbClr val="4A4A4A"/>
                   </a:solidFill>
@@ -6498,7 +6940,7 @@
                 <a:t>e</a:t>
               </a:r>
               <a:r>
-                <a:rPr lang="en-US" sz="3318" spc="-99" strike="noStrike" u="none">
+                <a:rPr lang="en-US" sz="3318" u="none" strike="noStrike" spc="-99">
                   <a:solidFill>
                     <a:srgbClr val="4A4A4A"/>
                   </a:solidFill>
@@ -6522,7 +6964,7 @@
                 <a:t> </a:t>
               </a:r>
               <a:r>
-                <a:rPr lang="en-US" sz="3318" spc="-99" strike="noStrike" u="none">
+                <a:rPr lang="en-US" sz="3318" u="none" strike="noStrike" spc="-99">
                   <a:solidFill>
                     <a:srgbClr val="4A4A4A"/>
                   </a:solidFill>
@@ -6546,7 +6988,7 @@
                 <a:t>d</a:t>
               </a:r>
               <a:r>
-                <a:rPr lang="en-US" sz="3318" spc="-99" strike="noStrike" u="none">
+                <a:rPr lang="en-US" sz="3318" u="none" strike="noStrike" spc="-99">
                   <a:solidFill>
                     <a:srgbClr val="4A4A4A"/>
                   </a:solidFill>
@@ -6570,7 +7012,7 @@
                 <a:t>e</a:t>
               </a:r>
               <a:r>
-                <a:rPr lang="en-US" sz="3318" spc="-99" strike="noStrike" u="none">
+                <a:rPr lang="en-US" sz="3318" u="none" strike="noStrike" spc="-99">
                   <a:solidFill>
                     <a:srgbClr val="4A4A4A"/>
                   </a:solidFill>
@@ -6594,7 +7036,7 @@
                 <a:t>to</a:t>
               </a:r>
               <a:r>
-                <a:rPr lang="en-US" sz="3318" spc="-99" strike="noStrike" u="none">
+                <a:rPr lang="en-US" sz="3318" u="none" strike="noStrike" spc="-99">
                   <a:solidFill>
                     <a:srgbClr val="4A4A4A"/>
                   </a:solidFill>
@@ -6618,7 +7060,7 @@
                 <a:t> a</a:t>
               </a:r>
               <a:r>
-                <a:rPr lang="en-US" sz="3318" spc="-99" strike="noStrike" u="none">
+                <a:rPr lang="en-US" sz="3318" u="none" strike="noStrike" spc="-99">
                   <a:solidFill>
                     <a:srgbClr val="4A4A4A"/>
                   </a:solidFill>
@@ -6639,9 +7081,18 @@
                   <a:spcPct val="0"/>
                 </a:spcBef>
               </a:pPr>
-            </a:p>
-            <a:p>
-              <a:pPr algn="l" marL="716431" indent="-358216" lvl="1">
+              <a:endParaRPr lang="en-US" sz="3318" u="none" strike="noStrike" spc="-99">
+                <a:solidFill>
+                  <a:srgbClr val="4A4A4A"/>
+                </a:solidFill>
+                <a:latin typeface="TT Fors"/>
+                <a:ea typeface="TT Fors"/>
+                <a:cs typeface="TT Fors"/>
+                <a:sym typeface="TT Fors"/>
+              </a:endParaRPr>
+            </a:p>
+            <a:p>
+              <a:pPr marL="716431" lvl="1" indent="-358216" algn="l">
                 <a:lnSpc>
                   <a:spcPts val="3982"/>
                 </a:lnSpc>
@@ -6652,7 +7103,7 @@
                 <a:buChar char="•"/>
               </a:pPr>
               <a:r>
-                <a:rPr lang="en-US" sz="3318" spc="-99" strike="noStrike" u="none">
+                <a:rPr lang="en-US" sz="3318" u="none" strike="noStrike" spc="-99">
                   <a:solidFill>
                     <a:srgbClr val="4A4A4A"/>
                   </a:solidFill>
@@ -6676,7 +7127,7 @@
                 <a:t>ty</a:t>
               </a:r>
               <a:r>
-                <a:rPr lang="en-US" sz="3318" spc="-99" strike="noStrike" u="none">
+                <a:rPr lang="en-US" sz="3318" u="none" strike="noStrike" spc="-99">
                   <a:solidFill>
                     <a:srgbClr val="4A4A4A"/>
                   </a:solidFill>
@@ -6700,7 +7151,7 @@
                 <a:t>es </a:t>
               </a:r>
               <a:r>
-                <a:rPr lang="en-US" sz="3318" spc="-99" strike="noStrike" u="none">
+                <a:rPr lang="en-US" sz="3318" u="none" strike="noStrike" spc="-99">
                   <a:solidFill>
                     <a:srgbClr val="4A4A4A"/>
                   </a:solidFill>
@@ -6724,7 +7175,7 @@
                 <a:t>f pr</a:t>
               </a:r>
               <a:r>
-                <a:rPr lang="en-US" sz="3318" spc="-99" strike="noStrike" u="none">
+                <a:rPr lang="en-US" sz="3318" u="none" strike="noStrike" spc="-99">
                   <a:solidFill>
                     <a:srgbClr val="4A4A4A"/>
                   </a:solidFill>
@@ -6748,7 +7199,7 @@
                 <a:t>ic</a:t>
               </a:r>
               <a:r>
-                <a:rPr lang="en-US" sz="3318" spc="-99" strike="noStrike" u="none">
+                <a:rPr lang="en-US" sz="3318" u="none" strike="noStrike" spc="-99">
                   <a:solidFill>
                     <a:srgbClr val="4A4A4A"/>
                   </a:solidFill>
@@ -6772,7 +7223,7 @@
                 <a:t>i</a:t>
               </a:r>
               <a:r>
-                <a:rPr lang="en-US" sz="3318" spc="-99" strike="noStrike" u="none">
+                <a:rPr lang="en-US" sz="3318" u="none" strike="noStrike" spc="-99">
                   <a:solidFill>
                     <a:srgbClr val="4A4A4A"/>
                   </a:solidFill>
@@ -6796,7 +7247,7 @@
                 <a:t>n</a:t>
               </a:r>
               <a:r>
-                <a:rPr lang="en-US" sz="3318" spc="-99" strike="noStrike" u="none">
+                <a:rPr lang="en-US" sz="3318" u="none" strike="noStrike" spc="-99">
                   <a:solidFill>
                     <a:srgbClr val="4A4A4A"/>
                   </a:solidFill>
@@ -6820,7 +7271,7 @@
                 <a:t> </a:t>
               </a:r>
               <a:r>
-                <a:rPr lang="en-US" sz="3318" spc="-99" strike="noStrike" u="none">
+                <a:rPr lang="en-US" sz="3318" u="none" strike="noStrike" spc="-99">
                   <a:solidFill>
                     <a:srgbClr val="4A4A4A"/>
                   </a:solidFill>
@@ -6844,7 +7295,7 @@
                 <a:t>si</a:t>
               </a:r>
               <a:r>
-                <a:rPr lang="en-US" sz="3318" spc="-99" strike="noStrike" u="none">
+                <a:rPr lang="en-US" sz="3318" u="none" strike="noStrike" spc="-99">
                   <a:solidFill>
                     <a:srgbClr val="4A4A4A"/>
                   </a:solidFill>
@@ -6868,7 +7319,7 @@
                 <a:t>le</a:t>
               </a:r>
               <a:r>
-                <a:rPr lang="en-US" sz="3318" spc="-99" strike="noStrike" u="none">
+                <a:rPr lang="en-US" sz="3318" u="none" strike="noStrike" spc="-99">
                   <a:solidFill>
                     <a:srgbClr val="4A4A4A"/>
                   </a:solidFill>
@@ -6892,7 +7343,7 @@
                 <a:t> </a:t>
               </a:r>
               <a:r>
-                <a:rPr lang="en-US" sz="3318" spc="-99" strike="noStrike" u="none">
+                <a:rPr lang="en-US" sz="3318" u="none" strike="noStrike" spc="-99">
                   <a:solidFill>
                     <a:srgbClr val="4A4A4A"/>
                   </a:solidFill>
@@ -6916,7 +7367,7 @@
                 <a:t>o</a:t>
               </a:r>
               <a:r>
-                <a:rPr lang="en-US" sz="3318" spc="-99" strike="noStrike" u="none">
+                <a:rPr lang="en-US" sz="3318" u="none" strike="noStrike" spc="-99">
                   <a:solidFill>
                     <a:srgbClr val="4A4A4A"/>
                   </a:solidFill>
@@ -6940,7 +7391,7 @@
                 <a:t>is</a:t>
               </a:r>
               <a:r>
-                <a:rPr lang="en-US" sz="3318" spc="-99" strike="noStrike" u="none">
+                <a:rPr lang="en-US" sz="3318" u="none" strike="noStrike" spc="-99">
                   <a:solidFill>
                     <a:srgbClr val="4A4A4A"/>
                   </a:solidFill>
@@ -6953,7 +7404,7 @@
               </a:r>
             </a:p>
             <a:p>
-              <a:pPr algn="l" marL="0" indent="0" lvl="0">
+              <a:pPr marL="0" lvl="0" indent="0" algn="l">
                 <a:lnSpc>
                   <a:spcPts val="3982"/>
                 </a:lnSpc>
@@ -6961,9 +7412,18 @@
                   <a:spcPct val="0"/>
                 </a:spcBef>
               </a:pPr>
-            </a:p>
-            <a:p>
-              <a:pPr algn="l" marL="0" indent="0" lvl="0">
+              <a:endParaRPr lang="en-US" sz="3318" u="none" strike="noStrike" spc="-99">
+                <a:solidFill>
+                  <a:srgbClr val="4A4A4A"/>
+                </a:solidFill>
+                <a:latin typeface="TT Fors"/>
+                <a:ea typeface="TT Fors"/>
+                <a:cs typeface="TT Fors"/>
+                <a:sym typeface="TT Fors"/>
+              </a:endParaRPr>
+            </a:p>
+            <a:p>
+              <a:pPr marL="0" lvl="0" indent="0" algn="l">
                 <a:lnSpc>
                   <a:spcPts val="3982"/>
                 </a:lnSpc>
@@ -6971,18 +7431,27 @@
                   <a:spcPct val="0"/>
                 </a:spcBef>
               </a:pPr>
+              <a:endParaRPr lang="en-US" sz="3318" u="none" strike="noStrike" spc="-99">
+                <a:solidFill>
+                  <a:srgbClr val="4A4A4A"/>
+                </a:solidFill>
+                <a:latin typeface="TT Fors"/>
+                <a:ea typeface="TT Fors"/>
+                <a:cs typeface="TT Fors"/>
+                <a:sym typeface="TT Fors"/>
+              </a:endParaRPr>
             </a:p>
           </p:txBody>
         </p:sp>
       </p:grpSp>
       <p:sp>
         <p:nvSpPr>
-          <p:cNvPr name="Freeform 5" id="5"/>
+          <p:cNvPr id="5" name="Freeform 5"/>
           <p:cNvSpPr/>
           <p:nvPr/>
         </p:nvSpPr>
         <p:spPr>
-          <a:xfrm flipH="false" flipV="false" rot="0">
+          <a:xfrm>
             <a:off x="10461053" y="849849"/>
             <a:ext cx="7309940" cy="8587302"/>
           </a:xfrm>
@@ -6991,9 +7460,9 @@
             <a:gdLst/>
             <a:ahLst/>
             <a:cxnLst/>
-            <a:rect r="r" b="b" t="t" l="l"/>
+            <a:rect l="l" t="t" r="r" b="b"/>
             <a:pathLst>
-              <a:path h="8587302" w="7309940">
+              <a:path w="7309940" h="8587302">
                 <a:moveTo>
                   <a:pt x="0" y="0"/>
                 </a:moveTo>
@@ -7014,9 +7483,9 @@
             </a:pathLst>
           </a:custGeom>
           <a:blipFill>
-            <a:blip r:embed="rId2"/>
+            <a:blip/>
             <a:stretch>
-              <a:fillRect l="0" t="0" r="0" b="0"/>
+              <a:fillRect/>
             </a:stretch>
           </a:blipFill>
         </p:spPr>
@@ -7030,7 +7499,7 @@
 </file>
 
 <file path=ppt/slides/slide5.xml><?xml version="1.0" encoding="utf-8"?>
-<p:sld xmlns:p="http://schemas.openxmlformats.org/presentationml/2006/main" xmlns:a="http://schemas.openxmlformats.org/drawingml/2006/main" xmlns:r="http://schemas.openxmlformats.org/officeDocument/2006/relationships">
+<p:sld xmlns:a="http://schemas.openxmlformats.org/drawingml/2006/main" xmlns:r="http://schemas.openxmlformats.org/officeDocument/2006/relationships" xmlns:p="http://schemas.openxmlformats.org/presentationml/2006/main">
   <p:cSld>
     <p:spTree>
       <p:nvGrpSpPr>
@@ -7048,12 +7517,12 @@
       </p:grpSpPr>
       <p:grpSp>
         <p:nvGrpSpPr>
-          <p:cNvPr name="Group 2" id="2"/>
+          <p:cNvPr id="2" name="Group 2"/>
           <p:cNvGrpSpPr/>
           <p:nvPr/>
         </p:nvGrpSpPr>
         <p:grpSpPr>
-          <a:xfrm rot="0">
+          <a:xfrm>
             <a:off x="666750" y="666750"/>
             <a:ext cx="11201400" cy="8014956"/>
             <a:chOff x="0" y="0"/>
@@ -7062,12 +7531,12 @@
         </p:grpSpPr>
         <p:sp>
           <p:nvSpPr>
-            <p:cNvPr name="TextBox 3" id="3"/>
-            <p:cNvSpPr txBox="true"/>
+            <p:cNvPr id="3" name="TextBox 3"/>
+            <p:cNvSpPr txBox="1"/>
             <p:nvPr/>
           </p:nvSpPr>
           <p:spPr>
-            <a:xfrm rot="0">
+            <a:xfrm>
               <a:off x="0" y="-9525"/>
               <a:ext cx="14935200" cy="1626659"/>
             </a:xfrm>
@@ -7076,12 +7545,12 @@
             </a:prstGeom>
           </p:spPr>
           <p:txBody>
-            <a:bodyPr anchor="t" rtlCol="false" tIns="0" lIns="0" bIns="0" rIns="0">
+            <a:bodyPr lIns="0" tIns="0" rIns="0" bIns="0" rtlCol="0" anchor="t">
               <a:spAutoFit/>
             </a:bodyPr>
             <a:lstStyle/>
             <a:p>
-              <a:pPr algn="l" marL="0" indent="0" lvl="0">
+              <a:pPr marL="0" lvl="0" indent="0" algn="l">
                 <a:lnSpc>
                   <a:spcPts val="8000"/>
                 </a:lnSpc>
@@ -7106,12 +7575,12 @@
         </p:sp>
         <p:sp>
           <p:nvSpPr>
-            <p:cNvPr name="TextBox 4" id="4"/>
-            <p:cNvSpPr txBox="true"/>
+            <p:cNvPr id="4" name="TextBox 4"/>
+            <p:cNvSpPr txBox="1"/>
             <p:nvPr/>
           </p:nvSpPr>
           <p:spPr>
-            <a:xfrm rot="0">
+            <a:xfrm>
               <a:off x="0" y="3970054"/>
               <a:ext cx="13498957" cy="6716554"/>
             </a:xfrm>
@@ -7120,7 +7589,7 @@
             </a:prstGeom>
           </p:spPr>
           <p:txBody>
-            <a:bodyPr anchor="t" rtlCol="false" tIns="0" lIns="0" bIns="0" rIns="0">
+            <a:bodyPr lIns="0" tIns="0" rIns="0" bIns="0" rtlCol="0" anchor="t">
               <a:spAutoFit/>
             </a:bodyPr>
             <a:lstStyle/>
@@ -7130,9 +7599,10 @@
                   <a:spcPts val="3982"/>
                 </a:lnSpc>
               </a:pPr>
-            </a:p>
-            <a:p>
-              <a:pPr algn="l" marL="716431" indent="-358216" lvl="1">
+              <a:endParaRPr/>
+            </a:p>
+            <a:p>
+              <a:pPr marL="716431" lvl="1" indent="-358216" algn="l">
                 <a:lnSpc>
                   <a:spcPts val="3982"/>
                 </a:lnSpc>
@@ -7149,19 +7619,7 @@
                   <a:cs typeface="TT Fors"/>
                   <a:sym typeface="TT Fors"/>
                 </a:rPr>
-                <a:t>CSV</a:t>
-              </a:r>
-              <a:r>
-                <a:rPr lang="en-US" sz="3318" spc="-99">
-                  <a:solidFill>
-                    <a:srgbClr val="4A4A4A"/>
-                  </a:solidFill>
-                  <a:latin typeface="TT Fors"/>
-                  <a:ea typeface="TT Fors"/>
-                  <a:cs typeface="TT Fors"/>
-                  <a:sym typeface="TT Fors"/>
-                </a:rPr>
-                <a:t> Dataset → CLI Trainer → Model Bundles</a:t>
+                <a:t>CSV Dataset → CLI Trainer → Model Bundles</a:t>
               </a:r>
             </a:p>
             <a:p>
@@ -7170,9 +7628,18 @@
                   <a:spcPts val="3982"/>
                 </a:lnSpc>
               </a:pPr>
-            </a:p>
-            <a:p>
-              <a:pPr algn="l" marL="716431" indent="-358216" lvl="1">
+              <a:endParaRPr lang="en-US" sz="3318" spc="-99">
+                <a:solidFill>
+                  <a:srgbClr val="4A4A4A"/>
+                </a:solidFill>
+                <a:latin typeface="TT Fors"/>
+                <a:ea typeface="TT Fors"/>
+                <a:cs typeface="TT Fors"/>
+                <a:sym typeface="TT Fors"/>
+              </a:endParaRPr>
+            </a:p>
+            <a:p>
+              <a:pPr marL="716431" lvl="1" indent="-358216" algn="l">
                 <a:lnSpc>
                   <a:spcPts val="3982"/>
                 </a:lnSpc>
@@ -7192,7 +7659,19 @@
                   <a:cs typeface="TT Fors"/>
                   <a:sym typeface="TT Fors"/>
                 </a:rPr>
-                <a:t>AS</a:t>
+                <a:t>ASP.NET Core API (PredictionCon</a:t>
+              </a:r>
+              <a:r>
+                <a:rPr lang="en-US" sz="3318" u="none" strike="noStrike" spc="-99">
+                  <a:solidFill>
+                    <a:srgbClr val="4A4A4A"/>
+                  </a:solidFill>
+                  <a:latin typeface="TT Fors"/>
+                  <a:ea typeface="TT Fors"/>
+                  <a:cs typeface="TT Fors"/>
+                  <a:sym typeface="TT Fors"/>
+                </a:rPr>
+                <a:t>t</a:t>
               </a:r>
               <a:r>
                 <a:rPr lang="en-US" sz="3318" spc="-99">
@@ -7204,7 +7683,19 @@
                   <a:cs typeface="TT Fors"/>
                   <a:sym typeface="TT Fors"/>
                 </a:rPr>
-                <a:t>P.NET Core API (Predicti</a:t>
+                <a:t>roller, ModelHotLoader, Acti</a:t>
+              </a:r>
+              <a:r>
+                <a:rPr lang="en-US" sz="3318" u="none" strike="noStrike" spc="-99">
+                  <a:solidFill>
+                    <a:srgbClr val="4A4A4A"/>
+                  </a:solidFill>
+                  <a:latin typeface="TT Fors"/>
+                  <a:ea typeface="TT Fors"/>
+                  <a:cs typeface="TT Fors"/>
+                  <a:sym typeface="TT Fors"/>
+                </a:rPr>
+                <a:t>v</a:t>
               </a:r>
               <a:r>
                 <a:rPr lang="en-US" sz="3318" spc="-99">
@@ -7216,79 +7707,7 @@
                   <a:cs typeface="TT Fors"/>
                   <a:sym typeface="TT Fors"/>
                 </a:rPr>
-                <a:t>onCon</a:t>
-              </a:r>
-              <a:r>
-                <a:rPr lang="en-US" sz="3318" spc="-99" strike="noStrike" u="none">
-                  <a:solidFill>
-                    <a:srgbClr val="4A4A4A"/>
-                  </a:solidFill>
-                  <a:latin typeface="TT Fors"/>
-                  <a:ea typeface="TT Fors"/>
-                  <a:cs typeface="TT Fors"/>
-                  <a:sym typeface="TT Fors"/>
-                </a:rPr>
-                <a:t>t</a:t>
-              </a:r>
-              <a:r>
-                <a:rPr lang="en-US" sz="3318" spc="-99">
-                  <a:solidFill>
-                    <a:srgbClr val="4A4A4A"/>
-                  </a:solidFill>
-                  <a:latin typeface="TT Fors"/>
-                  <a:ea typeface="TT Fors"/>
-                  <a:cs typeface="TT Fors"/>
-                  <a:sym typeface="TT Fors"/>
-                </a:rPr>
-                <a:t>roller, ModelHotLoader, Acti</a:t>
-              </a:r>
-              <a:r>
-                <a:rPr lang="en-US" sz="3318" spc="-99" strike="noStrike" u="none">
-                  <a:solidFill>
-                    <a:srgbClr val="4A4A4A"/>
-                  </a:solidFill>
-                  <a:latin typeface="TT Fors"/>
-                  <a:ea typeface="TT Fors"/>
-                  <a:cs typeface="TT Fors"/>
-                  <a:sym typeface="TT Fors"/>
-                </a:rPr>
-                <a:t>v</a:t>
-              </a:r>
-              <a:r>
-                <a:rPr lang="en-US" sz="3318" spc="-99">
-                  <a:solidFill>
-                    <a:srgbClr val="4A4A4A"/>
-                  </a:solidFill>
-                  <a:latin typeface="TT Fors"/>
-                  <a:ea typeface="TT Fors"/>
-                  <a:cs typeface="TT Fors"/>
-                  <a:sym typeface="TT Fors"/>
-                </a:rPr>
-                <a:t>eM</a:t>
-              </a:r>
-              <a:r>
-                <a:rPr lang="en-US" sz="3318" spc="-99">
-                  <a:solidFill>
-                    <a:srgbClr val="4A4A4A"/>
-                  </a:solidFill>
-                  <a:latin typeface="TT Fors"/>
-                  <a:ea typeface="TT Fors"/>
-                  <a:cs typeface="TT Fors"/>
-                  <a:sym typeface="TT Fors"/>
-                </a:rPr>
-                <a:t>od</a:t>
-              </a:r>
-              <a:r>
-                <a:rPr lang="en-US" sz="3318" spc="-99">
-                  <a:solidFill>
-                    <a:srgbClr val="4A4A4A"/>
-                  </a:solidFill>
-                  <a:latin typeface="TT Fors"/>
-                  <a:ea typeface="TT Fors"/>
-                  <a:cs typeface="TT Fors"/>
-                  <a:sym typeface="TT Fors"/>
-                </a:rPr>
-                <a:t>el)</a:t>
+                <a:t>eModel)</a:t>
               </a:r>
             </a:p>
             <a:p>
@@ -7300,9 +7719,18 @@
                   <a:spcPct val="0"/>
                 </a:spcBef>
               </a:pPr>
-            </a:p>
-            <a:p>
-              <a:pPr algn="l" marL="716431" indent="-358216" lvl="1">
+              <a:endParaRPr lang="en-US" sz="3318" spc="-99">
+                <a:solidFill>
+                  <a:srgbClr val="4A4A4A"/>
+                </a:solidFill>
+                <a:latin typeface="TT Fors"/>
+                <a:ea typeface="TT Fors"/>
+                <a:cs typeface="TT Fors"/>
+                <a:sym typeface="TT Fors"/>
+              </a:endParaRPr>
+            </a:p>
+            <a:p>
+              <a:pPr marL="716431" lvl="1" indent="-358216" algn="l">
                 <a:lnSpc>
                   <a:spcPts val="3982"/>
                 </a:lnSpc>
@@ -7322,7 +7750,19 @@
                   <a:cs typeface="TT Fors"/>
                   <a:sym typeface="TT Fors"/>
                 </a:rPr>
-                <a:t>React SPA </a:t>
+                <a:t>React SPA U</a:t>
+              </a:r>
+              <a:r>
+                <a:rPr lang="en-US" sz="3318" u="none" strike="noStrike" spc="-99">
+                  <a:solidFill>
+                    <a:srgbClr val="4A4A4A"/>
+                  </a:solidFill>
+                  <a:latin typeface="TT Fors"/>
+                  <a:ea typeface="TT Fors"/>
+                  <a:cs typeface="TT Fors"/>
+                  <a:sym typeface="TT Fors"/>
+                </a:rPr>
+                <a:t>I</a:t>
               </a:r>
               <a:r>
                 <a:rPr lang="en-US" sz="3318" spc="-99">
@@ -7334,19 +7774,19 @@
                   <a:cs typeface="TT Fors"/>
                   <a:sym typeface="TT Fors"/>
                 </a:rPr>
-                <a:t>U</a:t>
-              </a:r>
-              <a:r>
-                <a:rPr lang="en-US" sz="3318" spc="-99" strike="noStrike" u="none">
-                  <a:solidFill>
-                    <a:srgbClr val="4A4A4A"/>
-                  </a:solidFill>
-                  <a:latin typeface="TT Fors"/>
-                  <a:ea typeface="TT Fors"/>
-                  <a:cs typeface="TT Fors"/>
-                  <a:sym typeface="TT Fors"/>
-                </a:rPr>
-                <a:t>I</a:t>
+                <a:t> </a:t>
+              </a:r>
+              <a:r>
+                <a:rPr lang="en-US" sz="3318" u="none" strike="noStrike" spc="-99">
+                  <a:solidFill>
+                    <a:srgbClr val="4A4A4A"/>
+                  </a:solidFill>
+                  <a:latin typeface="TT Fors"/>
+                  <a:ea typeface="TT Fors"/>
+                  <a:cs typeface="TT Fors"/>
+                  <a:sym typeface="TT Fors"/>
+                </a:rPr>
+                <a:t>(Si</a:t>
               </a:r>
               <a:r>
                 <a:rPr lang="en-US" sz="3318" spc="-99">
@@ -7358,19 +7798,19 @@
                   <a:cs typeface="TT Fors"/>
                   <a:sym typeface="TT Fors"/>
                 </a:rPr>
-                <a:t> </a:t>
-              </a:r>
-              <a:r>
-                <a:rPr lang="en-US" sz="3318" spc="-99" strike="noStrike" u="none">
-                  <a:solidFill>
-                    <a:srgbClr val="4A4A4A"/>
-                  </a:solidFill>
-                  <a:latin typeface="TT Fors"/>
-                  <a:ea typeface="TT Fors"/>
-                  <a:cs typeface="TT Fors"/>
-                  <a:sym typeface="TT Fors"/>
-                </a:rPr>
-                <a:t>(Si</a:t>
+                <a:t>n</a:t>
+              </a:r>
+              <a:r>
+                <a:rPr lang="en-US" sz="3318" u="none" strike="noStrike" spc="-99">
+                  <a:solidFill>
+                    <a:srgbClr val="4A4A4A"/>
+                  </a:solidFill>
+                  <a:latin typeface="TT Fors"/>
+                  <a:ea typeface="TT Fors"/>
+                  <a:cs typeface="TT Fors"/>
+                  <a:sym typeface="TT Fors"/>
+                </a:rPr>
+                <a:t>g</a:t>
               </a:r>
               <a:r>
                 <a:rPr lang="en-US" sz="3318" spc="-99">
@@ -7382,10 +7822,34 @@
                   <a:cs typeface="TT Fors"/>
                   <a:sym typeface="TT Fors"/>
                 </a:rPr>
-                <a:t>n</a:t>
-              </a:r>
-              <a:r>
-                <a:rPr lang="en-US" sz="3318" spc="-99" strike="noStrike" u="none">
+                <a:t>le prediction, </a:t>
+              </a:r>
+              <a:r>
+                <a:rPr lang="en-US" sz="3318" u="none" strike="noStrike" spc="-99">
+                  <a:solidFill>
+                    <a:srgbClr val="4A4A4A"/>
+                  </a:solidFill>
+                  <a:latin typeface="TT Fors"/>
+                  <a:ea typeface="TT Fors"/>
+                  <a:cs typeface="TT Fors"/>
+                  <a:sym typeface="TT Fors"/>
+                </a:rPr>
+                <a:t>R</a:t>
+              </a:r>
+              <a:r>
+                <a:rPr lang="en-US" sz="3318" spc="-99">
+                  <a:solidFill>
+                    <a:srgbClr val="4A4A4A"/>
+                  </a:solidFill>
+                  <a:latin typeface="TT Fors"/>
+                  <a:ea typeface="TT Fors"/>
+                  <a:cs typeface="TT Fors"/>
+                  <a:sym typeface="TT Fors"/>
+                </a:rPr>
+                <a:t>an</a:t>
+              </a:r>
+              <a:r>
+                <a:rPr lang="en-US" sz="3318" u="none" strike="noStrike" spc="-99">
                   <a:solidFill>
                     <a:srgbClr val="4A4A4A"/>
                   </a:solidFill>
@@ -7406,19 +7870,19 @@
                   <a:cs typeface="TT Fors"/>
                   <a:sym typeface="TT Fors"/>
                 </a:rPr>
-                <a:t>le prediction, </a:t>
-              </a:r>
-              <a:r>
-                <a:rPr lang="en-US" sz="3318" spc="-99" strike="noStrike" u="none">
-                  <a:solidFill>
-                    <a:srgbClr val="4A4A4A"/>
-                  </a:solidFill>
-                  <a:latin typeface="TT Fors"/>
-                  <a:ea typeface="TT Fors"/>
-                  <a:cs typeface="TT Fors"/>
-                  <a:sym typeface="TT Fors"/>
-                </a:rPr>
-                <a:t>R</a:t>
+                <a:t>e </a:t>
+              </a:r>
+              <a:r>
+                <a:rPr lang="en-US" sz="3318" u="none" strike="noStrike" spc="-99">
+                  <a:solidFill>
+                    <a:srgbClr val="4A4A4A"/>
+                  </a:solidFill>
+                  <a:latin typeface="TT Fors"/>
+                  <a:ea typeface="TT Fors"/>
+                  <a:cs typeface="TT Fors"/>
+                  <a:sym typeface="TT Fors"/>
+                </a:rPr>
+                <a:t>pr</a:t>
               </a:r>
               <a:r>
                 <a:rPr lang="en-US" sz="3318" spc="-99">
@@ -7430,19 +7894,19 @@
                   <a:cs typeface="TT Fors"/>
                   <a:sym typeface="TT Fors"/>
                 </a:rPr>
-                <a:t>an</a:t>
-              </a:r>
-              <a:r>
-                <a:rPr lang="en-US" sz="3318" spc="-99" strike="noStrike" u="none">
-                  <a:solidFill>
-                    <a:srgbClr val="4A4A4A"/>
-                  </a:solidFill>
-                  <a:latin typeface="TT Fors"/>
-                  <a:ea typeface="TT Fors"/>
-                  <a:cs typeface="TT Fors"/>
-                  <a:sym typeface="TT Fors"/>
-                </a:rPr>
-                <a:t>g</a:t>
+                <a:t>e</a:t>
+              </a:r>
+              <a:r>
+                <a:rPr lang="en-US" sz="3318" u="none" strike="noStrike" spc="-99">
+                  <a:solidFill>
+                    <a:srgbClr val="4A4A4A"/>
+                  </a:solidFill>
+                  <a:latin typeface="TT Fors"/>
+                  <a:ea typeface="TT Fors"/>
+                  <a:cs typeface="TT Fors"/>
+                  <a:sym typeface="TT Fors"/>
+                </a:rPr>
+                <a:t>dict</a:t>
               </a:r>
               <a:r>
                 <a:rPr lang="en-US" sz="3318" spc="-99">
@@ -7454,59 +7918,11 @@
                   <a:cs typeface="TT Fors"/>
                   <a:sym typeface="TT Fors"/>
                 </a:rPr>
-                <a:t>e </a:t>
-              </a:r>
-              <a:r>
-                <a:rPr lang="en-US" sz="3318" spc="-99" strike="noStrike" u="none">
-                  <a:solidFill>
-                    <a:srgbClr val="4A4A4A"/>
-                  </a:solidFill>
-                  <a:latin typeface="TT Fors"/>
-                  <a:ea typeface="TT Fors"/>
-                  <a:cs typeface="TT Fors"/>
-                  <a:sym typeface="TT Fors"/>
-                </a:rPr>
-                <a:t>pr</a:t>
-              </a:r>
-              <a:r>
-                <a:rPr lang="en-US" sz="3318" spc="-99">
-                  <a:solidFill>
-                    <a:srgbClr val="4A4A4A"/>
-                  </a:solidFill>
-                  <a:latin typeface="TT Fors"/>
-                  <a:ea typeface="TT Fors"/>
-                  <a:cs typeface="TT Fors"/>
-                  <a:sym typeface="TT Fors"/>
-                </a:rPr>
-                <a:t>e</a:t>
-              </a:r>
-              <a:r>
-                <a:rPr lang="en-US" sz="3318" spc="-99" strike="noStrike" u="none">
-                  <a:solidFill>
-                    <a:srgbClr val="4A4A4A"/>
-                  </a:solidFill>
-                  <a:latin typeface="TT Fors"/>
-                  <a:ea typeface="TT Fors"/>
-                  <a:cs typeface="TT Fors"/>
-                  <a:sym typeface="TT Fors"/>
-                </a:rPr>
-                <a:t>dict</a:t>
-              </a:r>
-              <a:r>
-                <a:rPr lang="en-US" sz="3318" spc="-99">
-                  <a:solidFill>
-                    <a:srgbClr val="4A4A4A"/>
-                  </a:solidFill>
-                  <a:latin typeface="TT Fors"/>
-                  <a:ea typeface="TT Fors"/>
-                  <a:cs typeface="TT Fors"/>
-                  <a:sym typeface="TT Fors"/>
-                </a:rPr>
                 <a:t>ion, Compare)</a:t>
               </a:r>
             </a:p>
             <a:p>
-              <a:pPr algn="l" marL="0" indent="0" lvl="0">
+              <a:pPr marL="0" lvl="0" indent="0" algn="l">
                 <a:lnSpc>
                   <a:spcPts val="3982"/>
                 </a:lnSpc>
@@ -7514,9 +7930,18 @@
                   <a:spcPct val="0"/>
                 </a:spcBef>
               </a:pPr>
-            </a:p>
-            <a:p>
-              <a:pPr algn="l" marL="0" indent="0" lvl="0">
+              <a:endParaRPr lang="en-US" sz="3318" spc="-99">
+                <a:solidFill>
+                  <a:srgbClr val="4A4A4A"/>
+                </a:solidFill>
+                <a:latin typeface="TT Fors"/>
+                <a:ea typeface="TT Fors"/>
+                <a:cs typeface="TT Fors"/>
+                <a:sym typeface="TT Fors"/>
+              </a:endParaRPr>
+            </a:p>
+            <a:p>
+              <a:pPr marL="0" lvl="0" indent="0" algn="l">
                 <a:lnSpc>
                   <a:spcPts val="3982"/>
                 </a:lnSpc>
@@ -7524,37 +7949,46 @@
                   <a:spcPct val="0"/>
                 </a:spcBef>
               </a:pPr>
+              <a:endParaRPr lang="en-US" sz="3318" spc="-99">
+                <a:solidFill>
+                  <a:srgbClr val="4A4A4A"/>
+                </a:solidFill>
+                <a:latin typeface="TT Fors"/>
+                <a:ea typeface="TT Fors"/>
+                <a:cs typeface="TT Fors"/>
+                <a:sym typeface="TT Fors"/>
+              </a:endParaRPr>
             </a:p>
           </p:txBody>
         </p:sp>
       </p:grpSp>
       <p:sp>
         <p:nvSpPr>
-          <p:cNvPr name="AutoShape 5" id="5"/>
+          <p:cNvPr id="5" name="AutoShape 5"/>
           <p:cNvSpPr/>
           <p:nvPr/>
         </p:nvSpPr>
         <p:spPr>
-          <a:xfrm flipV="true">
+          <a:xfrm flipV="1">
             <a:off x="12829128" y="5180621"/>
             <a:ext cx="2058500" cy="0"/>
           </a:xfrm>
           <a:prstGeom prst="line">
             <a:avLst/>
           </a:prstGeom>
-          <a:ln cap="flat" w="38100">
+          <a:ln w="38100" cap="flat">
             <a:solidFill>
               <a:srgbClr val="000000"/>
             </a:solidFill>
             <a:prstDash val="solid"/>
-            <a:headEnd type="none" len="sm" w="sm"/>
-            <a:tailEnd type="none" len="sm" w="sm"/>
+            <a:headEnd type="none" w="sm" len="sm"/>
+            <a:tailEnd type="none" w="sm" len="sm"/>
           </a:ln>
         </p:spPr>
       </p:sp>
       <p:sp>
         <p:nvSpPr>
-          <p:cNvPr name="AutoShape 6" id="6"/>
+          <p:cNvPr id="6" name="AutoShape 6"/>
           <p:cNvSpPr/>
           <p:nvPr/>
         </p:nvSpPr>
@@ -7566,19 +8000,19 @@
           <a:prstGeom prst="line">
             <a:avLst/>
           </a:prstGeom>
-          <a:ln cap="flat" w="38100">
+          <a:ln w="38100" cap="flat">
             <a:solidFill>
               <a:srgbClr val="000000"/>
             </a:solidFill>
             <a:prstDash val="solid"/>
-            <a:headEnd type="none" len="sm" w="sm"/>
-            <a:tailEnd type="none" len="sm" w="sm"/>
+            <a:headEnd type="none" w="sm" len="sm"/>
+            <a:tailEnd type="none" w="sm" len="sm"/>
           </a:ln>
         </p:spPr>
       </p:sp>
       <p:sp>
         <p:nvSpPr>
-          <p:cNvPr name="AutoShape 7" id="7"/>
+          <p:cNvPr id="7" name="AutoShape 7"/>
           <p:cNvSpPr/>
           <p:nvPr/>
         </p:nvSpPr>
@@ -7590,24 +8024,24 @@
           <a:prstGeom prst="line">
             <a:avLst/>
           </a:prstGeom>
-          <a:ln cap="flat" w="38100">
+          <a:ln w="38100" cap="flat">
             <a:solidFill>
               <a:srgbClr val="000000"/>
             </a:solidFill>
             <a:prstDash val="solid"/>
-            <a:headEnd type="none" len="sm" w="sm"/>
-            <a:tailEnd type="none" len="sm" w="sm"/>
+            <a:headEnd type="none" w="sm" len="sm"/>
+            <a:tailEnd type="none" w="sm" len="sm"/>
           </a:ln>
         </p:spPr>
       </p:sp>
       <p:sp>
         <p:nvSpPr>
-          <p:cNvPr name="Freeform 8" id="8"/>
+          <p:cNvPr id="8" name="Freeform 8"/>
           <p:cNvSpPr/>
           <p:nvPr/>
         </p:nvSpPr>
         <p:spPr>
-          <a:xfrm flipH="false" flipV="false" rot="0">
+          <a:xfrm>
             <a:off x="15080484" y="3460510"/>
             <a:ext cx="3123182" cy="6356958"/>
           </a:xfrm>
@@ -7616,9 +8050,9 @@
             <a:gdLst/>
             <a:ahLst/>
             <a:cxnLst/>
-            <a:rect r="r" b="b" t="t" l="l"/>
+            <a:rect l="l" t="t" r="r" b="b"/>
             <a:pathLst>
-              <a:path h="6356958" w="3123182">
+              <a:path w="3123182" h="6356958">
                 <a:moveTo>
                   <a:pt x="0" y="0"/>
                 </a:moveTo>
@@ -7639,21 +8073,21 @@
             </a:pathLst>
           </a:custGeom>
           <a:blipFill>
-            <a:blip r:embed="rId2"/>
+            <a:blip/>
             <a:stretch>
-              <a:fillRect l="-6604" t="0" r="0" b="0"/>
+              <a:fillRect l="-6604"/>
             </a:stretch>
           </a:blipFill>
         </p:spPr>
       </p:sp>
       <p:sp>
         <p:nvSpPr>
-          <p:cNvPr name="Freeform 9" id="9"/>
+          <p:cNvPr id="9" name="Freeform 9"/>
           <p:cNvSpPr/>
           <p:nvPr/>
         </p:nvSpPr>
         <p:spPr>
-          <a:xfrm flipH="false" flipV="false" rot="0">
+          <a:xfrm>
             <a:off x="11111825" y="183778"/>
             <a:ext cx="3434608" cy="4959722"/>
           </a:xfrm>
@@ -7662,9 +8096,9 @@
             <a:gdLst/>
             <a:ahLst/>
             <a:cxnLst/>
-            <a:rect r="r" b="b" t="t" l="l"/>
+            <a:rect l="l" t="t" r="r" b="b"/>
             <a:pathLst>
-              <a:path h="4959722" w="3434608">
+              <a:path w="3434608" h="4959722">
                 <a:moveTo>
                   <a:pt x="0" y="0"/>
                 </a:moveTo>
@@ -7685,58 +8119,58 @@
             </a:pathLst>
           </a:custGeom>
           <a:blipFill>
-            <a:blip r:embed="rId3"/>
+            <a:blip/>
             <a:stretch>
-              <a:fillRect l="0" t="0" r="0" b="0"/>
+              <a:fillRect/>
             </a:stretch>
           </a:blipFill>
         </p:spPr>
       </p:sp>
       <p:sp>
         <p:nvSpPr>
-          <p:cNvPr name="AutoShape 10" id="10"/>
+          <p:cNvPr id="10" name="AutoShape 10"/>
           <p:cNvSpPr/>
           <p:nvPr/>
         </p:nvSpPr>
         <p:spPr>
-          <a:xfrm flipV="true">
+          <a:xfrm flipV="1">
             <a:off x="16534457" y="3366912"/>
             <a:ext cx="0" cy="169062"/>
           </a:xfrm>
           <a:prstGeom prst="line">
             <a:avLst/>
           </a:prstGeom>
-          <a:ln cap="flat" w="38100">
+          <a:ln w="38100" cap="flat">
             <a:solidFill>
               <a:srgbClr val="000000"/>
             </a:solidFill>
             <a:prstDash val="solid"/>
-            <a:headEnd type="none" len="sm" w="sm"/>
-            <a:tailEnd type="none" len="sm" w="sm"/>
+            <a:headEnd type="none" w="sm" len="sm"/>
+            <a:tailEnd type="none" w="sm" len="sm"/>
           </a:ln>
         </p:spPr>
       </p:sp>
       <p:sp>
         <p:nvSpPr>
-          <p:cNvPr name="AutoShape 11" id="11"/>
+          <p:cNvPr id="11" name="AutoShape 11"/>
           <p:cNvSpPr/>
           <p:nvPr/>
         </p:nvSpPr>
         <p:spPr>
-          <a:xfrm flipH="true" flipV="true">
+          <a:xfrm flipH="1" flipV="1">
             <a:off x="12829128" y="5143500"/>
             <a:ext cx="0" cy="56171"/>
           </a:xfrm>
           <a:prstGeom prst="line">
             <a:avLst/>
           </a:prstGeom>
-          <a:ln cap="flat" w="38100">
+          <a:ln w="38100" cap="flat">
             <a:solidFill>
               <a:srgbClr val="000000"/>
             </a:solidFill>
             <a:prstDash val="solid"/>
-            <a:headEnd type="none" len="sm" w="sm"/>
-            <a:tailEnd type="none" len="sm" w="sm"/>
+            <a:headEnd type="none" w="sm" len="sm"/>
+            <a:tailEnd type="none" w="sm" len="sm"/>
           </a:ln>
         </p:spPr>
       </p:sp>
@@ -7749,13 +8183,14 @@
 </file>
 
 <file path=ppt/slides/slide6.xml><?xml version="1.0" encoding="utf-8"?>
-<p:sld xmlns:p="http://schemas.openxmlformats.org/presentationml/2006/main" xmlns:a="http://schemas.openxmlformats.org/drawingml/2006/main" xmlns:r="http://schemas.openxmlformats.org/officeDocument/2006/relationships">
+<p:sld xmlns:a="http://schemas.openxmlformats.org/drawingml/2006/main" xmlns:r="http://schemas.openxmlformats.org/officeDocument/2006/relationships" xmlns:p="http://schemas.openxmlformats.org/presentationml/2006/main">
   <p:cSld>
     <p:bg>
       <p:bgPr>
         <a:solidFill>
           <a:srgbClr val="F5F5F5"/>
         </a:solidFill>
+        <a:effectLst/>
       </p:bgPr>
     </p:bg>
     <p:spTree>
@@ -7772,60 +8207,14 @@
           <a:chExt cx="0" cy="0"/>
         </a:xfrm>
       </p:grpSpPr>
-      <p:sp>
-        <p:nvSpPr>
-          <p:cNvPr name="Freeform 2" id="2"/>
-          <p:cNvSpPr/>
-          <p:nvPr/>
-        </p:nvSpPr>
-        <p:spPr>
-          <a:xfrm flipH="false" flipV="false" rot="0">
-            <a:off x="10268544" y="1220506"/>
-            <a:ext cx="6907152" cy="7845988"/>
-          </a:xfrm>
-          <a:custGeom>
-            <a:avLst/>
-            <a:gdLst/>
-            <a:ahLst/>
-            <a:cxnLst/>
-            <a:rect r="r" b="b" t="t" l="l"/>
-            <a:pathLst>
-              <a:path h="7845988" w="6907152">
-                <a:moveTo>
-                  <a:pt x="0" y="0"/>
-                </a:moveTo>
-                <a:lnTo>
-                  <a:pt x="6907152" y="0"/>
-                </a:lnTo>
-                <a:lnTo>
-                  <a:pt x="6907152" y="7845988"/>
-                </a:lnTo>
-                <a:lnTo>
-                  <a:pt x="0" y="7845988"/>
-                </a:lnTo>
-                <a:lnTo>
-                  <a:pt x="0" y="0"/>
-                </a:lnTo>
-                <a:close/>
-              </a:path>
-            </a:pathLst>
-          </a:custGeom>
-          <a:blipFill>
-            <a:blip r:embed="rId2"/>
-            <a:stretch>
-              <a:fillRect l="0" t="0" r="0" b="0"/>
-            </a:stretch>
-          </a:blipFill>
-        </p:spPr>
-      </p:sp>
       <p:grpSp>
         <p:nvGrpSpPr>
-          <p:cNvPr name="Group 3" id="3"/>
+          <p:cNvPr id="3" name="Group 3"/>
           <p:cNvGrpSpPr/>
           <p:nvPr/>
         </p:nvGrpSpPr>
         <p:grpSpPr>
-          <a:xfrm rot="0">
+          <a:xfrm>
             <a:off x="666750" y="666750"/>
             <a:ext cx="9844955" cy="8014956"/>
             <a:chOff x="0" y="0"/>
@@ -7834,12 +8223,12 @@
         </p:grpSpPr>
         <p:sp>
           <p:nvSpPr>
-            <p:cNvPr name="TextBox 4" id="4"/>
-            <p:cNvSpPr txBox="true"/>
+            <p:cNvPr id="4" name="TextBox 4"/>
+            <p:cNvSpPr txBox="1"/>
             <p:nvPr/>
           </p:nvSpPr>
           <p:spPr>
-            <a:xfrm rot="0">
+            <a:xfrm>
               <a:off x="0" y="-9525"/>
               <a:ext cx="13126607" cy="1626659"/>
             </a:xfrm>
@@ -7848,12 +8237,12 @@
             </a:prstGeom>
           </p:spPr>
           <p:txBody>
-            <a:bodyPr anchor="t" rtlCol="false" tIns="0" lIns="0" bIns="0" rIns="0">
+            <a:bodyPr lIns="0" tIns="0" rIns="0" bIns="0" rtlCol="0" anchor="t">
               <a:spAutoFit/>
             </a:bodyPr>
             <a:lstStyle/>
             <a:p>
-              <a:pPr algn="l" marL="0" indent="0" lvl="0">
+              <a:pPr marL="0" lvl="0" indent="0" algn="l">
                 <a:lnSpc>
                   <a:spcPts val="8000"/>
                 </a:lnSpc>
@@ -7871,31 +8260,19 @@
                   <a:cs typeface="ITC Avant Garde Gothic"/>
                   <a:sym typeface="ITC Avant Garde Gothic"/>
                 </a:rPr>
-                <a:t>Class H</a:t>
-              </a:r>
-              <a:r>
-                <a:rPr lang="en-US" sz="8000" spc="-240">
-                  <a:solidFill>
-                    <a:srgbClr val="000000"/>
-                  </a:solidFill>
-                  <a:latin typeface="ITC Avant Garde Gothic"/>
-                  <a:ea typeface="ITC Avant Garde Gothic"/>
-                  <a:cs typeface="ITC Avant Garde Gothic"/>
-                  <a:sym typeface="ITC Avant Garde Gothic"/>
-                </a:rPr>
-                <a:t>ierarchy</a:t>
+                <a:t>Class Hierarchy</a:t>
               </a:r>
             </a:p>
           </p:txBody>
         </p:sp>
         <p:sp>
           <p:nvSpPr>
-            <p:cNvPr name="TextBox 5" id="5"/>
-            <p:cNvSpPr txBox="true"/>
+            <p:cNvPr id="5" name="TextBox 5"/>
+            <p:cNvSpPr txBox="1"/>
             <p:nvPr/>
           </p:nvSpPr>
           <p:spPr>
-            <a:xfrm rot="0">
+            <a:xfrm>
               <a:off x="0" y="3970054"/>
               <a:ext cx="11864287" cy="6716554"/>
             </a:xfrm>
@@ -7904,7 +8281,7 @@
             </a:prstGeom>
           </p:spPr>
           <p:txBody>
-            <a:bodyPr anchor="t" rtlCol="false" tIns="0" lIns="0" bIns="0" rIns="0">
+            <a:bodyPr lIns="0" tIns="0" rIns="0" bIns="0" rtlCol="0" anchor="t">
               <a:spAutoFit/>
             </a:bodyPr>
             <a:lstStyle/>
@@ -7914,9 +8291,10 @@
                   <a:spcPts val="3982"/>
                 </a:lnSpc>
               </a:pPr>
-            </a:p>
-            <a:p>
-              <a:pPr algn="l" marL="716431" indent="-358216" lvl="1">
+              <a:endParaRPr/>
+            </a:p>
+            <a:p>
+              <a:pPr marL="716431" lvl="1" indent="-358216" algn="l">
                 <a:lnSpc>
                   <a:spcPts val="3982"/>
                 </a:lnSpc>
@@ -7933,19 +8311,7 @@
                   <a:cs typeface="TT Fors"/>
                   <a:sym typeface="TT Fors"/>
                 </a:rPr>
-                <a:t>CSV</a:t>
-              </a:r>
-              <a:r>
-                <a:rPr lang="en-US" sz="3318" spc="-99">
-                  <a:solidFill>
-                    <a:srgbClr val="4A4A4A"/>
-                  </a:solidFill>
-                  <a:latin typeface="TT Fors"/>
-                  <a:ea typeface="TT Fors"/>
-                  <a:cs typeface="TT Fors"/>
-                  <a:sym typeface="TT Fors"/>
-                </a:rPr>
-                <a:t> Dataset → CLI Trainer → Model Bundles</a:t>
+                <a:t>CSV Dataset → CLI Trainer → Model Bundles</a:t>
               </a:r>
             </a:p>
             <a:p>
@@ -7954,9 +8320,18 @@
                   <a:spcPts val="3982"/>
                 </a:lnSpc>
               </a:pPr>
-            </a:p>
-            <a:p>
-              <a:pPr algn="l" marL="716431" indent="-358216" lvl="1">
+              <a:endParaRPr lang="en-US" sz="3318" spc="-99">
+                <a:solidFill>
+                  <a:srgbClr val="4A4A4A"/>
+                </a:solidFill>
+                <a:latin typeface="TT Fors"/>
+                <a:ea typeface="TT Fors"/>
+                <a:cs typeface="TT Fors"/>
+                <a:sym typeface="TT Fors"/>
+              </a:endParaRPr>
+            </a:p>
+            <a:p>
+              <a:pPr marL="716431" lvl="1" indent="-358216" algn="l">
                 <a:lnSpc>
                   <a:spcPts val="3982"/>
                 </a:lnSpc>
@@ -7976,7 +8351,19 @@
                   <a:cs typeface="TT Fors"/>
                   <a:sym typeface="TT Fors"/>
                 </a:rPr>
-                <a:t>AS</a:t>
+                <a:t>ASP.NET Core API (PredictionCon</a:t>
+              </a:r>
+              <a:r>
+                <a:rPr lang="en-US" sz="3318" u="none" strike="noStrike" spc="-99">
+                  <a:solidFill>
+                    <a:srgbClr val="4A4A4A"/>
+                  </a:solidFill>
+                  <a:latin typeface="TT Fors"/>
+                  <a:ea typeface="TT Fors"/>
+                  <a:cs typeface="TT Fors"/>
+                  <a:sym typeface="TT Fors"/>
+                </a:rPr>
+                <a:t>t</a:t>
               </a:r>
               <a:r>
                 <a:rPr lang="en-US" sz="3318" spc="-99">
@@ -7988,7 +8375,19 @@
                   <a:cs typeface="TT Fors"/>
                   <a:sym typeface="TT Fors"/>
                 </a:rPr>
-                <a:t>P.NET Core API (Predicti</a:t>
+                <a:t>roller, ModelHotLoader, Acti</a:t>
+              </a:r>
+              <a:r>
+                <a:rPr lang="en-US" sz="3318" u="none" strike="noStrike" spc="-99">
+                  <a:solidFill>
+                    <a:srgbClr val="4A4A4A"/>
+                  </a:solidFill>
+                  <a:latin typeface="TT Fors"/>
+                  <a:ea typeface="TT Fors"/>
+                  <a:cs typeface="TT Fors"/>
+                  <a:sym typeface="TT Fors"/>
+                </a:rPr>
+                <a:t>v</a:t>
               </a:r>
               <a:r>
                 <a:rPr lang="en-US" sz="3318" spc="-99">
@@ -8000,79 +8399,7 @@
                   <a:cs typeface="TT Fors"/>
                   <a:sym typeface="TT Fors"/>
                 </a:rPr>
-                <a:t>onCon</a:t>
-              </a:r>
-              <a:r>
-                <a:rPr lang="en-US" sz="3318" spc="-99" strike="noStrike" u="none">
-                  <a:solidFill>
-                    <a:srgbClr val="4A4A4A"/>
-                  </a:solidFill>
-                  <a:latin typeface="TT Fors"/>
-                  <a:ea typeface="TT Fors"/>
-                  <a:cs typeface="TT Fors"/>
-                  <a:sym typeface="TT Fors"/>
-                </a:rPr>
-                <a:t>t</a:t>
-              </a:r>
-              <a:r>
-                <a:rPr lang="en-US" sz="3318" spc="-99">
-                  <a:solidFill>
-                    <a:srgbClr val="4A4A4A"/>
-                  </a:solidFill>
-                  <a:latin typeface="TT Fors"/>
-                  <a:ea typeface="TT Fors"/>
-                  <a:cs typeface="TT Fors"/>
-                  <a:sym typeface="TT Fors"/>
-                </a:rPr>
-                <a:t>roller, ModelHotLoader, Acti</a:t>
-              </a:r>
-              <a:r>
-                <a:rPr lang="en-US" sz="3318" spc="-99" strike="noStrike" u="none">
-                  <a:solidFill>
-                    <a:srgbClr val="4A4A4A"/>
-                  </a:solidFill>
-                  <a:latin typeface="TT Fors"/>
-                  <a:ea typeface="TT Fors"/>
-                  <a:cs typeface="TT Fors"/>
-                  <a:sym typeface="TT Fors"/>
-                </a:rPr>
-                <a:t>v</a:t>
-              </a:r>
-              <a:r>
-                <a:rPr lang="en-US" sz="3318" spc="-99">
-                  <a:solidFill>
-                    <a:srgbClr val="4A4A4A"/>
-                  </a:solidFill>
-                  <a:latin typeface="TT Fors"/>
-                  <a:ea typeface="TT Fors"/>
-                  <a:cs typeface="TT Fors"/>
-                  <a:sym typeface="TT Fors"/>
-                </a:rPr>
-                <a:t>eM</a:t>
-              </a:r>
-              <a:r>
-                <a:rPr lang="en-US" sz="3318" spc="-99">
-                  <a:solidFill>
-                    <a:srgbClr val="4A4A4A"/>
-                  </a:solidFill>
-                  <a:latin typeface="TT Fors"/>
-                  <a:ea typeface="TT Fors"/>
-                  <a:cs typeface="TT Fors"/>
-                  <a:sym typeface="TT Fors"/>
-                </a:rPr>
-                <a:t>od</a:t>
-              </a:r>
-              <a:r>
-                <a:rPr lang="en-US" sz="3318" spc="-99">
-                  <a:solidFill>
-                    <a:srgbClr val="4A4A4A"/>
-                  </a:solidFill>
-                  <a:latin typeface="TT Fors"/>
-                  <a:ea typeface="TT Fors"/>
-                  <a:cs typeface="TT Fors"/>
-                  <a:sym typeface="TT Fors"/>
-                </a:rPr>
-                <a:t>el)</a:t>
+                <a:t>eModel)</a:t>
               </a:r>
             </a:p>
             <a:p>
@@ -8084,9 +8411,18 @@
                   <a:spcPct val="0"/>
                 </a:spcBef>
               </a:pPr>
-            </a:p>
-            <a:p>
-              <a:pPr algn="l" marL="716431" indent="-358216" lvl="1">
+              <a:endParaRPr lang="en-US" sz="3318" spc="-99">
+                <a:solidFill>
+                  <a:srgbClr val="4A4A4A"/>
+                </a:solidFill>
+                <a:latin typeface="TT Fors"/>
+                <a:ea typeface="TT Fors"/>
+                <a:cs typeface="TT Fors"/>
+                <a:sym typeface="TT Fors"/>
+              </a:endParaRPr>
+            </a:p>
+            <a:p>
+              <a:pPr marL="716431" lvl="1" indent="-358216" algn="l">
                 <a:lnSpc>
                   <a:spcPts val="3982"/>
                 </a:lnSpc>
@@ -8106,7 +8442,19 @@
                   <a:cs typeface="TT Fors"/>
                   <a:sym typeface="TT Fors"/>
                 </a:rPr>
-                <a:t>React SPA </a:t>
+                <a:t>React SPA U</a:t>
+              </a:r>
+              <a:r>
+                <a:rPr lang="en-US" sz="3318" u="none" strike="noStrike" spc="-99">
+                  <a:solidFill>
+                    <a:srgbClr val="4A4A4A"/>
+                  </a:solidFill>
+                  <a:latin typeface="TT Fors"/>
+                  <a:ea typeface="TT Fors"/>
+                  <a:cs typeface="TT Fors"/>
+                  <a:sym typeface="TT Fors"/>
+                </a:rPr>
+                <a:t>I</a:t>
               </a:r>
               <a:r>
                 <a:rPr lang="en-US" sz="3318" spc="-99">
@@ -8118,19 +8466,19 @@
                   <a:cs typeface="TT Fors"/>
                   <a:sym typeface="TT Fors"/>
                 </a:rPr>
-                <a:t>U</a:t>
-              </a:r>
-              <a:r>
-                <a:rPr lang="en-US" sz="3318" spc="-99" strike="noStrike" u="none">
-                  <a:solidFill>
-                    <a:srgbClr val="4A4A4A"/>
-                  </a:solidFill>
-                  <a:latin typeface="TT Fors"/>
-                  <a:ea typeface="TT Fors"/>
-                  <a:cs typeface="TT Fors"/>
-                  <a:sym typeface="TT Fors"/>
-                </a:rPr>
-                <a:t>I</a:t>
+                <a:t> </a:t>
+              </a:r>
+              <a:r>
+                <a:rPr lang="en-US" sz="3318" u="none" strike="noStrike" spc="-99">
+                  <a:solidFill>
+                    <a:srgbClr val="4A4A4A"/>
+                  </a:solidFill>
+                  <a:latin typeface="TT Fors"/>
+                  <a:ea typeface="TT Fors"/>
+                  <a:cs typeface="TT Fors"/>
+                  <a:sym typeface="TT Fors"/>
+                </a:rPr>
+                <a:t>(Si</a:t>
               </a:r>
               <a:r>
                 <a:rPr lang="en-US" sz="3318" spc="-99">
@@ -8142,19 +8490,19 @@
                   <a:cs typeface="TT Fors"/>
                   <a:sym typeface="TT Fors"/>
                 </a:rPr>
-                <a:t> </a:t>
-              </a:r>
-              <a:r>
-                <a:rPr lang="en-US" sz="3318" spc="-99" strike="noStrike" u="none">
-                  <a:solidFill>
-                    <a:srgbClr val="4A4A4A"/>
-                  </a:solidFill>
-                  <a:latin typeface="TT Fors"/>
-                  <a:ea typeface="TT Fors"/>
-                  <a:cs typeface="TT Fors"/>
-                  <a:sym typeface="TT Fors"/>
-                </a:rPr>
-                <a:t>(Si</a:t>
+                <a:t>n</a:t>
+              </a:r>
+              <a:r>
+                <a:rPr lang="en-US" sz="3318" u="none" strike="noStrike" spc="-99">
+                  <a:solidFill>
+                    <a:srgbClr val="4A4A4A"/>
+                  </a:solidFill>
+                  <a:latin typeface="TT Fors"/>
+                  <a:ea typeface="TT Fors"/>
+                  <a:cs typeface="TT Fors"/>
+                  <a:sym typeface="TT Fors"/>
+                </a:rPr>
+                <a:t>g</a:t>
               </a:r>
               <a:r>
                 <a:rPr lang="en-US" sz="3318" spc="-99">
@@ -8166,10 +8514,34 @@
                   <a:cs typeface="TT Fors"/>
                   <a:sym typeface="TT Fors"/>
                 </a:rPr>
-                <a:t>n</a:t>
-              </a:r>
-              <a:r>
-                <a:rPr lang="en-US" sz="3318" spc="-99" strike="noStrike" u="none">
+                <a:t>le prediction, </a:t>
+              </a:r>
+              <a:r>
+                <a:rPr lang="en-US" sz="3318" u="none" strike="noStrike" spc="-99">
+                  <a:solidFill>
+                    <a:srgbClr val="4A4A4A"/>
+                  </a:solidFill>
+                  <a:latin typeface="TT Fors"/>
+                  <a:ea typeface="TT Fors"/>
+                  <a:cs typeface="TT Fors"/>
+                  <a:sym typeface="TT Fors"/>
+                </a:rPr>
+                <a:t>R</a:t>
+              </a:r>
+              <a:r>
+                <a:rPr lang="en-US" sz="3318" spc="-99">
+                  <a:solidFill>
+                    <a:srgbClr val="4A4A4A"/>
+                  </a:solidFill>
+                  <a:latin typeface="TT Fors"/>
+                  <a:ea typeface="TT Fors"/>
+                  <a:cs typeface="TT Fors"/>
+                  <a:sym typeface="TT Fors"/>
+                </a:rPr>
+                <a:t>an</a:t>
+              </a:r>
+              <a:r>
+                <a:rPr lang="en-US" sz="3318" u="none" strike="noStrike" spc="-99">
                   <a:solidFill>
                     <a:srgbClr val="4A4A4A"/>
                   </a:solidFill>
@@ -8190,19 +8562,19 @@
                   <a:cs typeface="TT Fors"/>
                   <a:sym typeface="TT Fors"/>
                 </a:rPr>
-                <a:t>le prediction, </a:t>
-              </a:r>
-              <a:r>
-                <a:rPr lang="en-US" sz="3318" spc="-99" strike="noStrike" u="none">
-                  <a:solidFill>
-                    <a:srgbClr val="4A4A4A"/>
-                  </a:solidFill>
-                  <a:latin typeface="TT Fors"/>
-                  <a:ea typeface="TT Fors"/>
-                  <a:cs typeface="TT Fors"/>
-                  <a:sym typeface="TT Fors"/>
-                </a:rPr>
-                <a:t>R</a:t>
+                <a:t>e </a:t>
+              </a:r>
+              <a:r>
+                <a:rPr lang="en-US" sz="3318" u="none" strike="noStrike" spc="-99">
+                  <a:solidFill>
+                    <a:srgbClr val="4A4A4A"/>
+                  </a:solidFill>
+                  <a:latin typeface="TT Fors"/>
+                  <a:ea typeface="TT Fors"/>
+                  <a:cs typeface="TT Fors"/>
+                  <a:sym typeface="TT Fors"/>
+                </a:rPr>
+                <a:t>pr</a:t>
               </a:r>
               <a:r>
                 <a:rPr lang="en-US" sz="3318" spc="-99">
@@ -8214,19 +8586,19 @@
                   <a:cs typeface="TT Fors"/>
                   <a:sym typeface="TT Fors"/>
                 </a:rPr>
-                <a:t>an</a:t>
-              </a:r>
-              <a:r>
-                <a:rPr lang="en-US" sz="3318" spc="-99" strike="noStrike" u="none">
-                  <a:solidFill>
-                    <a:srgbClr val="4A4A4A"/>
-                  </a:solidFill>
-                  <a:latin typeface="TT Fors"/>
-                  <a:ea typeface="TT Fors"/>
-                  <a:cs typeface="TT Fors"/>
-                  <a:sym typeface="TT Fors"/>
-                </a:rPr>
-                <a:t>g</a:t>
+                <a:t>e</a:t>
+              </a:r>
+              <a:r>
+                <a:rPr lang="en-US" sz="3318" u="none" strike="noStrike" spc="-99">
+                  <a:solidFill>
+                    <a:srgbClr val="4A4A4A"/>
+                  </a:solidFill>
+                  <a:latin typeface="TT Fors"/>
+                  <a:ea typeface="TT Fors"/>
+                  <a:cs typeface="TT Fors"/>
+                  <a:sym typeface="TT Fors"/>
+                </a:rPr>
+                <a:t>dict</a:t>
               </a:r>
               <a:r>
                 <a:rPr lang="en-US" sz="3318" spc="-99">
@@ -8238,59 +8610,11 @@
                   <a:cs typeface="TT Fors"/>
                   <a:sym typeface="TT Fors"/>
                 </a:rPr>
-                <a:t>e </a:t>
-              </a:r>
-              <a:r>
-                <a:rPr lang="en-US" sz="3318" spc="-99" strike="noStrike" u="none">
-                  <a:solidFill>
-                    <a:srgbClr val="4A4A4A"/>
-                  </a:solidFill>
-                  <a:latin typeface="TT Fors"/>
-                  <a:ea typeface="TT Fors"/>
-                  <a:cs typeface="TT Fors"/>
-                  <a:sym typeface="TT Fors"/>
-                </a:rPr>
-                <a:t>pr</a:t>
-              </a:r>
-              <a:r>
-                <a:rPr lang="en-US" sz="3318" spc="-99">
-                  <a:solidFill>
-                    <a:srgbClr val="4A4A4A"/>
-                  </a:solidFill>
-                  <a:latin typeface="TT Fors"/>
-                  <a:ea typeface="TT Fors"/>
-                  <a:cs typeface="TT Fors"/>
-                  <a:sym typeface="TT Fors"/>
-                </a:rPr>
-                <a:t>e</a:t>
-              </a:r>
-              <a:r>
-                <a:rPr lang="en-US" sz="3318" spc="-99" strike="noStrike" u="none">
-                  <a:solidFill>
-                    <a:srgbClr val="4A4A4A"/>
-                  </a:solidFill>
-                  <a:latin typeface="TT Fors"/>
-                  <a:ea typeface="TT Fors"/>
-                  <a:cs typeface="TT Fors"/>
-                  <a:sym typeface="TT Fors"/>
-                </a:rPr>
-                <a:t>dict</a:t>
-              </a:r>
-              <a:r>
-                <a:rPr lang="en-US" sz="3318" spc="-99">
-                  <a:solidFill>
-                    <a:srgbClr val="4A4A4A"/>
-                  </a:solidFill>
-                  <a:latin typeface="TT Fors"/>
-                  <a:ea typeface="TT Fors"/>
-                  <a:cs typeface="TT Fors"/>
-                  <a:sym typeface="TT Fors"/>
-                </a:rPr>
                 <a:t>ion, Compare)</a:t>
               </a:r>
             </a:p>
             <a:p>
-              <a:pPr algn="l" marL="0" indent="0" lvl="0">
+              <a:pPr marL="0" lvl="0" indent="0" algn="l">
                 <a:lnSpc>
                   <a:spcPts val="3982"/>
                 </a:lnSpc>
@@ -8298,9 +8622,18 @@
                   <a:spcPct val="0"/>
                 </a:spcBef>
               </a:pPr>
-            </a:p>
-            <a:p>
-              <a:pPr algn="l" marL="0" indent="0" lvl="0">
+              <a:endParaRPr lang="en-US" sz="3318" spc="-99">
+                <a:solidFill>
+                  <a:srgbClr val="4A4A4A"/>
+                </a:solidFill>
+                <a:latin typeface="TT Fors"/>
+                <a:ea typeface="TT Fors"/>
+                <a:cs typeface="TT Fors"/>
+                <a:sym typeface="TT Fors"/>
+              </a:endParaRPr>
+            </a:p>
+            <a:p>
+              <a:pPr marL="0" lvl="0" indent="0" algn="l">
                 <a:lnSpc>
                   <a:spcPts val="3982"/>
                 </a:lnSpc>
@@ -8308,10 +8641,49 @@
                   <a:spcPct val="0"/>
                 </a:spcBef>
               </a:pPr>
+              <a:endParaRPr lang="en-US" sz="3318" spc="-99">
+                <a:solidFill>
+                  <a:srgbClr val="4A4A4A"/>
+                </a:solidFill>
+                <a:latin typeface="TT Fors"/>
+                <a:ea typeface="TT Fors"/>
+                <a:cs typeface="TT Fors"/>
+                <a:sym typeface="TT Fors"/>
+              </a:endParaRPr>
             </a:p>
           </p:txBody>
         </p:sp>
       </p:grpSp>
+      <p:pic>
+        <p:nvPicPr>
+          <p:cNvPr id="6" name="Picture 5">
+            <a:extLst>
+              <a:ext uri="{FF2B5EF4-FFF2-40B4-BE49-F238E27FC236}">
+                <a16:creationId xmlns:a16="http://schemas.microsoft.com/office/drawing/2014/main" id="{1B2F8463-CE4E-FBCD-D512-08D37AF03497}"/>
+              </a:ext>
+            </a:extLst>
+          </p:cNvPr>
+          <p:cNvPicPr>
+            <a:picLocks noChangeAspect="1"/>
+          </p:cNvPicPr>
+          <p:nvPr/>
+        </p:nvPicPr>
+        <p:blipFill>
+          <a:blip/>
+          <a:stretch>
+            <a:fillRect/>
+          </a:stretch>
+        </p:blipFill>
+        <p:spPr>
+          <a:xfrm>
+            <a:off x="10134600" y="710406"/>
+            <a:ext cx="7772400" cy="8879378"/>
+          </a:xfrm>
+          <a:prstGeom prst="rect">
+            <a:avLst/>
+          </a:prstGeom>
+        </p:spPr>
+      </p:pic>
     </p:spTree>
   </p:cSld>
   <p:clrMapOvr>
@@ -8321,7 +8693,7 @@
 </file>
 
 <file path=ppt/slides/slide7.xml><?xml version="1.0" encoding="utf-8"?>
-<p:sld xmlns:p="http://schemas.openxmlformats.org/presentationml/2006/main" xmlns:a="http://schemas.openxmlformats.org/drawingml/2006/main" xmlns:r="http://schemas.openxmlformats.org/officeDocument/2006/relationships">
+<p:sld xmlns:a="http://schemas.openxmlformats.org/drawingml/2006/main" xmlns:r="http://schemas.openxmlformats.org/officeDocument/2006/relationships" xmlns:p="http://schemas.openxmlformats.org/presentationml/2006/main">
   <p:cSld>
     <p:spTree>
       <p:nvGrpSpPr>
@@ -8339,26 +8711,26 @@
       </p:grpSpPr>
       <p:grpSp>
         <p:nvGrpSpPr>
-          <p:cNvPr name="Group 2" id="2"/>
+          <p:cNvPr id="2" name="Group 2"/>
           <p:cNvGrpSpPr/>
           <p:nvPr/>
         </p:nvGrpSpPr>
         <p:grpSpPr>
-          <a:xfrm rot="0">
+          <a:xfrm>
             <a:off x="666750" y="666750"/>
-            <a:ext cx="12720587" cy="10157680"/>
+            <a:ext cx="12720587" cy="8055908"/>
             <a:chOff x="0" y="0"/>
-            <a:chExt cx="16960783" cy="13543573"/>
+            <a:chExt cx="16960783" cy="10741210"/>
           </a:xfrm>
         </p:grpSpPr>
         <p:sp>
           <p:nvSpPr>
-            <p:cNvPr name="TextBox 3" id="3"/>
-            <p:cNvSpPr txBox="true"/>
+            <p:cNvPr id="3" name="TextBox 3"/>
+            <p:cNvSpPr txBox="1"/>
             <p:nvPr/>
           </p:nvSpPr>
           <p:spPr>
-            <a:xfrm rot="0">
+            <a:xfrm>
               <a:off x="0" y="-9525"/>
               <a:ext cx="14935200" cy="1626659"/>
             </a:xfrm>
@@ -8367,12 +8739,12 @@
             </a:prstGeom>
           </p:spPr>
           <p:txBody>
-            <a:bodyPr anchor="t" rtlCol="false" tIns="0" lIns="0" bIns="0" rIns="0">
+            <a:bodyPr lIns="0" tIns="0" rIns="0" bIns="0" rtlCol="0" anchor="t">
               <a:spAutoFit/>
             </a:bodyPr>
             <a:lstStyle/>
             <a:p>
-              <a:pPr algn="l" marL="0" indent="0" lvl="0">
+              <a:pPr marL="0" lvl="0" indent="0" algn="l">
                 <a:lnSpc>
                   <a:spcPts val="8000"/>
                 </a:lnSpc>
@@ -8397,21 +8769,21 @@
         </p:sp>
         <p:sp>
           <p:nvSpPr>
-            <p:cNvPr name="TextBox 4" id="4"/>
-            <p:cNvSpPr txBox="true"/>
+            <p:cNvPr id="4" name="TextBox 4"/>
+            <p:cNvSpPr txBox="1"/>
             <p:nvPr/>
           </p:nvSpPr>
           <p:spPr>
-            <a:xfrm rot="0">
-              <a:off x="0" y="2125432"/>
-              <a:ext cx="16960783" cy="11418142"/>
+            <a:xfrm>
+              <a:off x="0" y="2681345"/>
+              <a:ext cx="16960783" cy="8059865"/>
             </a:xfrm>
             <a:prstGeom prst="rect">
               <a:avLst/>
             </a:prstGeom>
           </p:spPr>
           <p:txBody>
-            <a:bodyPr anchor="t" rtlCol="false" tIns="0" lIns="0" bIns="0" rIns="0">
+            <a:bodyPr lIns="0" tIns="0" rIns="0" bIns="0" rtlCol="0" anchor="t">
               <a:spAutoFit/>
             </a:bodyPr>
             <a:lstStyle/>
@@ -8421,9 +8793,10 @@
                   <a:spcPts val="3982"/>
                 </a:lnSpc>
               </a:pPr>
-            </a:p>
-            <a:p>
-              <a:pPr algn="l" marL="716431" indent="-358216" lvl="1">
+              <a:endParaRPr/>
+            </a:p>
+            <a:p>
+              <a:pPr marL="716431" lvl="1" indent="-358216" algn="l">
                 <a:lnSpc>
                   <a:spcPts val="3982"/>
                 </a:lnSpc>
@@ -8440,19 +8813,7 @@
                   <a:cs typeface="TT Fors"/>
                   <a:sym typeface="TT Fors"/>
                 </a:rPr>
-                <a:t>Line</a:t>
-              </a:r>
-              <a:r>
-                <a:rPr lang="en-US" sz="3318" spc="-99">
-                  <a:solidFill>
-                    <a:srgbClr val="4A4A4A"/>
-                  </a:solidFill>
-                  <a:latin typeface="TT Fors"/>
-                  <a:ea typeface="TT Fors"/>
-                  <a:cs typeface="TT Fors"/>
-                  <a:sym typeface="TT Fors"/>
-                </a:rPr>
-                <a:t>ar Regression – provides the simplest baseline for price estimation</a:t>
+                <a:t>Linear Regression - simple baseline for quick comparison</a:t>
               </a:r>
             </a:p>
             <a:p>
@@ -8461,9 +8822,18 @@
                   <a:spcPts val="3982"/>
                 </a:lnSpc>
               </a:pPr>
-            </a:p>
-            <a:p>
-              <a:pPr algn="l" marL="716431" indent="-358216" lvl="1">
+              <a:endParaRPr lang="en-US" sz="3318" spc="-99">
+                <a:solidFill>
+                  <a:srgbClr val="4A4A4A"/>
+                </a:solidFill>
+                <a:latin typeface="TT Fors"/>
+                <a:ea typeface="TT Fors"/>
+                <a:cs typeface="TT Fors"/>
+                <a:sym typeface="TT Fors"/>
+              </a:endParaRPr>
+            </a:p>
+            <a:p>
+              <a:pPr marL="716431" lvl="1" indent="-358216" algn="l">
                 <a:lnSpc>
                   <a:spcPts val="3982"/>
                 </a:lnSpc>
@@ -8480,7 +8850,7 @@
                   <a:cs typeface="TT Fors"/>
                   <a:sym typeface="TT Fors"/>
                 </a:rPr>
-                <a:t>Ridge Regression – adds stability and prevents overfitting in trend modeling</a:t>
+                <a:t>Ridge Regression - stable trend model for depreciation</a:t>
               </a:r>
             </a:p>
             <a:p>
@@ -8489,9 +8859,18 @@
                   <a:spcPts val="3982"/>
                 </a:lnSpc>
               </a:pPr>
-            </a:p>
-            <a:p>
-              <a:pPr algn="l" marL="716431" indent="-358216" lvl="1">
+              <a:endParaRPr lang="en-US" sz="3318" spc="-99">
+                <a:solidFill>
+                  <a:srgbClr val="4A4A4A"/>
+                </a:solidFill>
+                <a:latin typeface="TT Fors"/>
+                <a:ea typeface="TT Fors"/>
+                <a:cs typeface="TT Fors"/>
+                <a:sym typeface="TT Fors"/>
+              </a:endParaRPr>
+            </a:p>
+            <a:p>
+              <a:pPr marL="716431" lvl="1" indent="-358216" algn="l">
                 <a:lnSpc>
                   <a:spcPts val="3982"/>
                 </a:lnSpc>
@@ -8511,7 +8890,19 @@
                   <a:cs typeface="TT Fors"/>
                   <a:sym typeface="TT Fors"/>
                 </a:rPr>
-                <a:t>Random Forest – captures nonlinear patterns that linear mod</a:t>
+                <a:t>Random Forest - captures complex, nonlinear effe</a:t>
+              </a:r>
+              <a:r>
+                <a:rPr lang="en-US" sz="3318" u="none" strike="noStrike" spc="-99">
+                  <a:solidFill>
+                    <a:srgbClr val="4A4A4A"/>
+                  </a:solidFill>
+                  <a:latin typeface="TT Fors"/>
+                  <a:ea typeface="TT Fors"/>
+                  <a:cs typeface="TT Fors"/>
+                  <a:sym typeface="TT Fors"/>
+                </a:rPr>
+                <a:t>c</a:t>
               </a:r>
               <a:r>
                 <a:rPr lang="en-US" sz="3318" spc="-99">
@@ -8523,19 +8914,19 @@
                   <a:cs typeface="TT Fors"/>
                   <a:sym typeface="TT Fors"/>
                 </a:rPr>
-                <a:t>els</a:t>
-              </a:r>
-              <a:r>
-                <a:rPr lang="en-US" sz="3318" spc="-99" strike="noStrike" u="none">
-                  <a:solidFill>
-                    <a:srgbClr val="4A4A4A"/>
-                  </a:solidFill>
-                  <a:latin typeface="TT Fors"/>
-                  <a:ea typeface="TT Fors"/>
-                  <a:cs typeface="TT Fors"/>
-                  <a:sym typeface="TT Fors"/>
-                </a:rPr>
-                <a:t> miss</a:t>
+                <a:t>t</a:t>
+              </a:r>
+              <a:r>
+                <a:rPr lang="en-US" sz="3318" u="none" strike="noStrike" spc="-99">
+                  <a:solidFill>
+                    <a:srgbClr val="4A4A4A"/>
+                  </a:solidFill>
+                  <a:latin typeface="TT Fors"/>
+                  <a:ea typeface="TT Fors"/>
+                  <a:cs typeface="TT Fors"/>
+                  <a:sym typeface="TT Fors"/>
+                </a:rPr>
+                <a:t>s</a:t>
               </a:r>
             </a:p>
             <a:p>
@@ -8547,9 +8938,18 @@
                   <a:spcPct val="0"/>
                 </a:spcBef>
               </a:pPr>
-            </a:p>
-            <a:p>
-              <a:pPr algn="l" marL="716431" indent="-358216" lvl="1">
+              <a:endParaRPr lang="en-US" sz="3318" u="none" strike="noStrike" spc="-99">
+                <a:solidFill>
+                  <a:srgbClr val="4A4A4A"/>
+                </a:solidFill>
+                <a:latin typeface="TT Fors"/>
+                <a:ea typeface="TT Fors"/>
+                <a:cs typeface="TT Fors"/>
+                <a:sym typeface="TT Fors"/>
+              </a:endParaRPr>
+            </a:p>
+            <a:p>
+              <a:pPr marL="716431" lvl="1" indent="-358216" algn="l">
                 <a:lnSpc>
                   <a:spcPts val="3982"/>
                 </a:lnSpc>
@@ -8569,7 +8969,7 @@
                   <a:cs typeface="TT Fors"/>
                   <a:sym typeface="TT Fors"/>
                 </a:rPr>
-                <a:t>Gradient Boosting – delivers highest accuracy by learning from residual errors</a:t>
+                <a:t>Gradient Boosting - improves accuracy through sequential learning</a:t>
               </a:r>
             </a:p>
             <a:p>
@@ -8581,33 +8981,37 @@
                   <a:spcPct val="0"/>
                 </a:spcBef>
               </a:pPr>
-            </a:p>
-            <a:p>
-              <a:pPr algn="l" marL="716431" indent="-358216" lvl="1">
+              <a:endParaRPr lang="en-US" sz="3318" spc="-99">
+                <a:solidFill>
+                  <a:srgbClr val="4A4A4A"/>
+                </a:solidFill>
+                <a:latin typeface="TT Fors"/>
+                <a:ea typeface="TT Fors"/>
+                <a:cs typeface="TT Fors"/>
+                <a:sym typeface="TT Fors"/>
+              </a:endParaRPr>
+            </a:p>
+            <a:p>
+              <a:pPr marL="0" lvl="0" indent="0" algn="l">
                 <a:lnSpc>
                   <a:spcPts val="3982"/>
                 </a:lnSpc>
                 <a:spcBef>
                   <a:spcPct val="0"/>
                 </a:spcBef>
-                <a:buFont typeface="Arial"/>
-                <a:buChar char="•"/>
-              </a:pPr>
-              <a:r>
-                <a:rPr lang="en-US" sz="3318" spc="-99">
-                  <a:solidFill>
-                    <a:srgbClr val="4A4A4A"/>
-                  </a:solidFill>
-                  <a:latin typeface="TT Fors"/>
-                  <a:ea typeface="TT Fors"/>
-                  <a:cs typeface="TT Fors"/>
-                  <a:sym typeface="TT Fors"/>
-                </a:rPr>
-                <a:t>Hybrid Models – combine Ridge + RF/GB for stronger, more reliable predictions</a:t>
-              </a:r>
-            </a:p>
-            <a:p>
-              <a:pPr algn="l" marL="0" indent="0" lvl="0">
+              </a:pPr>
+              <a:endParaRPr lang="en-US" sz="3318" spc="-99">
+                <a:solidFill>
+                  <a:srgbClr val="4A4A4A"/>
+                </a:solidFill>
+                <a:latin typeface="TT Fors"/>
+                <a:ea typeface="TT Fors"/>
+                <a:cs typeface="TT Fors"/>
+                <a:sym typeface="TT Fors"/>
+              </a:endParaRPr>
+            </a:p>
+            <a:p>
+              <a:pPr marL="0" lvl="0" indent="0" algn="l">
                 <a:lnSpc>
                   <a:spcPts val="3982"/>
                 </a:lnSpc>
@@ -8615,28 +9019,27 @@
                   <a:spcPct val="0"/>
                 </a:spcBef>
               </a:pPr>
-            </a:p>
-            <a:p>
-              <a:pPr algn="l" marL="0" indent="0" lvl="0">
-                <a:lnSpc>
-                  <a:spcPts val="3982"/>
-                </a:lnSpc>
-                <a:spcBef>
-                  <a:spcPct val="0"/>
-                </a:spcBef>
-              </a:pPr>
+              <a:endParaRPr lang="en-US" sz="3318" spc="-99">
+                <a:solidFill>
+                  <a:srgbClr val="4A4A4A"/>
+                </a:solidFill>
+                <a:latin typeface="TT Fors"/>
+                <a:ea typeface="TT Fors"/>
+                <a:cs typeface="TT Fors"/>
+                <a:sym typeface="TT Fors"/>
+              </a:endParaRPr>
             </a:p>
           </p:txBody>
         </p:sp>
       </p:grpSp>
       <p:grpSp>
         <p:nvGrpSpPr>
-          <p:cNvPr name="Group 5" id="5"/>
+          <p:cNvPr id="5" name="Group 5"/>
           <p:cNvGrpSpPr/>
           <p:nvPr/>
         </p:nvGrpSpPr>
         <p:grpSpPr>
-          <a:xfrm rot="0">
+          <a:xfrm>
             <a:off x="14744700" y="7829550"/>
             <a:ext cx="4846643" cy="1791955"/>
             <a:chOff x="0" y="0"/>
@@ -8645,12 +9048,12 @@
         </p:grpSpPr>
         <p:sp>
           <p:nvSpPr>
-            <p:cNvPr name="Freeform 6" id="6"/>
+            <p:cNvPr id="6" name="Freeform 6"/>
             <p:cNvSpPr/>
             <p:nvPr/>
           </p:nvSpPr>
           <p:spPr>
-            <a:xfrm flipH="false" flipV="false" rot="0">
+            <a:xfrm>
               <a:off x="0" y="0"/>
               <a:ext cx="2389273" cy="2389273"/>
             </a:xfrm>
@@ -8659,9 +9062,9 @@
               <a:gdLst/>
               <a:ahLst/>
               <a:cxnLst/>
-              <a:rect r="r" b="b" t="t" l="l"/>
+              <a:rect l="l" t="t" r="r" b="b"/>
               <a:pathLst>
-                <a:path h="2389273" w="2389273">
+                <a:path w="2389273" h="2389273">
                   <a:moveTo>
                     <a:pt x="0" y="0"/>
                   </a:moveTo>
@@ -8685,24 +9088,24 @@
               <a:blip r:embed="rId2">
                 <a:extLst>
                   <a:ext uri="{96DAC541-7B7A-43D3-8B79-37D633B846F1}">
-                    <asvg:svgBlip xmlns:asvg="http://schemas.microsoft.com/office/drawing/2016/SVG/main" r:embed="rId3"/>
+                    <asvg:svgBlip xmlns:asvg="http://schemas.microsoft.com/office/drawing/2016/SVG/main"/>
                   </a:ext>
                 </a:extLst>
               </a:blip>
               <a:stretch>
-                <a:fillRect l="0" t="0" r="0" b="0"/>
+                <a:fillRect/>
               </a:stretch>
             </a:blipFill>
           </p:spPr>
         </p:sp>
         <p:sp>
           <p:nvSpPr>
-            <p:cNvPr name="Freeform 7" id="7"/>
+            <p:cNvPr id="7" name="Freeform 7"/>
             <p:cNvSpPr/>
             <p:nvPr/>
           </p:nvSpPr>
           <p:spPr>
-            <a:xfrm flipH="false" flipV="false" rot="0">
+            <a:xfrm>
               <a:off x="2036459" y="0"/>
               <a:ext cx="2389273" cy="2389273"/>
             </a:xfrm>
@@ -8711,9 +9114,9 @@
               <a:gdLst/>
               <a:ahLst/>
               <a:cxnLst/>
-              <a:rect r="r" b="b" t="t" l="l"/>
+              <a:rect l="l" t="t" r="r" b="b"/>
               <a:pathLst>
-                <a:path h="2389273" w="2389273">
+                <a:path w="2389273" h="2389273">
                   <a:moveTo>
                     <a:pt x="0" y="0"/>
                   </a:moveTo>
@@ -8737,24 +9140,24 @@
               <a:blip r:embed="rId2">
                 <a:extLst>
                   <a:ext uri="{96DAC541-7B7A-43D3-8B79-37D633B846F1}">
-                    <asvg:svgBlip xmlns:asvg="http://schemas.microsoft.com/office/drawing/2016/SVG/main" r:embed="rId3"/>
+                    <asvg:svgBlip xmlns:asvg="http://schemas.microsoft.com/office/drawing/2016/SVG/main"/>
                   </a:ext>
                 </a:extLst>
               </a:blip>
               <a:stretch>
-                <a:fillRect l="0" t="0" r="0" b="0"/>
+                <a:fillRect/>
               </a:stretch>
             </a:blipFill>
           </p:spPr>
         </p:sp>
         <p:sp>
           <p:nvSpPr>
-            <p:cNvPr name="Freeform 8" id="8"/>
+            <p:cNvPr id="8" name="Freeform 8"/>
             <p:cNvSpPr/>
             <p:nvPr/>
           </p:nvSpPr>
           <p:spPr>
-            <a:xfrm flipH="false" flipV="false" rot="0">
+            <a:xfrm>
               <a:off x="4072917" y="0"/>
               <a:ext cx="2389273" cy="2389273"/>
             </a:xfrm>
@@ -8763,9 +9166,9 @@
               <a:gdLst/>
               <a:ahLst/>
               <a:cxnLst/>
-              <a:rect r="r" b="b" t="t" l="l"/>
+              <a:rect l="l" t="t" r="r" b="b"/>
               <a:pathLst>
-                <a:path h="2389273" w="2389273">
+                <a:path w="2389273" h="2389273">
                   <a:moveTo>
                     <a:pt x="0" y="0"/>
                   </a:moveTo>
@@ -8789,12 +9192,12 @@
               <a:blip r:embed="rId2">
                 <a:extLst>
                   <a:ext uri="{96DAC541-7B7A-43D3-8B79-37D633B846F1}">
-                    <asvg:svgBlip xmlns:asvg="http://schemas.microsoft.com/office/drawing/2016/SVG/main" r:embed="rId3"/>
+                    <asvg:svgBlip xmlns:asvg="http://schemas.microsoft.com/office/drawing/2016/SVG/main"/>
                   </a:ext>
                 </a:extLst>
               </a:blip>
               <a:stretch>
-                <a:fillRect l="0" t="0" r="0" b="0"/>
+                <a:fillRect/>
               </a:stretch>
             </a:blipFill>
           </p:spPr>
@@ -8809,13 +9212,14 @@
 </file>
 
 <file path=ppt/slides/slide8.xml><?xml version="1.0" encoding="utf-8"?>
-<p:sld xmlns:p="http://schemas.openxmlformats.org/presentationml/2006/main" xmlns:a="http://schemas.openxmlformats.org/drawingml/2006/main" xmlns:r="http://schemas.openxmlformats.org/officeDocument/2006/relationships">
+<p:sld xmlns:a="http://schemas.openxmlformats.org/drawingml/2006/main" xmlns:r="http://schemas.openxmlformats.org/officeDocument/2006/relationships" xmlns:p="http://schemas.openxmlformats.org/presentationml/2006/main">
   <p:cSld>
     <p:bg>
       <p:bgPr>
         <a:solidFill>
           <a:srgbClr val="F5F5F5"/>
         </a:solidFill>
+        <a:effectLst/>
       </p:bgPr>
     </p:bg>
     <p:spTree>
@@ -8834,12 +9238,12 @@
       </p:grpSpPr>
       <p:grpSp>
         <p:nvGrpSpPr>
-          <p:cNvPr name="Group 2" id="2"/>
+          <p:cNvPr id="2" name="Group 2"/>
           <p:cNvGrpSpPr/>
           <p:nvPr/>
         </p:nvGrpSpPr>
         <p:grpSpPr>
-          <a:xfrm rot="0">
+          <a:xfrm>
             <a:off x="666750" y="666750"/>
             <a:ext cx="12006278" cy="10065089"/>
             <a:chOff x="0" y="0"/>
@@ -8848,12 +9252,12 @@
         </p:grpSpPr>
         <p:sp>
           <p:nvSpPr>
-            <p:cNvPr name="TextBox 3" id="3"/>
-            <p:cNvSpPr txBox="true"/>
+            <p:cNvPr id="3" name="TextBox 3"/>
+            <p:cNvSpPr txBox="1"/>
             <p:nvPr/>
           </p:nvSpPr>
           <p:spPr>
-            <a:xfrm rot="0">
+            <a:xfrm>
               <a:off x="0" y="-9525"/>
               <a:ext cx="13126607" cy="2972859"/>
             </a:xfrm>
@@ -8862,12 +9266,12 @@
             </a:prstGeom>
           </p:spPr>
           <p:txBody>
-            <a:bodyPr anchor="t" rtlCol="false" tIns="0" lIns="0" bIns="0" rIns="0">
+            <a:bodyPr lIns="0" tIns="0" rIns="0" bIns="0" rtlCol="0" anchor="t">
               <a:spAutoFit/>
             </a:bodyPr>
             <a:lstStyle/>
             <a:p>
-              <a:pPr algn="l" marL="0" indent="0" lvl="0">
+              <a:pPr marL="0" lvl="0" indent="0" algn="l">
                 <a:lnSpc>
                   <a:spcPts val="8000"/>
                 </a:lnSpc>
@@ -8885,31 +9289,19 @@
                   <a:cs typeface="ITC Avant Garde Gothic"/>
                   <a:sym typeface="ITC Avant Garde Gothic"/>
                 </a:rPr>
-                <a:t>Training P</a:t>
-              </a:r>
-              <a:r>
-                <a:rPr lang="en-US" sz="8000" spc="-240">
-                  <a:solidFill>
-                    <a:srgbClr val="000000"/>
-                  </a:solidFill>
-                  <a:latin typeface="ITC Avant Garde Gothic"/>
-                  <a:ea typeface="ITC Avant Garde Gothic"/>
-                  <a:cs typeface="ITC Avant Garde Gothic"/>
-                  <a:sym typeface="ITC Avant Garde Gothic"/>
-                </a:rPr>
-                <a:t>ipeline &amp; Quality Gates</a:t>
+                <a:t>Training Pipeline &amp; Quality Gates</a:t>
               </a:r>
             </a:p>
           </p:txBody>
         </p:sp>
         <p:sp>
           <p:nvSpPr>
-            <p:cNvPr name="TextBox 4" id="4"/>
-            <p:cNvSpPr txBox="true"/>
+            <p:cNvPr id="4" name="TextBox 4"/>
+            <p:cNvSpPr txBox="1"/>
             <p:nvPr/>
           </p:nvSpPr>
           <p:spPr>
-            <a:xfrm rot="0">
+            <a:xfrm>
               <a:off x="0" y="3345288"/>
               <a:ext cx="16008371" cy="10074831"/>
             </a:xfrm>
@@ -8918,7 +9310,7 @@
             </a:prstGeom>
           </p:spPr>
           <p:txBody>
-            <a:bodyPr anchor="t" rtlCol="false" tIns="0" lIns="0" bIns="0" rIns="0">
+            <a:bodyPr lIns="0" tIns="0" rIns="0" bIns="0" rtlCol="0" anchor="t">
               <a:spAutoFit/>
             </a:bodyPr>
             <a:lstStyle/>
@@ -8928,9 +9320,10 @@
                   <a:spcPts val="3982"/>
                 </a:lnSpc>
               </a:pPr>
-            </a:p>
-            <a:p>
-              <a:pPr algn="l" marL="716431" indent="-358216" lvl="1">
+              <a:endParaRPr/>
+            </a:p>
+            <a:p>
+              <a:pPr marL="716431" lvl="1" indent="-358216" algn="l">
                 <a:lnSpc>
                   <a:spcPts val="3982"/>
                 </a:lnSpc>
@@ -8947,19 +9340,7 @@
                   <a:cs typeface="TT Fors"/>
                   <a:sym typeface="TT Fors"/>
                 </a:rPr>
-                <a:t>Processes</a:t>
-              </a:r>
-              <a:r>
-                <a:rPr lang="en-US" sz="3318" spc="-99">
-                  <a:solidFill>
-                    <a:srgbClr val="4A4A4A"/>
-                  </a:solidFill>
-                  <a:latin typeface="TT Fors"/>
-                  <a:ea typeface="TT Fors"/>
-                  <a:cs typeface="TT Fors"/>
-                  <a:sym typeface="TT Fors"/>
-                </a:rPr>
-                <a:t> raw vehicle data (cleaning, encoding, feature scaling)</a:t>
+                <a:t>Processes raw vehicle data (cleaning, encoding, feature scaling)</a:t>
               </a:r>
             </a:p>
             <a:p>
@@ -8968,9 +9349,18 @@
                   <a:spcPts val="3982"/>
                 </a:lnSpc>
               </a:pPr>
-            </a:p>
-            <a:p>
-              <a:pPr algn="l" marL="716431" indent="-358216" lvl="1">
+              <a:endParaRPr lang="en-US" sz="3318" spc="-99">
+                <a:solidFill>
+                  <a:srgbClr val="4A4A4A"/>
+                </a:solidFill>
+                <a:latin typeface="TT Fors"/>
+                <a:ea typeface="TT Fors"/>
+                <a:cs typeface="TT Fors"/>
+                <a:sym typeface="TT Fors"/>
+              </a:endParaRPr>
+            </a:p>
+            <a:p>
+              <a:pPr marL="716431" lvl="1" indent="-358216" algn="l">
                 <a:lnSpc>
                   <a:spcPts val="3982"/>
                 </a:lnSpc>
@@ -8996,9 +9386,18 @@
                   <a:spcPts val="3982"/>
                 </a:lnSpc>
               </a:pPr>
-            </a:p>
-            <a:p>
-              <a:pPr algn="l" marL="716431" indent="-358216" lvl="1">
+              <a:endParaRPr lang="en-US" sz="3318" spc="-99">
+                <a:solidFill>
+                  <a:srgbClr val="4A4A4A"/>
+                </a:solidFill>
+                <a:latin typeface="TT Fors"/>
+                <a:ea typeface="TT Fors"/>
+                <a:cs typeface="TT Fors"/>
+                <a:sym typeface="TT Fors"/>
+              </a:endParaRPr>
+            </a:p>
+            <a:p>
+              <a:pPr marL="716431" lvl="1" indent="-358216" algn="l">
                 <a:lnSpc>
                   <a:spcPts val="3982"/>
                 </a:lnSpc>
@@ -9018,19 +9417,7 @@
                   <a:cs typeface="TT Fors"/>
                   <a:sym typeface="TT Fors"/>
                 </a:rPr>
-                <a:t>Tunes hyperparameters using cross-validati</a:t>
-              </a:r>
-              <a:r>
-                <a:rPr lang="en-US" sz="3318" spc="-99">
-                  <a:solidFill>
-                    <a:srgbClr val="4A4A4A"/>
-                  </a:solidFill>
-                  <a:latin typeface="TT Fors"/>
-                  <a:ea typeface="TT Fors"/>
-                  <a:cs typeface="TT Fors"/>
-                  <a:sym typeface="TT Fors"/>
-                </a:rPr>
-                <a:t>on</a:t>
+                <a:t>Tunes hyperparameters using cross-validation</a:t>
               </a:r>
             </a:p>
             <a:p>
@@ -9042,9 +9429,18 @@
                   <a:spcPct val="0"/>
                 </a:spcBef>
               </a:pPr>
-            </a:p>
-            <a:p>
-              <a:pPr algn="l" marL="716431" indent="-358216" lvl="1">
+              <a:endParaRPr lang="en-US" sz="3318" spc="-99">
+                <a:solidFill>
+                  <a:srgbClr val="4A4A4A"/>
+                </a:solidFill>
+                <a:latin typeface="TT Fors"/>
+                <a:ea typeface="TT Fors"/>
+                <a:cs typeface="TT Fors"/>
+                <a:sym typeface="TT Fors"/>
+              </a:endParaRPr>
+            </a:p>
+            <a:p>
+              <a:pPr marL="716431" lvl="1" indent="-358216" algn="l">
                 <a:lnSpc>
                   <a:spcPts val="3982"/>
                 </a:lnSpc>
@@ -9064,31 +9460,7 @@
                   <a:cs typeface="TT Fors"/>
                   <a:sym typeface="TT Fors"/>
                 </a:rPr>
-                <a:t>Applies strict quality gates (R², MAE, RMSE thresh</a:t>
-              </a:r>
-              <a:r>
-                <a:rPr lang="en-US" sz="3318" spc="-99">
-                  <a:solidFill>
-                    <a:srgbClr val="4A4A4A"/>
-                  </a:solidFill>
-                  <a:latin typeface="TT Fors"/>
-                  <a:ea typeface="TT Fors"/>
-                  <a:cs typeface="TT Fors"/>
-                  <a:sym typeface="TT Fors"/>
-                </a:rPr>
-                <a:t>olds</a:t>
-              </a:r>
-              <a:r>
-                <a:rPr lang="en-US" sz="3318" spc="-99">
-                  <a:solidFill>
-                    <a:srgbClr val="4A4A4A"/>
-                  </a:solidFill>
-                  <a:latin typeface="TT Fors"/>
-                  <a:ea typeface="TT Fors"/>
-                  <a:cs typeface="TT Fors"/>
-                  <a:sym typeface="TT Fors"/>
-                </a:rPr>
-                <a:t>)</a:t>
+                <a:t>Applies strict quality gates (R², MAE, RMSE thresholds)</a:t>
               </a:r>
             </a:p>
             <a:p>
@@ -9100,9 +9472,18 @@
                   <a:spcPct val="0"/>
                 </a:spcBef>
               </a:pPr>
-            </a:p>
-            <a:p>
-              <a:pPr algn="l" marL="716431" indent="-358216" lvl="1">
+              <a:endParaRPr lang="en-US" sz="3318" spc="-99">
+                <a:solidFill>
+                  <a:srgbClr val="4A4A4A"/>
+                </a:solidFill>
+                <a:latin typeface="TT Fors"/>
+                <a:ea typeface="TT Fors"/>
+                <a:cs typeface="TT Fors"/>
+                <a:sym typeface="TT Fors"/>
+              </a:endParaRPr>
+            </a:p>
+            <a:p>
+              <a:pPr marL="716431" lvl="1" indent="-358216" algn="l">
                 <a:lnSpc>
                   <a:spcPts val="3982"/>
                 </a:lnSpc>
@@ -9122,19 +9503,7 @@
                   <a:cs typeface="TT Fors"/>
                   <a:sym typeface="TT Fors"/>
                 </a:rPr>
-                <a:t>Skips mod</a:t>
-              </a:r>
-              <a:r>
-                <a:rPr lang="en-US" sz="3318" spc="-99">
-                  <a:solidFill>
-                    <a:srgbClr val="4A4A4A"/>
-                  </a:solidFill>
-                  <a:latin typeface="TT Fors"/>
-                  <a:ea typeface="TT Fors"/>
-                  <a:cs typeface="TT Fors"/>
-                  <a:sym typeface="TT Fors"/>
-                </a:rPr>
-                <a:t>els with insufficient data or missing categories</a:t>
+                <a:t>Skips models with insufficient data or missing categories</a:t>
               </a:r>
             </a:p>
             <a:p>
@@ -9146,9 +9515,18 @@
                   <a:spcPct val="0"/>
                 </a:spcBef>
               </a:pPr>
-            </a:p>
-            <a:p>
-              <a:pPr algn="l" marL="716431" indent="-358216" lvl="1">
+              <a:endParaRPr lang="en-US" sz="3318" spc="-99">
+                <a:solidFill>
+                  <a:srgbClr val="4A4A4A"/>
+                </a:solidFill>
+                <a:latin typeface="TT Fors"/>
+                <a:ea typeface="TT Fors"/>
+                <a:cs typeface="TT Fors"/>
+                <a:sym typeface="TT Fors"/>
+              </a:endParaRPr>
+            </a:p>
+            <a:p>
+              <a:pPr marL="716431" lvl="1" indent="-358216" algn="l">
                 <a:lnSpc>
                   <a:spcPts val="3982"/>
                 </a:lnSpc>
@@ -9171,7 +9549,7 @@
                 <a:t>Saves only high-qualit</a:t>
               </a:r>
               <a:r>
-                <a:rPr lang="en-US" sz="3318" spc="-99" strike="noStrike" u="none">
+                <a:rPr lang="en-US" sz="3318" u="none" strike="noStrike" spc="-99">
                   <a:solidFill>
                     <a:srgbClr val="4A4A4A"/>
                   </a:solidFill>
@@ -9196,7 +9574,7 @@
               </a:r>
             </a:p>
             <a:p>
-              <a:pPr algn="l" marL="0" indent="0" lvl="0">
+              <a:pPr marL="0" lvl="0" indent="0" algn="l">
                 <a:lnSpc>
                   <a:spcPts val="3982"/>
                 </a:lnSpc>
@@ -9204,9 +9582,18 @@
                   <a:spcPct val="0"/>
                 </a:spcBef>
               </a:pPr>
-            </a:p>
-            <a:p>
-              <a:pPr algn="l" marL="0" indent="0" lvl="0">
+              <a:endParaRPr lang="en-US" sz="3318" spc="-99">
+                <a:solidFill>
+                  <a:srgbClr val="4A4A4A"/>
+                </a:solidFill>
+                <a:latin typeface="TT Fors"/>
+                <a:ea typeface="TT Fors"/>
+                <a:cs typeface="TT Fors"/>
+                <a:sym typeface="TT Fors"/>
+              </a:endParaRPr>
+            </a:p>
+            <a:p>
+              <a:pPr marL="0" lvl="0" indent="0" algn="l">
                 <a:lnSpc>
                   <a:spcPts val="3982"/>
                 </a:lnSpc>
@@ -9214,18 +9601,27 @@
                   <a:spcPct val="0"/>
                 </a:spcBef>
               </a:pPr>
+              <a:endParaRPr lang="en-US" sz="3318" spc="-99">
+                <a:solidFill>
+                  <a:srgbClr val="4A4A4A"/>
+                </a:solidFill>
+                <a:latin typeface="TT Fors"/>
+                <a:ea typeface="TT Fors"/>
+                <a:cs typeface="TT Fors"/>
+                <a:sym typeface="TT Fors"/>
+              </a:endParaRPr>
             </a:p>
           </p:txBody>
         </p:sp>
       </p:grpSp>
       <p:sp>
         <p:nvSpPr>
-          <p:cNvPr name="Freeform 5" id="5"/>
+          <p:cNvPr id="5" name="Freeform 5"/>
           <p:cNvSpPr/>
           <p:nvPr/>
         </p:nvSpPr>
         <p:spPr>
-          <a:xfrm flipH="false" flipV="false" rot="0">
+          <a:xfrm>
             <a:off x="12673028" y="341938"/>
             <a:ext cx="3997300" cy="9603123"/>
           </a:xfrm>
@@ -9234,9 +9630,9 @@
             <a:gdLst/>
             <a:ahLst/>
             <a:cxnLst/>
-            <a:rect r="r" b="b" t="t" l="l"/>
+            <a:rect l="l" t="t" r="r" b="b"/>
             <a:pathLst>
-              <a:path h="9603123" w="3997300">
+              <a:path w="3997300" h="9603123">
                 <a:moveTo>
                   <a:pt x="0" y="0"/>
                 </a:moveTo>
@@ -9257,9 +9653,9 @@
             </a:pathLst>
           </a:custGeom>
           <a:blipFill>
-            <a:blip r:embed="rId2"/>
+            <a:blip/>
             <a:stretch>
-              <a:fillRect l="0" t="0" r="0" b="0"/>
+              <a:fillRect/>
             </a:stretch>
           </a:blipFill>
         </p:spPr>
@@ -9273,7 +9669,7 @@
 </file>
 
 <file path=ppt/slides/slide9.xml><?xml version="1.0" encoding="utf-8"?>
-<p:sld xmlns:p="http://schemas.openxmlformats.org/presentationml/2006/main" xmlns:a="http://schemas.openxmlformats.org/drawingml/2006/main" xmlns:r="http://schemas.openxmlformats.org/officeDocument/2006/relationships">
+<p:sld xmlns:a="http://schemas.openxmlformats.org/drawingml/2006/main" xmlns:r="http://schemas.openxmlformats.org/officeDocument/2006/relationships" xmlns:p="http://schemas.openxmlformats.org/presentationml/2006/main">
   <p:cSld>
     <p:spTree>
       <p:nvGrpSpPr>
@@ -9291,12 +9687,12 @@
       </p:grpSpPr>
       <p:grpSp>
         <p:nvGrpSpPr>
-          <p:cNvPr name="Group 2" id="2"/>
+          <p:cNvPr id="2" name="Group 2"/>
           <p:cNvGrpSpPr/>
           <p:nvPr/>
         </p:nvGrpSpPr>
         <p:grpSpPr>
-          <a:xfrm rot="0">
+          <a:xfrm>
             <a:off x="666750" y="666750"/>
             <a:ext cx="11201400" cy="7950150"/>
             <a:chOff x="0" y="0"/>
@@ -9305,12 +9701,12 @@
         </p:grpSpPr>
         <p:sp>
           <p:nvSpPr>
-            <p:cNvPr name="TextBox 3" id="3"/>
-            <p:cNvSpPr txBox="true"/>
+            <p:cNvPr id="3" name="TextBox 3"/>
+            <p:cNvSpPr txBox="1"/>
             <p:nvPr/>
           </p:nvSpPr>
           <p:spPr>
-            <a:xfrm rot="0">
+            <a:xfrm>
               <a:off x="0" y="-9525"/>
               <a:ext cx="14935200" cy="1626659"/>
             </a:xfrm>
@@ -9319,12 +9715,12 @@
             </a:prstGeom>
           </p:spPr>
           <p:txBody>
-            <a:bodyPr anchor="t" rtlCol="false" tIns="0" lIns="0" bIns="0" rIns="0">
+            <a:bodyPr lIns="0" tIns="0" rIns="0" bIns="0" rtlCol="0" anchor="t">
               <a:spAutoFit/>
             </a:bodyPr>
             <a:lstStyle/>
             <a:p>
-              <a:pPr algn="l" marL="0" indent="0" lvl="0">
+              <a:pPr marL="0" lvl="0" indent="0" algn="l">
                 <a:lnSpc>
                   <a:spcPts val="8000"/>
                 </a:lnSpc>
@@ -9342,31 +9738,19 @@
                   <a:cs typeface="ITC Avant Garde Gothic"/>
                   <a:sym typeface="ITC Avant Garde Gothic"/>
                 </a:rPr>
-                <a:t>Challe</a:t>
-              </a:r>
-              <a:r>
-                <a:rPr lang="en-US" sz="8000" spc="-240">
-                  <a:solidFill>
-                    <a:srgbClr val="000000"/>
-                  </a:solidFill>
-                  <a:latin typeface="ITC Avant Garde Gothic"/>
-                  <a:ea typeface="ITC Avant Garde Gothic"/>
-                  <a:cs typeface="ITC Avant Garde Gothic"/>
-                  <a:sym typeface="ITC Avant Garde Gothic"/>
-                </a:rPr>
-                <a:t>nges</a:t>
+                <a:t>Challenges</a:t>
               </a:r>
             </a:p>
           </p:txBody>
         </p:sp>
         <p:sp>
           <p:nvSpPr>
-            <p:cNvPr name="TextBox 4" id="4"/>
-            <p:cNvSpPr txBox="true"/>
+            <p:cNvPr id="4" name="TextBox 4"/>
+            <p:cNvSpPr txBox="1"/>
             <p:nvPr/>
           </p:nvSpPr>
           <p:spPr>
-            <a:xfrm rot="0">
+            <a:xfrm>
               <a:off x="0" y="3211990"/>
               <a:ext cx="13498957" cy="7388209"/>
             </a:xfrm>
@@ -9375,7 +9759,7 @@
             </a:prstGeom>
           </p:spPr>
           <p:txBody>
-            <a:bodyPr anchor="t" rtlCol="false" tIns="0" lIns="0" bIns="0" rIns="0">
+            <a:bodyPr lIns="0" tIns="0" rIns="0" bIns="0" rtlCol="0" anchor="t">
               <a:spAutoFit/>
             </a:bodyPr>
             <a:lstStyle/>
@@ -9385,9 +9769,10 @@
                   <a:spcPts val="3982"/>
                 </a:lnSpc>
               </a:pPr>
-            </a:p>
-            <a:p>
-              <a:pPr algn="l" marL="716431" indent="-358216" lvl="1">
+              <a:endParaRPr/>
+            </a:p>
+            <a:p>
+              <a:pPr marL="716431" lvl="1" indent="-358216" algn="l">
                 <a:lnSpc>
                   <a:spcPts val="3982"/>
                 </a:lnSpc>
@@ -9407,31 +9792,7 @@
                   <a:cs typeface="TT Fors"/>
                   <a:sym typeface="TT Fors"/>
                 </a:rPr>
-                <a:t>RF/GB models were</a:t>
-              </a:r>
-              <a:r>
-                <a:rPr lang="en-US" sz="3318" spc="-99">
-                  <a:solidFill>
-                    <a:srgbClr val="4A4A4A"/>
-                  </a:solidFill>
-                  <a:latin typeface="TT Fors"/>
-                  <a:ea typeface="TT Fors"/>
-                  <a:cs typeface="TT Fors"/>
-                  <a:sym typeface="TT Fors"/>
-                </a:rPr>
-                <a:t> unstable for long-term forecasts → required using Ridge for range predicti</a:t>
-              </a:r>
-              <a:r>
-                <a:rPr lang="en-US" sz="3318" spc="-99">
-                  <a:solidFill>
-                    <a:srgbClr val="4A4A4A"/>
-                  </a:solidFill>
-                  <a:latin typeface="TT Fors"/>
-                  <a:ea typeface="TT Fors"/>
-                  <a:cs typeface="TT Fors"/>
-                  <a:sym typeface="TT Fors"/>
-                </a:rPr>
-                <a:t>ons</a:t>
+                <a:t>RF/GB models were unstable for long-term forecasts → required using Ridge for range predictions</a:t>
               </a:r>
             </a:p>
             <a:p>
@@ -9443,9 +9804,18 @@
                   <a:spcPct val="0"/>
                 </a:spcBef>
               </a:pPr>
-            </a:p>
-            <a:p>
-              <a:pPr algn="l" marL="716431" indent="-358216" lvl="1">
+              <a:endParaRPr lang="en-US" sz="3318" spc="-99">
+                <a:solidFill>
+                  <a:srgbClr val="4A4A4A"/>
+                </a:solidFill>
+                <a:latin typeface="TT Fors"/>
+                <a:ea typeface="TT Fors"/>
+                <a:cs typeface="TT Fors"/>
+                <a:sym typeface="TT Fors"/>
+              </a:endParaRPr>
+            </a:p>
+            <a:p>
+              <a:pPr marL="716431" lvl="1" indent="-358216" algn="l">
                 <a:lnSpc>
                   <a:spcPts val="3982"/>
                 </a:lnSpc>
@@ -9465,46 +9835,10 @@
                   <a:cs typeface="TT Fors"/>
                   <a:sym typeface="TT Fors"/>
                 </a:rPr>
-                <a:t>Raw data had inconsistent model names → nee</a:t>
-              </a:r>
-              <a:r>
-                <a:rPr lang="en-US" sz="3318" spc="-99">
-                  <a:solidFill>
-                    <a:srgbClr val="4A4A4A"/>
-                  </a:solidFill>
-                  <a:latin typeface="TT Fors"/>
-                  <a:ea typeface="TT Fors"/>
-                  <a:cs typeface="TT Fors"/>
-                  <a:sym typeface="TT Fors"/>
-                </a:rPr>
-                <a:t>d</a:t>
-              </a:r>
-              <a:r>
-                <a:rPr lang="en-US" sz="3318" spc="-99">
-                  <a:solidFill>
-                    <a:srgbClr val="4A4A4A"/>
-                  </a:solidFill>
-                  <a:latin typeface="TT Fors"/>
-                  <a:ea typeface="TT Fors"/>
-                  <a:cs typeface="TT Fors"/>
-                  <a:sym typeface="TT Fors"/>
-                </a:rPr>
-                <a:t>ed a custom canonical </a:t>
-              </a:r>
-              <a:r>
-                <a:rPr lang="en-US" sz="3318" spc="-99">
-                  <a:solidFill>
-                    <a:srgbClr val="4A4A4A"/>
-                  </a:solidFill>
-                  <a:latin typeface="TT Fors"/>
-                  <a:ea typeface="TT Fors"/>
-                  <a:cs typeface="TT Fors"/>
-                  <a:sym typeface="TT Fors"/>
-                </a:rPr>
-                <a:t>I</a:t>
-              </a:r>
-              <a:r>
-                <a:rPr lang="en-US" sz="3318" spc="-99" strike="noStrike" u="none">
+                <a:t>Raw data had inconsistent model names → needed a custom canonical I</a:t>
+              </a:r>
+              <a:r>
+                <a:rPr lang="en-US" sz="3318" u="none" strike="noStrike" spc="-99">
                   <a:solidFill>
                     <a:srgbClr val="4A4A4A"/>
                   </a:solidFill>
@@ -9537,9 +9871,18 @@
                   <a:spcPct val="0"/>
                 </a:spcBef>
               </a:pPr>
-            </a:p>
-            <a:p>
-              <a:pPr algn="l" marL="716431" indent="-358216" lvl="1">
+              <a:endParaRPr lang="en-US" sz="3318" spc="-99">
+                <a:solidFill>
+                  <a:srgbClr val="4A4A4A"/>
+                </a:solidFill>
+                <a:latin typeface="TT Fors"/>
+                <a:ea typeface="TT Fors"/>
+                <a:cs typeface="TT Fors"/>
+                <a:sym typeface="TT Fors"/>
+              </a:endParaRPr>
+            </a:p>
+            <a:p>
+              <a:pPr marL="716431" lvl="1" indent="-358216" algn="l">
                 <a:lnSpc>
                   <a:spcPts val="3982"/>
                 </a:lnSpc>
@@ -9563,7 +9906,7 @@
               </a:r>
             </a:p>
             <a:p>
-              <a:pPr algn="l" marL="0" indent="0" lvl="0">
+              <a:pPr marL="0" lvl="0" indent="0" algn="l">
                 <a:lnSpc>
                   <a:spcPts val="3982"/>
                 </a:lnSpc>
@@ -9571,9 +9914,18 @@
                   <a:spcPct val="0"/>
                 </a:spcBef>
               </a:pPr>
-            </a:p>
-            <a:p>
-              <a:pPr algn="l" marL="0" indent="0" lvl="0">
+              <a:endParaRPr lang="en-US" sz="3318" spc="-99">
+                <a:solidFill>
+                  <a:srgbClr val="4A4A4A"/>
+                </a:solidFill>
+                <a:latin typeface="TT Fors"/>
+                <a:ea typeface="TT Fors"/>
+                <a:cs typeface="TT Fors"/>
+                <a:sym typeface="TT Fors"/>
+              </a:endParaRPr>
+            </a:p>
+            <a:p>
+              <a:pPr marL="0" lvl="0" indent="0" algn="l">
                 <a:lnSpc>
                   <a:spcPts val="3982"/>
                 </a:lnSpc>
@@ -9581,27 +9933,36 @@
                   <a:spcPct val="0"/>
                 </a:spcBef>
               </a:pPr>
+              <a:endParaRPr lang="en-US" sz="3318" spc="-99">
+                <a:solidFill>
+                  <a:srgbClr val="4A4A4A"/>
+                </a:solidFill>
+                <a:latin typeface="TT Fors"/>
+                <a:ea typeface="TT Fors"/>
+                <a:cs typeface="TT Fors"/>
+                <a:sym typeface="TT Fors"/>
+              </a:endParaRPr>
             </a:p>
           </p:txBody>
         </p:sp>
       </p:grpSp>
       <p:pic>
         <p:nvPicPr>
-          <p:cNvPr name="Picture 5" id="5"/>
+          <p:cNvPr id="5" name="Picture 5"/>
           <p:cNvPicPr>
-            <a:picLocks noChangeAspect="true"/>
+            <a:picLocks noChangeAspect="1"/>
           </p:cNvPicPr>
           <p:nvPr/>
         </p:nvPicPr>
         <p:blipFill>
-          <a:blip r:embed="rId2"/>
+          <a:blip/>
           <a:stretch>
             <a:fillRect/>
           </a:stretch>
         </p:blipFill>
         <p:spPr>
-          <a:xfrm rot="0">
-            <a:off x="9336204" y="1036475"/>
+          <a:xfrm>
+            <a:off x="9372600" y="1036475"/>
             <a:ext cx="8643378" cy="8214049"/>
           </a:xfrm>
           <a:prstGeom prst="rect">
@@ -9898,4 +10259,319 @@
   <a:objectDefaults/>
   <a:extraClrSchemeLst/>
 </a:theme>
+</file>
+
+<file path=ppt/theme/theme2.xml><?xml version="1.0" encoding="utf-8"?>
+<a:theme xmlns:a="http://schemas.openxmlformats.org/drawingml/2006/main" name="Office Theme">
+  <a:themeElements>
+    <a:clrScheme name="Office">
+      <a:dk1>
+        <a:sysClr val="windowText" lastClr="000000"/>
+      </a:dk1>
+      <a:lt1>
+        <a:sysClr val="window" lastClr="FFFFFF"/>
+      </a:lt1>
+      <a:dk2>
+        <a:srgbClr val="0E2841"/>
+      </a:dk2>
+      <a:lt2>
+        <a:srgbClr val="E8E8E8"/>
+      </a:lt2>
+      <a:accent1>
+        <a:srgbClr val="156082"/>
+      </a:accent1>
+      <a:accent2>
+        <a:srgbClr val="E97132"/>
+      </a:accent2>
+      <a:accent3>
+        <a:srgbClr val="196B24"/>
+      </a:accent3>
+      <a:accent4>
+        <a:srgbClr val="0F9ED5"/>
+      </a:accent4>
+      <a:accent5>
+        <a:srgbClr val="A02B93"/>
+      </a:accent5>
+      <a:accent6>
+        <a:srgbClr val="4EA72E"/>
+      </a:accent6>
+      <a:hlink>
+        <a:srgbClr val="467886"/>
+      </a:hlink>
+      <a:folHlink>
+        <a:srgbClr val="96607D"/>
+      </a:folHlink>
+    </a:clrScheme>
+    <a:fontScheme name="Office">
+      <a:majorFont>
+        <a:latin typeface="Aptos Display" panose="02110004020202020204"/>
+        <a:ea typeface=""/>
+        <a:cs typeface=""/>
+        <a:font script="Jpan" typeface="游ゴシック Light"/>
+        <a:font script="Hang" typeface="맑은 고딕"/>
+        <a:font script="Hans" typeface="等线 Light"/>
+        <a:font script="Hant" typeface="新細明體"/>
+        <a:font script="Arab" typeface="Times New Roman"/>
+        <a:font script="Hebr" typeface="Times New Roman"/>
+        <a:font script="Thai" typeface="Angsana New"/>
+        <a:font script="Ethi" typeface="Nyala"/>
+        <a:font script="Beng" typeface="Vrinda"/>
+        <a:font script="Gujr" typeface="Shruti"/>
+        <a:font script="Khmr" typeface="MoolBoran"/>
+        <a:font script="Knda" typeface="Tunga"/>
+        <a:font script="Guru" typeface="Raavi"/>
+        <a:font script="Cans" typeface="Euphemia"/>
+        <a:font script="Cher" typeface="Plantagenet Cherokee"/>
+        <a:font script="Yiii" typeface="Microsoft Yi Baiti"/>
+        <a:font script="Tibt" typeface="Microsoft Himalaya"/>
+        <a:font script="Thaa" typeface="MV Boli"/>
+        <a:font script="Deva" typeface="Mangal"/>
+        <a:font script="Telu" typeface="Gautami"/>
+        <a:font script="Taml" typeface="Latha"/>
+        <a:font script="Syrc" typeface="Estrangelo Edessa"/>
+        <a:font script="Orya" typeface="Kalinga"/>
+        <a:font script="Mlym" typeface="Kartika"/>
+        <a:font script="Laoo" typeface="DokChampa"/>
+        <a:font script="Sinh" typeface="Iskoola Pota"/>
+        <a:font script="Mong" typeface="Mongolian Baiti"/>
+        <a:font script="Viet" typeface="Times New Roman"/>
+        <a:font script="Uigh" typeface="Microsoft Uighur"/>
+        <a:font script="Geor" typeface="Sylfaen"/>
+        <a:font script="Armn" typeface="Arial"/>
+        <a:font script="Bugi" typeface="Leelawadee UI"/>
+        <a:font script="Bopo" typeface="Microsoft JhengHei"/>
+        <a:font script="Java" typeface="Javanese Text"/>
+        <a:font script="Lisu" typeface="Segoe UI"/>
+        <a:font script="Mymr" typeface="Myanmar Text"/>
+        <a:font script="Nkoo" typeface="Ebrima"/>
+        <a:font script="Olck" typeface="Nirmala UI"/>
+        <a:font script="Osma" typeface="Ebrima"/>
+        <a:font script="Phag" typeface="Phagspa"/>
+        <a:font script="Syrn" typeface="Estrangelo Edessa"/>
+        <a:font script="Syrj" typeface="Estrangelo Edessa"/>
+        <a:font script="Syre" typeface="Estrangelo Edessa"/>
+        <a:font script="Sora" typeface="Nirmala UI"/>
+        <a:font script="Tale" typeface="Microsoft Tai Le"/>
+        <a:font script="Talu" typeface="Microsoft New Tai Lue"/>
+        <a:font script="Tfng" typeface="Ebrima"/>
+      </a:majorFont>
+      <a:minorFont>
+        <a:latin typeface="Aptos" panose="02110004020202020204"/>
+        <a:ea typeface=""/>
+        <a:cs typeface=""/>
+        <a:font script="Jpan" typeface="游ゴシック"/>
+        <a:font script="Hang" typeface="맑은 고딕"/>
+        <a:font script="Hans" typeface="等线"/>
+        <a:font script="Hant" typeface="新細明體"/>
+        <a:font script="Arab" typeface="Arial"/>
+        <a:font script="Hebr" typeface="Arial"/>
+        <a:font script="Thai" typeface="Cordia New"/>
+        <a:font script="Ethi" typeface="Nyala"/>
+        <a:font script="Beng" typeface="Vrinda"/>
+        <a:font script="Gujr" typeface="Shruti"/>
+        <a:font script="Khmr" typeface="DaunPenh"/>
+        <a:font script="Knda" typeface="Tunga"/>
+        <a:font script="Guru" typeface="Raavi"/>
+        <a:font script="Cans" typeface="Euphemia"/>
+        <a:font script="Cher" typeface="Plantagenet Cherokee"/>
+        <a:font script="Yiii" typeface="Microsoft Yi Baiti"/>
+        <a:font script="Tibt" typeface="Microsoft Himalaya"/>
+        <a:font script="Thaa" typeface="MV Boli"/>
+        <a:font script="Deva" typeface="Mangal"/>
+        <a:font script="Telu" typeface="Gautami"/>
+        <a:font script="Taml" typeface="Latha"/>
+        <a:font script="Syrc" typeface="Estrangelo Edessa"/>
+        <a:font script="Orya" typeface="Kalinga"/>
+        <a:font script="Mlym" typeface="Kartika"/>
+        <a:font script="Laoo" typeface="DokChampa"/>
+        <a:font script="Sinh" typeface="Iskoola Pota"/>
+        <a:font script="Mong" typeface="Mongolian Baiti"/>
+        <a:font script="Viet" typeface="Arial"/>
+        <a:font script="Uigh" typeface="Microsoft Uighur"/>
+        <a:font script="Geor" typeface="Sylfaen"/>
+        <a:font script="Armn" typeface="Arial"/>
+        <a:font script="Bugi" typeface="Leelawadee UI"/>
+        <a:font script="Bopo" typeface="Microsoft JhengHei"/>
+        <a:font script="Java" typeface="Javanese Text"/>
+        <a:font script="Lisu" typeface="Segoe UI"/>
+        <a:font script="Mymr" typeface="Myanmar Text"/>
+        <a:font script="Nkoo" typeface="Ebrima"/>
+        <a:font script="Olck" typeface="Nirmala UI"/>
+        <a:font script="Osma" typeface="Ebrima"/>
+        <a:font script="Phag" typeface="Phagspa"/>
+        <a:font script="Syrn" typeface="Estrangelo Edessa"/>
+        <a:font script="Syrj" typeface="Estrangelo Edessa"/>
+        <a:font script="Syre" typeface="Estrangelo Edessa"/>
+        <a:font script="Sora" typeface="Nirmala UI"/>
+        <a:font script="Tale" typeface="Microsoft Tai Le"/>
+        <a:font script="Talu" typeface="Microsoft New Tai Lue"/>
+        <a:font script="Tfng" typeface="Ebrima"/>
+      </a:minorFont>
+    </a:fontScheme>
+    <a:fmtScheme name="Office">
+      <a:fillStyleLst>
+        <a:solidFill>
+          <a:schemeClr val="phClr"/>
+        </a:solidFill>
+        <a:gradFill rotWithShape="1">
+          <a:gsLst>
+            <a:gs pos="0">
+              <a:schemeClr val="phClr">
+                <a:lumMod val="110000"/>
+                <a:satMod val="105000"/>
+                <a:tint val="67000"/>
+              </a:schemeClr>
+            </a:gs>
+            <a:gs pos="50000">
+              <a:schemeClr val="phClr">
+                <a:lumMod val="105000"/>
+                <a:satMod val="103000"/>
+                <a:tint val="73000"/>
+              </a:schemeClr>
+            </a:gs>
+            <a:gs pos="100000">
+              <a:schemeClr val="phClr">
+                <a:lumMod val="105000"/>
+                <a:satMod val="109000"/>
+                <a:tint val="81000"/>
+              </a:schemeClr>
+            </a:gs>
+          </a:gsLst>
+          <a:lin ang="5400000" scaled="0"/>
+        </a:gradFill>
+        <a:gradFill rotWithShape="1">
+          <a:gsLst>
+            <a:gs pos="0">
+              <a:schemeClr val="phClr">
+                <a:satMod val="103000"/>
+                <a:lumMod val="102000"/>
+                <a:tint val="94000"/>
+              </a:schemeClr>
+            </a:gs>
+            <a:gs pos="50000">
+              <a:schemeClr val="phClr">
+                <a:satMod val="110000"/>
+                <a:lumMod val="100000"/>
+                <a:shade val="100000"/>
+              </a:schemeClr>
+            </a:gs>
+            <a:gs pos="100000">
+              <a:schemeClr val="phClr">
+                <a:lumMod val="99000"/>
+                <a:satMod val="120000"/>
+                <a:shade val="78000"/>
+              </a:schemeClr>
+            </a:gs>
+          </a:gsLst>
+          <a:lin ang="5400000" scaled="0"/>
+        </a:gradFill>
+      </a:fillStyleLst>
+      <a:lnStyleLst>
+        <a:ln w="12700" cap="flat" cmpd="sng" algn="ctr">
+          <a:solidFill>
+            <a:schemeClr val="phClr"/>
+          </a:solidFill>
+          <a:prstDash val="solid"/>
+          <a:miter lim="800000"/>
+        </a:ln>
+        <a:ln w="19050" cap="flat" cmpd="sng" algn="ctr">
+          <a:solidFill>
+            <a:schemeClr val="phClr"/>
+          </a:solidFill>
+          <a:prstDash val="solid"/>
+          <a:miter lim="800000"/>
+        </a:ln>
+        <a:ln w="25400" cap="flat" cmpd="sng" algn="ctr">
+          <a:solidFill>
+            <a:schemeClr val="phClr"/>
+          </a:solidFill>
+          <a:prstDash val="solid"/>
+          <a:miter lim="800000"/>
+        </a:ln>
+      </a:lnStyleLst>
+      <a:effectStyleLst>
+        <a:effectStyle>
+          <a:effectLst/>
+        </a:effectStyle>
+        <a:effectStyle>
+          <a:effectLst/>
+        </a:effectStyle>
+        <a:effectStyle>
+          <a:effectLst>
+            <a:outerShdw blurRad="57150" dist="19050" dir="5400000" algn="ctr" rotWithShape="0">
+              <a:srgbClr val="000000">
+                <a:alpha val="63000"/>
+              </a:srgbClr>
+            </a:outerShdw>
+          </a:effectLst>
+        </a:effectStyle>
+      </a:effectStyleLst>
+      <a:bgFillStyleLst>
+        <a:solidFill>
+          <a:schemeClr val="phClr"/>
+        </a:solidFill>
+        <a:solidFill>
+          <a:schemeClr val="phClr">
+            <a:tint val="95000"/>
+            <a:satMod val="170000"/>
+          </a:schemeClr>
+        </a:solidFill>
+        <a:gradFill rotWithShape="1">
+          <a:gsLst>
+            <a:gs pos="0">
+              <a:schemeClr val="phClr">
+                <a:tint val="93000"/>
+                <a:satMod val="150000"/>
+                <a:shade val="98000"/>
+                <a:lumMod val="102000"/>
+              </a:schemeClr>
+            </a:gs>
+            <a:gs pos="50000">
+              <a:schemeClr val="phClr">
+                <a:tint val="98000"/>
+                <a:satMod val="130000"/>
+                <a:shade val="90000"/>
+                <a:lumMod val="103000"/>
+              </a:schemeClr>
+            </a:gs>
+            <a:gs pos="100000">
+              <a:schemeClr val="phClr">
+                <a:shade val="63000"/>
+                <a:satMod val="120000"/>
+              </a:schemeClr>
+            </a:gs>
+          </a:gsLst>
+          <a:lin ang="5400000" scaled="0"/>
+        </a:gradFill>
+      </a:bgFillStyleLst>
+    </a:fmtScheme>
+  </a:themeElements>
+  <a:objectDefaults>
+    <a:lnDef>
+      <a:spPr/>
+      <a:bodyPr/>
+      <a:lstStyle/>
+      <a:style>
+        <a:lnRef idx="2">
+          <a:schemeClr val="accent1"/>
+        </a:lnRef>
+        <a:fillRef idx="0">
+          <a:schemeClr val="accent1"/>
+        </a:fillRef>
+        <a:effectRef idx="1">
+          <a:schemeClr val="accent1"/>
+        </a:effectRef>
+        <a:fontRef idx="minor">
+          <a:schemeClr val="tx1"/>
+        </a:fontRef>
+      </a:style>
+    </a:lnDef>
+  </a:objectDefaults>
+  <a:extraClrSchemeLst/>
+  <a:extLst>
+    <a:ext uri="{05A4C25C-085E-4340-85A3-A5531E510DB2}">
+      <thm15:themeFamily xmlns:thm15="http://schemas.microsoft.com/office/thememl/2012/main" name="Office Theme" id="{2E142A2C-CD16-42D6-873A-C26D2A0506FA}" vid="{1BDDFF52-6CD6-40A5-AB3C-68EB2F1E4D0A}"/>
+    </a:ext>
+  </a:extLst>
+</a:theme>
 </file>